--- a/1_Linux_User_space_vs_Kernel_space.pptx
+++ b/1_Linux_User_space_vs_Kernel_space.pptx
@@ -41,6 +41,7 @@
     <p:sldId id="266" r:id="rId36"/>
     <p:sldId id="267" r:id="rId37"/>
     <p:sldId id="268" r:id="rId38"/>
+    <p:sldId id="269" r:id="rId39"/>
   </p:sldIdLst>
   <p:sldSz cx="10080625" cy="7559675"/>
   <p:notesSz cx="7559675" cy="10691813"/>
@@ -77,7 +78,7 @@
         <p:spPr>
           <a:xfrm>
             <a:off x="504000" y="301320"/>
-            <a:ext cx="9071280" cy="637200"/>
+            <a:ext cx="9070920" cy="636840"/>
           </a:xfrm>
           <a:prstGeom prst="rect">
             <a:avLst/>
@@ -117,7 +118,7 @@
         <p:spPr>
           <a:xfrm>
             <a:off x="504000" y="1769040"/>
-            <a:ext cx="4426560" cy="4384080"/>
+            <a:ext cx="4426560" cy="4383720"/>
           </a:xfrm>
           <a:prstGeom prst="rect">
             <a:avLst/>
@@ -257,7 +258,7 @@
       </p:grpSpPr>
       <p:sp>
         <p:nvSpPr>
-          <p:cNvPr id="64" name="PlaceHolder 1"/>
+          <p:cNvPr id="58" name="PlaceHolder 1"/>
           <p:cNvSpPr>
             <a:spLocks noGrp="1"/>
           </p:cNvSpPr>
@@ -268,7 +269,7 @@
         <p:spPr>
           <a:xfrm>
             <a:off x="504000" y="301320"/>
-            <a:ext cx="9071280" cy="637200"/>
+            <a:ext cx="9070920" cy="636840"/>
           </a:xfrm>
           <a:prstGeom prst="rect">
             <a:avLst/>
@@ -301,7 +302,7 @@
 </file>
 
 <file path=ppt/slideLayouts/slideLayout11.xml><?xml version="1.0" encoding="utf-8"?>
-<p:sldLayout xmlns:a="http://schemas.openxmlformats.org/drawingml/2006/main" xmlns:p="http://schemas.openxmlformats.org/presentationml/2006/main" xmlns:r="http://schemas.openxmlformats.org/officeDocument/2006/relationships" xmlns:p14="http://schemas.microsoft.com/office/powerpoint/2010/main" xmlns:p15="http://schemas.microsoft.com/office/powerpoint/2012/main" xmlns:mc="http://schemas.openxmlformats.org/markup-compatibility/2006" type="mediaAndTx" preserve="1">
+<p:sldLayout xmlns:a="http://schemas.openxmlformats.org/drawingml/2006/main" xmlns:p="http://schemas.openxmlformats.org/presentationml/2006/main" xmlns:r="http://schemas.openxmlformats.org/officeDocument/2006/relationships" xmlns:p14="http://schemas.microsoft.com/office/powerpoint/2010/main" xmlns:p15="http://schemas.microsoft.com/office/powerpoint/2012/main" xmlns:mc="http://schemas.openxmlformats.org/markup-compatibility/2006" type="blank" preserve="1">
   <p:cSld name="Centered Text">
     <p:spTree>
       <p:nvGrpSpPr>
@@ -341,7 +342,7 @@
       </p:grpSpPr>
       <p:sp>
         <p:nvSpPr>
-          <p:cNvPr id="71" name="PlaceHolder 1"/>
+          <p:cNvPr id="65" name="PlaceHolder 1"/>
           <p:cNvSpPr>
             <a:spLocks noGrp="1"/>
           </p:cNvSpPr>
@@ -352,7 +353,7 @@
         <p:spPr>
           <a:xfrm>
             <a:off x="504000" y="301320"/>
-            <a:ext cx="9071280" cy="637200"/>
+            <a:ext cx="9070920" cy="636840"/>
           </a:xfrm>
           <a:prstGeom prst="rect">
             <a:avLst/>
@@ -381,7 +382,7 @@
       </p:sp>
       <p:sp>
         <p:nvSpPr>
-          <p:cNvPr id="72" name="PlaceHolder 2"/>
+          <p:cNvPr id="66" name="PlaceHolder 2"/>
           <p:cNvSpPr>
             <a:spLocks noGrp="1"/>
           </p:cNvSpPr>
@@ -424,7 +425,7 @@
       </p:sp>
       <p:sp>
         <p:nvSpPr>
-          <p:cNvPr id="73" name="PlaceHolder 3"/>
+          <p:cNvPr id="67" name="PlaceHolder 3"/>
           <p:cNvSpPr>
             <a:spLocks noGrp="1"/>
           </p:cNvSpPr>
@@ -435,7 +436,7 @@
         <p:spPr>
           <a:xfrm>
             <a:off x="5152320" y="1769040"/>
-            <a:ext cx="4426560" cy="4384080"/>
+            <a:ext cx="4426560" cy="4383720"/>
           </a:xfrm>
           <a:prstGeom prst="rect">
             <a:avLst/>
@@ -467,7 +468,7 @@
       </p:sp>
       <p:sp>
         <p:nvSpPr>
-          <p:cNvPr id="74" name="PlaceHolder 4"/>
+          <p:cNvPr id="68" name="PlaceHolder 4"/>
           <p:cNvSpPr>
             <a:spLocks noGrp="1"/>
           </p:cNvSpPr>
@@ -532,7 +533,7 @@
       </p:grpSpPr>
       <p:sp>
         <p:nvSpPr>
-          <p:cNvPr id="81" name="PlaceHolder 1"/>
+          <p:cNvPr id="75" name="PlaceHolder 1"/>
           <p:cNvSpPr>
             <a:spLocks noGrp="1"/>
           </p:cNvSpPr>
@@ -543,7 +544,7 @@
         <p:spPr>
           <a:xfrm>
             <a:off x="504000" y="301320"/>
-            <a:ext cx="9071280" cy="637200"/>
+            <a:ext cx="9070920" cy="636840"/>
           </a:xfrm>
           <a:prstGeom prst="rect">
             <a:avLst/>
@@ -572,7 +573,7 @@
       </p:sp>
       <p:sp>
         <p:nvSpPr>
-          <p:cNvPr id="82" name="PlaceHolder 2"/>
+          <p:cNvPr id="76" name="PlaceHolder 2"/>
           <p:cNvSpPr>
             <a:spLocks noGrp="1"/>
           </p:cNvSpPr>
@@ -615,7 +616,7 @@
       </p:sp>
       <p:sp>
         <p:nvSpPr>
-          <p:cNvPr id="83" name="PlaceHolder 3"/>
+          <p:cNvPr id="77" name="PlaceHolder 3"/>
           <p:cNvSpPr>
             <a:spLocks noGrp="1"/>
           </p:cNvSpPr>
@@ -658,7 +659,7 @@
       </p:sp>
       <p:sp>
         <p:nvSpPr>
-          <p:cNvPr id="84" name="PlaceHolder 4"/>
+          <p:cNvPr id="78" name="PlaceHolder 4"/>
           <p:cNvSpPr>
             <a:spLocks noGrp="1"/>
           </p:cNvSpPr>
@@ -669,7 +670,7 @@
         <p:spPr>
           <a:xfrm>
             <a:off x="504000" y="4059000"/>
-            <a:ext cx="9071280" cy="2090880"/>
+            <a:ext cx="9070920" cy="2090880"/>
           </a:xfrm>
           <a:prstGeom prst="rect">
             <a:avLst/>
@@ -723,7 +724,7 @@
       </p:grpSpPr>
       <p:sp>
         <p:nvSpPr>
-          <p:cNvPr id="90" name="PlaceHolder 1"/>
+          <p:cNvPr id="84" name="PlaceHolder 1"/>
           <p:cNvSpPr>
             <a:spLocks noGrp="1"/>
           </p:cNvSpPr>
@@ -734,7 +735,7 @@
         <p:spPr>
           <a:xfrm>
             <a:off x="504000" y="301320"/>
-            <a:ext cx="9071280" cy="637200"/>
+            <a:ext cx="9070920" cy="636840"/>
           </a:xfrm>
           <a:prstGeom prst="rect">
             <a:avLst/>
@@ -763,7 +764,7 @@
       </p:sp>
       <p:sp>
         <p:nvSpPr>
-          <p:cNvPr id="91" name="PlaceHolder 2"/>
+          <p:cNvPr id="85" name="PlaceHolder 2"/>
           <p:cNvSpPr>
             <a:spLocks noGrp="1"/>
           </p:cNvSpPr>
@@ -774,7 +775,7 @@
         <p:spPr>
           <a:xfrm>
             <a:off x="504000" y="1769040"/>
-            <a:ext cx="9071280" cy="2090880"/>
+            <a:ext cx="9070920" cy="2090880"/>
           </a:xfrm>
           <a:prstGeom prst="rect">
             <a:avLst/>
@@ -806,7 +807,7 @@
       </p:sp>
       <p:sp>
         <p:nvSpPr>
-          <p:cNvPr id="92" name="PlaceHolder 3"/>
+          <p:cNvPr id="86" name="PlaceHolder 3"/>
           <p:cNvSpPr>
             <a:spLocks noGrp="1"/>
           </p:cNvSpPr>
@@ -817,7 +818,7 @@
         <p:spPr>
           <a:xfrm>
             <a:off x="504000" y="4059000"/>
-            <a:ext cx="9071280" cy="2090880"/>
+            <a:ext cx="9070920" cy="2090880"/>
           </a:xfrm>
           <a:prstGeom prst="rect">
             <a:avLst/>
@@ -871,7 +872,7 @@
       </p:grpSpPr>
       <p:sp>
         <p:nvSpPr>
-          <p:cNvPr id="100" name="PlaceHolder 1"/>
+          <p:cNvPr id="94" name="PlaceHolder 1"/>
           <p:cNvSpPr>
             <a:spLocks noGrp="1"/>
           </p:cNvSpPr>
@@ -882,7 +883,7 @@
         <p:spPr>
           <a:xfrm>
             <a:off x="504000" y="301320"/>
-            <a:ext cx="9071280" cy="637200"/>
+            <a:ext cx="9070920" cy="636840"/>
           </a:xfrm>
           <a:prstGeom prst="rect">
             <a:avLst/>
@@ -911,7 +912,7 @@
       </p:sp>
       <p:sp>
         <p:nvSpPr>
-          <p:cNvPr id="101" name="PlaceHolder 2"/>
+          <p:cNvPr id="95" name="PlaceHolder 2"/>
           <p:cNvSpPr>
             <a:spLocks noGrp="1"/>
           </p:cNvSpPr>
@@ -954,7 +955,7 @@
       </p:sp>
       <p:sp>
         <p:nvSpPr>
-          <p:cNvPr id="102" name="PlaceHolder 3"/>
+          <p:cNvPr id="96" name="PlaceHolder 3"/>
           <p:cNvSpPr>
             <a:spLocks noGrp="1"/>
           </p:cNvSpPr>
@@ -997,7 +998,7 @@
       </p:sp>
       <p:sp>
         <p:nvSpPr>
-          <p:cNvPr id="103" name="PlaceHolder 4"/>
+          <p:cNvPr id="97" name="PlaceHolder 4"/>
           <p:cNvSpPr>
             <a:spLocks noGrp="1"/>
           </p:cNvSpPr>
@@ -1040,7 +1041,7 @@
       </p:sp>
       <p:sp>
         <p:nvSpPr>
-          <p:cNvPr id="104" name="PlaceHolder 5"/>
+          <p:cNvPr id="98" name="PlaceHolder 5"/>
           <p:cNvSpPr>
             <a:spLocks noGrp="1"/>
           </p:cNvSpPr>
@@ -1149,7 +1150,7 @@
       </p:grpSpPr>
       <p:sp>
         <p:nvSpPr>
-          <p:cNvPr id="119" name="PlaceHolder 1"/>
+          <p:cNvPr id="107" name="PlaceHolder 1"/>
           <p:cNvSpPr>
             <a:spLocks noGrp="1"/>
           </p:cNvSpPr>
@@ -1160,7 +1161,7 @@
         <p:spPr>
           <a:xfrm>
             <a:off x="504000" y="301320"/>
-            <a:ext cx="9071280" cy="637200"/>
+            <a:ext cx="9070920" cy="636840"/>
           </a:xfrm>
           <a:prstGeom prst="rect">
             <a:avLst/>
@@ -1189,7 +1190,7 @@
       </p:sp>
       <p:sp>
         <p:nvSpPr>
-          <p:cNvPr id="120" name="PlaceHolder 2"/>
+          <p:cNvPr id="108" name="PlaceHolder 2"/>
           <p:cNvSpPr>
             <a:spLocks noGrp="1"/>
           </p:cNvSpPr>
@@ -1200,7 +1201,7 @@
         <p:spPr>
           <a:xfrm>
             <a:off x="504000" y="1769040"/>
-            <a:ext cx="9071280" cy="4384080"/>
+            <a:ext cx="9070920" cy="4383720"/>
           </a:xfrm>
           <a:prstGeom prst="rect">
             <a:avLst/>
@@ -1254,7 +1255,7 @@
       </p:grpSpPr>
       <p:sp>
         <p:nvSpPr>
-          <p:cNvPr id="125" name="PlaceHolder 1"/>
+          <p:cNvPr id="113" name="PlaceHolder 1"/>
           <p:cNvSpPr>
             <a:spLocks noGrp="1"/>
           </p:cNvSpPr>
@@ -1265,7 +1266,7 @@
         <p:spPr>
           <a:xfrm>
             <a:off x="504000" y="301320"/>
-            <a:ext cx="9071280" cy="637200"/>
+            <a:ext cx="9070920" cy="636840"/>
           </a:xfrm>
           <a:prstGeom prst="rect">
             <a:avLst/>
@@ -1294,7 +1295,7 @@
       </p:sp>
       <p:sp>
         <p:nvSpPr>
-          <p:cNvPr id="126" name="PlaceHolder 2"/>
+          <p:cNvPr id="114" name="PlaceHolder 2"/>
           <p:cNvSpPr>
             <a:spLocks noGrp="1"/>
           </p:cNvSpPr>
@@ -1305,7 +1306,7 @@
         <p:spPr>
           <a:xfrm>
             <a:off x="504000" y="1769040"/>
-            <a:ext cx="9071280" cy="4384080"/>
+            <a:ext cx="9070920" cy="4383720"/>
           </a:xfrm>
           <a:prstGeom prst="rect">
             <a:avLst/>
@@ -1370,7 +1371,7 @@
         <p:spPr>
           <a:xfrm>
             <a:off x="504000" y="301320"/>
-            <a:ext cx="9071280" cy="637200"/>
+            <a:ext cx="9070920" cy="636840"/>
           </a:xfrm>
           <a:prstGeom prst="rect">
             <a:avLst/>
@@ -1496,7 +1497,7 @@
         <p:spPr>
           <a:xfrm>
             <a:off x="504000" y="4059000"/>
-            <a:ext cx="9071280" cy="2090880"/>
+            <a:ext cx="9070920" cy="2090880"/>
           </a:xfrm>
           <a:prstGeom prst="rect">
             <a:avLst/>
@@ -1550,7 +1551,7 @@
       </p:grpSpPr>
       <p:sp>
         <p:nvSpPr>
-          <p:cNvPr id="132" name="PlaceHolder 1"/>
+          <p:cNvPr id="120" name="PlaceHolder 1"/>
           <p:cNvSpPr>
             <a:spLocks noGrp="1"/>
           </p:cNvSpPr>
@@ -1561,7 +1562,7 @@
         <p:spPr>
           <a:xfrm>
             <a:off x="504000" y="301320"/>
-            <a:ext cx="9071280" cy="637200"/>
+            <a:ext cx="9070920" cy="636840"/>
           </a:xfrm>
           <a:prstGeom prst="rect">
             <a:avLst/>
@@ -1590,7 +1591,7 @@
       </p:sp>
       <p:sp>
         <p:nvSpPr>
-          <p:cNvPr id="133" name="PlaceHolder 2"/>
+          <p:cNvPr id="121" name="PlaceHolder 2"/>
           <p:cNvSpPr>
             <a:spLocks noGrp="1"/>
           </p:cNvSpPr>
@@ -1601,7 +1602,7 @@
         <p:spPr>
           <a:xfrm>
             <a:off x="504000" y="1769040"/>
-            <a:ext cx="4426560" cy="4384080"/>
+            <a:ext cx="4426560" cy="4383720"/>
           </a:xfrm>
           <a:prstGeom prst="rect">
             <a:avLst/>
@@ -1633,7 +1634,7 @@
       </p:sp>
       <p:sp>
         <p:nvSpPr>
-          <p:cNvPr id="134" name="PlaceHolder 3"/>
+          <p:cNvPr id="122" name="PlaceHolder 3"/>
           <p:cNvSpPr>
             <a:spLocks noGrp="1"/>
           </p:cNvSpPr>
@@ -1644,7 +1645,7 @@
         <p:spPr>
           <a:xfrm>
             <a:off x="5152320" y="1769040"/>
-            <a:ext cx="4426560" cy="4384080"/>
+            <a:ext cx="4426560" cy="4383720"/>
           </a:xfrm>
           <a:prstGeom prst="rect">
             <a:avLst/>
@@ -1698,7 +1699,7 @@
       </p:grpSpPr>
       <p:sp>
         <p:nvSpPr>
-          <p:cNvPr id="138" name="PlaceHolder 1"/>
+          <p:cNvPr id="126" name="PlaceHolder 1"/>
           <p:cNvSpPr>
             <a:spLocks noGrp="1"/>
           </p:cNvSpPr>
@@ -1709,7 +1710,7 @@
         <p:spPr>
           <a:xfrm>
             <a:off x="504000" y="301320"/>
-            <a:ext cx="9071280" cy="637200"/>
+            <a:ext cx="9070920" cy="636840"/>
           </a:xfrm>
           <a:prstGeom prst="rect">
             <a:avLst/>
@@ -1742,7 +1743,7 @@
 </file>
 
 <file path=ppt/slideLayouts/slideLayout22.xml><?xml version="1.0" encoding="utf-8"?>
-<p:sldLayout xmlns:a="http://schemas.openxmlformats.org/drawingml/2006/main" xmlns:p="http://schemas.openxmlformats.org/presentationml/2006/main" xmlns:r="http://schemas.openxmlformats.org/officeDocument/2006/relationships" xmlns:p14="http://schemas.microsoft.com/office/powerpoint/2010/main" xmlns:p15="http://schemas.microsoft.com/office/powerpoint/2012/main" xmlns:mc="http://schemas.openxmlformats.org/markup-compatibility/2006" type="mediaAndTx" preserve="1">
+<p:sldLayout xmlns:a="http://schemas.openxmlformats.org/drawingml/2006/main" xmlns:p="http://schemas.openxmlformats.org/presentationml/2006/main" xmlns:r="http://schemas.openxmlformats.org/officeDocument/2006/relationships" xmlns:p14="http://schemas.microsoft.com/office/powerpoint/2010/main" xmlns:p15="http://schemas.microsoft.com/office/powerpoint/2012/main" xmlns:mc="http://schemas.openxmlformats.org/markup-compatibility/2006" type="blank" preserve="1">
   <p:cSld name="Default 9">
     <p:spTree>
       <p:nvGrpSpPr>
@@ -1782,7 +1783,7 @@
       </p:grpSpPr>
       <p:sp>
         <p:nvSpPr>
-          <p:cNvPr id="147" name="PlaceHolder 1"/>
+          <p:cNvPr id="135" name="PlaceHolder 1"/>
           <p:cNvSpPr>
             <a:spLocks noGrp="1"/>
           </p:cNvSpPr>
@@ -1793,7 +1794,7 @@
         <p:spPr>
           <a:xfrm>
             <a:off x="504000" y="301320"/>
-            <a:ext cx="9071280" cy="637200"/>
+            <a:ext cx="9070920" cy="636840"/>
           </a:xfrm>
           <a:prstGeom prst="rect">
             <a:avLst/>
@@ -1822,7 +1823,7 @@
       </p:sp>
       <p:sp>
         <p:nvSpPr>
-          <p:cNvPr id="148" name="PlaceHolder 2"/>
+          <p:cNvPr id="136" name="PlaceHolder 2"/>
           <p:cNvSpPr>
             <a:spLocks noGrp="1"/>
           </p:cNvSpPr>
@@ -1865,7 +1866,7 @@
       </p:sp>
       <p:sp>
         <p:nvSpPr>
-          <p:cNvPr id="149" name="PlaceHolder 3"/>
+          <p:cNvPr id="137" name="PlaceHolder 3"/>
           <p:cNvSpPr>
             <a:spLocks noGrp="1"/>
           </p:cNvSpPr>
@@ -1876,7 +1877,7 @@
         <p:spPr>
           <a:xfrm>
             <a:off x="5152320" y="1769040"/>
-            <a:ext cx="4426560" cy="4384080"/>
+            <a:ext cx="4426560" cy="4383720"/>
           </a:xfrm>
           <a:prstGeom prst="rect">
             <a:avLst/>
@@ -1908,7 +1909,7 @@
       </p:sp>
       <p:sp>
         <p:nvSpPr>
-          <p:cNvPr id="150" name="PlaceHolder 4"/>
+          <p:cNvPr id="138" name="PlaceHolder 4"/>
           <p:cNvSpPr>
             <a:spLocks noGrp="1"/>
           </p:cNvSpPr>
@@ -1973,7 +1974,7 @@
       </p:grpSpPr>
       <p:sp>
         <p:nvSpPr>
-          <p:cNvPr id="157" name="PlaceHolder 1"/>
+          <p:cNvPr id="145" name="PlaceHolder 1"/>
           <p:cNvSpPr>
             <a:spLocks noGrp="1"/>
           </p:cNvSpPr>
@@ -1984,7 +1985,7 @@
         <p:spPr>
           <a:xfrm>
             <a:off x="504000" y="301320"/>
-            <a:ext cx="9071280" cy="637200"/>
+            <a:ext cx="9070920" cy="636840"/>
           </a:xfrm>
           <a:prstGeom prst="rect">
             <a:avLst/>
@@ -2013,7 +2014,7 @@
       </p:sp>
       <p:sp>
         <p:nvSpPr>
-          <p:cNvPr id="158" name="PlaceHolder 2"/>
+          <p:cNvPr id="146" name="PlaceHolder 2"/>
           <p:cNvSpPr>
             <a:spLocks noGrp="1"/>
           </p:cNvSpPr>
@@ -2024,7 +2025,7 @@
         <p:spPr>
           <a:xfrm>
             <a:off x="504000" y="1769040"/>
-            <a:ext cx="4426560" cy="4384080"/>
+            <a:ext cx="4426560" cy="4383720"/>
           </a:xfrm>
           <a:prstGeom prst="rect">
             <a:avLst/>
@@ -2056,7 +2057,7 @@
       </p:sp>
       <p:sp>
         <p:nvSpPr>
-          <p:cNvPr id="159" name="PlaceHolder 3"/>
+          <p:cNvPr id="147" name="PlaceHolder 3"/>
           <p:cNvSpPr>
             <a:spLocks noGrp="1"/>
           </p:cNvSpPr>
@@ -2099,7 +2100,7 @@
       </p:sp>
       <p:sp>
         <p:nvSpPr>
-          <p:cNvPr id="160" name="PlaceHolder 4"/>
+          <p:cNvPr id="148" name="PlaceHolder 4"/>
           <p:cNvSpPr>
             <a:spLocks noGrp="1"/>
           </p:cNvSpPr>
@@ -2175,7 +2176,7 @@
         <p:spPr>
           <a:xfrm>
             <a:off x="504000" y="301320"/>
-            <a:ext cx="9071280" cy="637200"/>
+            <a:ext cx="9070920" cy="636840"/>
           </a:xfrm>
           <a:prstGeom prst="rect">
             <a:avLst/>
@@ -2215,7 +2216,7 @@
         <p:spPr>
           <a:xfrm>
             <a:off x="504000" y="1769040"/>
-            <a:ext cx="9071280" cy="2090880"/>
+            <a:ext cx="9070920" cy="2090880"/>
           </a:xfrm>
           <a:prstGeom prst="rect">
             <a:avLst/>
@@ -2258,7 +2259,7 @@
         <p:spPr>
           <a:xfrm>
             <a:off x="504000" y="4059000"/>
-            <a:ext cx="9071280" cy="2090880"/>
+            <a:ext cx="9070920" cy="2090880"/>
           </a:xfrm>
           <a:prstGeom prst="rect">
             <a:avLst/>
@@ -2323,7 +2324,7 @@
         <p:spPr>
           <a:xfrm>
             <a:off x="504000" y="301320"/>
-            <a:ext cx="9071280" cy="637200"/>
+            <a:ext cx="9070920" cy="636840"/>
           </a:xfrm>
           <a:prstGeom prst="rect">
             <a:avLst/>
@@ -2590,7 +2591,7 @@
       </p:grpSpPr>
       <p:sp>
         <p:nvSpPr>
-          <p:cNvPr id="47" name="PlaceHolder 1"/>
+          <p:cNvPr id="41" name="PlaceHolder 1"/>
           <p:cNvSpPr>
             <a:spLocks noGrp="1"/>
           </p:cNvSpPr>
@@ -2601,7 +2602,7 @@
         <p:spPr>
           <a:xfrm>
             <a:off x="504000" y="301320"/>
-            <a:ext cx="9071280" cy="637200"/>
+            <a:ext cx="9070920" cy="636840"/>
           </a:xfrm>
           <a:prstGeom prst="rect">
             <a:avLst/>
@@ -2630,7 +2631,7 @@
       </p:sp>
       <p:sp>
         <p:nvSpPr>
-          <p:cNvPr id="48" name="PlaceHolder 2"/>
+          <p:cNvPr id="42" name="PlaceHolder 2"/>
           <p:cNvSpPr>
             <a:spLocks noGrp="1"/>
           </p:cNvSpPr>
@@ -2641,7 +2642,7 @@
         <p:spPr>
           <a:xfrm>
             <a:off x="504000" y="1769040"/>
-            <a:ext cx="9071280" cy="4384080"/>
+            <a:ext cx="9070920" cy="4383720"/>
           </a:xfrm>
           <a:prstGeom prst="rect">
             <a:avLst/>
@@ -2679,6 +2680,111 @@
 <file path=ppt/slideLayouts/slideLayout8.xml><?xml version="1.0" encoding="utf-8"?>
 <p:sldLayout xmlns:a="http://schemas.openxmlformats.org/drawingml/2006/main" xmlns:p="http://schemas.openxmlformats.org/presentationml/2006/main" xmlns:r="http://schemas.openxmlformats.org/officeDocument/2006/relationships" xmlns:p14="http://schemas.microsoft.com/office/powerpoint/2010/main" xmlns:p15="http://schemas.microsoft.com/office/powerpoint/2012/main" xmlns:mc="http://schemas.openxmlformats.org/markup-compatibility/2006" type="obj" preserve="1">
   <p:cSld name="Title, Content">
+    <p:spTree>
+      <p:nvGrpSpPr>
+        <p:cNvPr id="1" name=""/>
+        <p:cNvGrpSpPr/>
+        <p:nvPr/>
+      </p:nvGrpSpPr>
+      <p:grpSpPr>
+        <a:xfrm>
+          <a:off x="0" y="0"/>
+          <a:ext cx="0" cy="0"/>
+          <a:chOff x="0" y="0"/>
+          <a:chExt cx="0" cy="0"/>
+        </a:xfrm>
+      </p:grpSpPr>
+      <p:sp>
+        <p:nvSpPr>
+          <p:cNvPr id="46" name="PlaceHolder 1"/>
+          <p:cNvSpPr>
+            <a:spLocks noGrp="1"/>
+          </p:cNvSpPr>
+          <p:nvPr>
+            <p:ph type="title"/>
+          </p:nvPr>
+        </p:nvSpPr>
+        <p:spPr>
+          <a:xfrm>
+            <a:off x="504000" y="301320"/>
+            <a:ext cx="9070920" cy="636840"/>
+          </a:xfrm>
+          <a:prstGeom prst="rect">
+            <a:avLst/>
+          </a:prstGeom>
+          <a:noFill/>
+          <a:ln w="0">
+            <a:noFill/>
+          </a:ln>
+        </p:spPr>
+        <p:txBody>
+          <a:bodyPr lIns="0" rIns="0" tIns="0" bIns="0" anchor="ctr">
+            <a:noAutofit/>
+          </a:bodyPr>
+          <a:p>
+            <a:pPr indent="0" algn="ctr">
+              <a:buNone/>
+            </a:pPr>
+            <a:endParaRPr b="0" lang="en-US" sz="4400" spc="-1" strike="noStrike">
+              <a:solidFill>
+                <a:srgbClr val="000000"/>
+              </a:solidFill>
+              <a:latin typeface="Arial"/>
+            </a:endParaRPr>
+          </a:p>
+        </p:txBody>
+      </p:sp>
+      <p:sp>
+        <p:nvSpPr>
+          <p:cNvPr id="47" name="PlaceHolder 2"/>
+          <p:cNvSpPr>
+            <a:spLocks noGrp="1"/>
+          </p:cNvSpPr>
+          <p:nvPr>
+            <p:ph/>
+          </p:nvPr>
+        </p:nvSpPr>
+        <p:spPr>
+          <a:xfrm>
+            <a:off x="504000" y="1769040"/>
+            <a:ext cx="9070920" cy="4383720"/>
+          </a:xfrm>
+          <a:prstGeom prst="rect">
+            <a:avLst/>
+          </a:prstGeom>
+          <a:noFill/>
+          <a:ln w="0">
+            <a:noFill/>
+          </a:ln>
+        </p:spPr>
+        <p:txBody>
+          <a:bodyPr lIns="0" rIns="0" tIns="0" bIns="0" anchor="t">
+            <a:normAutofit/>
+          </a:bodyPr>
+          <a:p>
+            <a:pPr indent="0">
+              <a:spcBef>
+                <a:spcPts val="1417"/>
+              </a:spcBef>
+              <a:buNone/>
+            </a:pPr>
+            <a:endParaRPr b="0" lang="en-US" sz="3200" spc="-1" strike="noStrike">
+              <a:solidFill>
+                <a:srgbClr val="000000"/>
+              </a:solidFill>
+              <a:latin typeface="Arial"/>
+            </a:endParaRPr>
+          </a:p>
+        </p:txBody>
+      </p:sp>
+    </p:spTree>
+  </p:cSld>
+</p:sldLayout>
+</file>
+
+<file path=ppt/slideLayouts/slideLayout9.xml><?xml version="1.0" encoding="utf-8"?>
+<p:sldLayout xmlns:a="http://schemas.openxmlformats.org/drawingml/2006/main" xmlns:p="http://schemas.openxmlformats.org/presentationml/2006/main" xmlns:r="http://schemas.openxmlformats.org/officeDocument/2006/relationships" xmlns:p14="http://schemas.microsoft.com/office/powerpoint/2010/main" xmlns:p15="http://schemas.microsoft.com/office/powerpoint/2012/main" xmlns:mc="http://schemas.openxmlformats.org/markup-compatibility/2006" type="twoObj" preserve="1">
+  <p:cSld name="Title, 2 Content">
     <p:spTree>
       <p:nvGrpSpPr>
         <p:cNvPr id="1" name=""/>
@@ -2706,7 +2812,7 @@
         <p:spPr>
           <a:xfrm>
             <a:off x="504000" y="301320"/>
-            <a:ext cx="9071280" cy="637200"/>
+            <a:ext cx="9070920" cy="636840"/>
           </a:xfrm>
           <a:prstGeom prst="rect">
             <a:avLst/>
@@ -2746,7 +2852,7 @@
         <p:spPr>
           <a:xfrm>
             <a:off x="504000" y="1769040"/>
-            <a:ext cx="9071280" cy="4384080"/>
+            <a:ext cx="4426560" cy="4383720"/>
           </a:xfrm>
           <a:prstGeom prst="rect">
             <a:avLst/>
@@ -2776,114 +2882,9 @@
           </a:p>
         </p:txBody>
       </p:sp>
-    </p:spTree>
-  </p:cSld>
-</p:sldLayout>
-</file>
-
-<file path=ppt/slideLayouts/slideLayout9.xml><?xml version="1.0" encoding="utf-8"?>
-<p:sldLayout xmlns:a="http://schemas.openxmlformats.org/drawingml/2006/main" xmlns:p="http://schemas.openxmlformats.org/presentationml/2006/main" xmlns:r="http://schemas.openxmlformats.org/officeDocument/2006/relationships" xmlns:p14="http://schemas.microsoft.com/office/powerpoint/2010/main" xmlns:p15="http://schemas.microsoft.com/office/powerpoint/2012/main" xmlns:mc="http://schemas.openxmlformats.org/markup-compatibility/2006" type="twoObj" preserve="1">
-  <p:cSld name="Title, 2 Content">
-    <p:spTree>
-      <p:nvGrpSpPr>
-        <p:cNvPr id="1" name=""/>
-        <p:cNvGrpSpPr/>
-        <p:nvPr/>
-      </p:nvGrpSpPr>
-      <p:grpSpPr>
-        <a:xfrm>
-          <a:off x="0" y="0"/>
-          <a:ext cx="0" cy="0"/>
-          <a:chOff x="0" y="0"/>
-          <a:chExt cx="0" cy="0"/>
-        </a:xfrm>
-      </p:grpSpPr>
       <p:sp>
         <p:nvSpPr>
-          <p:cNvPr id="58" name="PlaceHolder 1"/>
-          <p:cNvSpPr>
-            <a:spLocks noGrp="1"/>
-          </p:cNvSpPr>
-          <p:nvPr>
-            <p:ph type="title"/>
-          </p:nvPr>
-        </p:nvSpPr>
-        <p:spPr>
-          <a:xfrm>
-            <a:off x="504000" y="301320"/>
-            <a:ext cx="9071280" cy="637200"/>
-          </a:xfrm>
-          <a:prstGeom prst="rect">
-            <a:avLst/>
-          </a:prstGeom>
-          <a:noFill/>
-          <a:ln w="0">
-            <a:noFill/>
-          </a:ln>
-        </p:spPr>
-        <p:txBody>
-          <a:bodyPr lIns="0" rIns="0" tIns="0" bIns="0" anchor="ctr">
-            <a:noAutofit/>
-          </a:bodyPr>
-          <a:p>
-            <a:pPr indent="0" algn="ctr">
-              <a:buNone/>
-            </a:pPr>
-            <a:endParaRPr b="0" lang="en-US" sz="4400" spc="-1" strike="noStrike">
-              <a:solidFill>
-                <a:srgbClr val="000000"/>
-              </a:solidFill>
-              <a:latin typeface="Arial"/>
-            </a:endParaRPr>
-          </a:p>
-        </p:txBody>
-      </p:sp>
-      <p:sp>
-        <p:nvSpPr>
-          <p:cNvPr id="59" name="PlaceHolder 2"/>
-          <p:cNvSpPr>
-            <a:spLocks noGrp="1"/>
-          </p:cNvSpPr>
-          <p:nvPr>
-            <p:ph/>
-          </p:nvPr>
-        </p:nvSpPr>
-        <p:spPr>
-          <a:xfrm>
-            <a:off x="504000" y="1769040"/>
-            <a:ext cx="4426560" cy="4384080"/>
-          </a:xfrm>
-          <a:prstGeom prst="rect">
-            <a:avLst/>
-          </a:prstGeom>
-          <a:noFill/>
-          <a:ln w="0">
-            <a:noFill/>
-          </a:ln>
-        </p:spPr>
-        <p:txBody>
-          <a:bodyPr lIns="0" rIns="0" tIns="0" bIns="0" anchor="t">
-            <a:normAutofit/>
-          </a:bodyPr>
-          <a:p>
-            <a:pPr indent="0">
-              <a:spcBef>
-                <a:spcPts val="1417"/>
-              </a:spcBef>
-              <a:buNone/>
-            </a:pPr>
-            <a:endParaRPr b="0" lang="en-US" sz="3200" spc="-1" strike="noStrike">
-              <a:solidFill>
-                <a:srgbClr val="000000"/>
-              </a:solidFill>
-              <a:latin typeface="Arial"/>
-            </a:endParaRPr>
-          </a:p>
-        </p:txBody>
-      </p:sp>
-      <p:sp>
-        <p:nvSpPr>
-          <p:cNvPr id="60" name="PlaceHolder 3"/>
+          <p:cNvPr id="54" name="PlaceHolder 3"/>
           <p:cNvSpPr>
             <a:spLocks noGrp="1"/>
           </p:cNvSpPr>
@@ -2894,7 +2895,7 @@
         <p:spPr>
           <a:xfrm>
             <a:off x="5152320" y="1769040"/>
-            <a:ext cx="4426560" cy="4384080"/>
+            <a:ext cx="4426560" cy="4383720"/>
           </a:xfrm>
           <a:prstGeom prst="rect">
             <a:avLst/>
@@ -2959,7 +2960,7 @@
         <p:spPr>
           <a:xfrm>
             <a:off x="0" y="5806440"/>
-            <a:ext cx="10079280" cy="1753920"/>
+            <a:ext cx="10078920" cy="1753560"/>
           </a:xfrm>
           <a:prstGeom prst="rect">
             <a:avLst/>
@@ -2982,7 +2983,7 @@
         <p:spPr>
           <a:xfrm>
             <a:off x="504000" y="301320"/>
-            <a:ext cx="9071280" cy="637200"/>
+            <a:ext cx="9070920" cy="636840"/>
           </a:xfrm>
           <a:prstGeom prst="rect">
             <a:avLst/>
@@ -3031,7 +3032,7 @@
         <p:spPr>
           <a:xfrm>
             <a:off x="504000" y="1769040"/>
-            <a:ext cx="4426560" cy="4384080"/>
+            <a:ext cx="4426200" cy="4383720"/>
           </a:xfrm>
           <a:prstGeom prst="rect">
             <a:avLst/>
@@ -3043,7 +3044,7 @@
         </p:spPr>
         <p:txBody>
           <a:bodyPr lIns="0" rIns="0" tIns="0" bIns="0" anchor="t">
-            <a:noAutofit/>
+            <a:normAutofit/>
           </a:bodyPr>
           <a:p>
             <a:pPr marL="432000" indent="-324000">
@@ -3255,8 +3256,8 @@
         </p:nvSpPr>
         <p:spPr>
           <a:xfrm>
-            <a:off x="5152680" y="1769040"/>
-            <a:ext cx="4426560" cy="2090880"/>
+            <a:off x="5152320" y="1769040"/>
+            <a:ext cx="4426200" cy="2090520"/>
           </a:xfrm>
           <a:prstGeom prst="rect">
             <a:avLst/>
@@ -3268,7 +3269,7 @@
         </p:spPr>
         <p:txBody>
           <a:bodyPr lIns="0" rIns="0" tIns="0" bIns="0" anchor="t">
-            <a:noAutofit/>
+            <a:normAutofit fontScale="71666"/>
           </a:bodyPr>
           <a:p>
             <a:pPr marL="432000" indent="-324000">
@@ -3480,8 +3481,8 @@
         </p:nvSpPr>
         <p:spPr>
           <a:xfrm>
-            <a:off x="5152680" y="4059360"/>
-            <a:ext cx="4426560" cy="2090880"/>
+            <a:off x="5152320" y="4059000"/>
+            <a:ext cx="4426200" cy="2090520"/>
           </a:xfrm>
           <a:prstGeom prst="rect">
             <a:avLst/>
@@ -3493,7 +3494,7 @@
         </p:spPr>
         <p:txBody>
           <a:bodyPr lIns="0" rIns="0" tIns="0" bIns="0" anchor="t">
-            <a:noAutofit/>
+            <a:normAutofit fontScale="71666"/>
           </a:bodyPr>
           <a:p>
             <a:pPr marL="432000" indent="-324000">
@@ -3721,7 +3722,7 @@
       </p:grpSpPr>
       <p:pic>
         <p:nvPicPr>
-          <p:cNvPr id="61" name="" descr=""/>
+          <p:cNvPr id="55" name="" descr=""/>
           <p:cNvPicPr/>
           <p:nvPr/>
         </p:nvPicPr>
@@ -3732,7 +3733,7 @@
         <p:spPr>
           <a:xfrm>
             <a:off x="0" y="5806440"/>
-            <a:ext cx="10079280" cy="1753920"/>
+            <a:ext cx="10078920" cy="1753560"/>
           </a:xfrm>
           <a:prstGeom prst="rect">
             <a:avLst/>
@@ -3744,7 +3745,7 @@
       </p:pic>
       <p:sp>
         <p:nvSpPr>
-          <p:cNvPr id="62" name="PlaceHolder 1"/>
+          <p:cNvPr id="56" name="PlaceHolder 1"/>
           <p:cNvSpPr>
             <a:spLocks noGrp="1"/>
           </p:cNvSpPr>
@@ -3755,7 +3756,7 @@
         <p:spPr>
           <a:xfrm>
             <a:off x="504000" y="301320"/>
-            <a:ext cx="9071280" cy="637200"/>
+            <a:ext cx="9070920" cy="636840"/>
           </a:xfrm>
           <a:prstGeom prst="rect">
             <a:avLst/>
@@ -3793,7 +3794,7 @@
       </p:sp>
       <p:sp>
         <p:nvSpPr>
-          <p:cNvPr id="63" name="PlaceHolder 2"/>
+          <p:cNvPr id="57" name="PlaceHolder 2"/>
           <p:cNvSpPr>
             <a:spLocks noGrp="1"/>
           </p:cNvSpPr>
@@ -4044,7 +4045,7 @@
       </p:grpSpPr>
       <p:pic>
         <p:nvPicPr>
-          <p:cNvPr id="65" name="" descr=""/>
+          <p:cNvPr id="59" name="" descr=""/>
           <p:cNvPicPr/>
           <p:nvPr/>
         </p:nvPicPr>
@@ -4055,7 +4056,7 @@
         <p:spPr>
           <a:xfrm>
             <a:off x="0" y="5806440"/>
-            <a:ext cx="10079280" cy="1753920"/>
+            <a:ext cx="10078920" cy="1753560"/>
           </a:xfrm>
           <a:prstGeom prst="rect">
             <a:avLst/>
@@ -4093,7 +4094,7 @@
       </p:grpSpPr>
       <p:pic>
         <p:nvPicPr>
-          <p:cNvPr id="66" name="" descr=""/>
+          <p:cNvPr id="60" name="" descr=""/>
           <p:cNvPicPr/>
           <p:nvPr/>
         </p:nvPicPr>
@@ -4104,7 +4105,7 @@
         <p:spPr>
           <a:xfrm>
             <a:off x="0" y="5806440"/>
-            <a:ext cx="10079280" cy="1753920"/>
+            <a:ext cx="10078920" cy="1753560"/>
           </a:xfrm>
           <a:prstGeom prst="rect">
             <a:avLst/>
@@ -4116,7 +4117,7 @@
       </p:pic>
       <p:sp>
         <p:nvSpPr>
-          <p:cNvPr id="67" name="PlaceHolder 1"/>
+          <p:cNvPr id="61" name="PlaceHolder 1"/>
           <p:cNvSpPr>
             <a:spLocks noGrp="1"/>
           </p:cNvSpPr>
@@ -4127,7 +4128,7 @@
         <p:spPr>
           <a:xfrm>
             <a:off x="504000" y="301320"/>
-            <a:ext cx="9071280" cy="637200"/>
+            <a:ext cx="9070920" cy="636840"/>
           </a:xfrm>
           <a:prstGeom prst="rect">
             <a:avLst/>
@@ -4165,7 +4166,7 @@
       </p:sp>
       <p:sp>
         <p:nvSpPr>
-          <p:cNvPr id="68" name="PlaceHolder 2"/>
+          <p:cNvPr id="62" name="PlaceHolder 2"/>
           <p:cNvSpPr>
             <a:spLocks noGrp="1"/>
           </p:cNvSpPr>
@@ -4176,7 +4177,7 @@
         <p:spPr>
           <a:xfrm>
             <a:off x="504000" y="1769040"/>
-            <a:ext cx="4426560" cy="2090880"/>
+            <a:ext cx="4426200" cy="2090520"/>
           </a:xfrm>
           <a:prstGeom prst="rect">
             <a:avLst/>
@@ -4188,7 +4189,7 @@
         </p:spPr>
         <p:txBody>
           <a:bodyPr lIns="0" rIns="0" tIns="0" bIns="0" anchor="t">
-            <a:noAutofit/>
+            <a:normAutofit fontScale="71666"/>
           </a:bodyPr>
           <a:p>
             <a:pPr marL="432000" indent="-324000">
@@ -4390,7 +4391,7 @@
       </p:sp>
       <p:sp>
         <p:nvSpPr>
-          <p:cNvPr id="69" name="PlaceHolder 3"/>
+          <p:cNvPr id="63" name="PlaceHolder 3"/>
           <p:cNvSpPr>
             <a:spLocks noGrp="1"/>
           </p:cNvSpPr>
@@ -4400,8 +4401,8 @@
         </p:nvSpPr>
         <p:spPr>
           <a:xfrm>
-            <a:off x="5152680" y="1769040"/>
-            <a:ext cx="4426560" cy="4384080"/>
+            <a:off x="5152320" y="1769040"/>
+            <a:ext cx="4426200" cy="4383720"/>
           </a:xfrm>
           <a:prstGeom prst="rect">
             <a:avLst/>
@@ -4413,7 +4414,7 @@
         </p:spPr>
         <p:txBody>
           <a:bodyPr lIns="0" rIns="0" tIns="0" bIns="0" anchor="t">
-            <a:noAutofit/>
+            <a:normAutofit/>
           </a:bodyPr>
           <a:p>
             <a:pPr marL="432000" indent="-324000">
@@ -4615,7 +4616,7 @@
       </p:sp>
       <p:sp>
         <p:nvSpPr>
-          <p:cNvPr id="70" name="PlaceHolder 4"/>
+          <p:cNvPr id="64" name="PlaceHolder 4"/>
           <p:cNvSpPr>
             <a:spLocks noGrp="1"/>
           </p:cNvSpPr>
@@ -4625,8 +4626,8 @@
         </p:nvSpPr>
         <p:spPr>
           <a:xfrm>
-            <a:off x="504000" y="4059360"/>
-            <a:ext cx="4426560" cy="2090880"/>
+            <a:off x="504000" y="4059000"/>
+            <a:ext cx="4426200" cy="2090520"/>
           </a:xfrm>
           <a:prstGeom prst="rect">
             <a:avLst/>
@@ -4638,7 +4639,7 @@
         </p:spPr>
         <p:txBody>
           <a:bodyPr lIns="0" rIns="0" tIns="0" bIns="0" anchor="t">
-            <a:noAutofit/>
+            <a:normAutofit fontScale="71666"/>
           </a:bodyPr>
           <a:p>
             <a:pPr marL="432000" indent="-324000">
@@ -4866,14 +4867,14 @@
       </p:grpSpPr>
       <p:sp>
         <p:nvSpPr>
-          <p:cNvPr id="75" name="CustomShape 1"/>
+          <p:cNvPr id="69" name="CustomShape 1"/>
           <p:cNvSpPr/>
           <p:nvPr/>
         </p:nvSpPr>
         <p:spPr>
           <a:xfrm>
             <a:off x="0" y="0"/>
-            <a:ext cx="10076400" cy="941400"/>
+            <a:ext cx="10076040" cy="941040"/>
           </a:xfrm>
           <a:prstGeom prst="rect">
             <a:avLst/>
@@ -4904,25 +4905,31 @@
             <a:noAutofit/>
           </a:bodyPr>
           <a:p>
-            <a:endParaRPr b="0" lang="en-US" sz="1800" spc="-1" strike="noStrike">
-              <a:solidFill>
-                <a:srgbClr val="000000"/>
-              </a:solidFill>
-              <a:latin typeface="Arial"/>
+            <a:pPr>
+              <a:lnSpc>
+                <a:spcPct val="100000"/>
+              </a:lnSpc>
+            </a:pPr>
+            <a:endParaRPr b="0" lang="en-US" sz="1800" spc="-1" strike="noStrike">
+              <a:solidFill>
+                <a:srgbClr val="000000"/>
+              </a:solidFill>
+              <a:latin typeface="Arial"/>
+              <a:ea typeface="DejaVu Sans"/>
             </a:endParaRPr>
           </a:p>
         </p:txBody>
       </p:sp>
       <p:sp>
         <p:nvSpPr>
-          <p:cNvPr id="76" name="CustomShape 2"/>
+          <p:cNvPr id="70" name="CustomShape 2"/>
           <p:cNvSpPr/>
           <p:nvPr/>
         </p:nvSpPr>
         <p:spPr>
           <a:xfrm>
             <a:off x="0" y="6620400"/>
-            <a:ext cx="10076400" cy="941400"/>
+            <a:ext cx="10076040" cy="941040"/>
           </a:xfrm>
           <a:prstGeom prst="rect">
             <a:avLst/>
@@ -4953,18 +4960,24 @@
             <a:noAutofit/>
           </a:bodyPr>
           <a:p>
-            <a:endParaRPr b="0" lang="en-US" sz="1800" spc="-1" strike="noStrike">
-              <a:solidFill>
-                <a:srgbClr val="000000"/>
-              </a:solidFill>
-              <a:latin typeface="Arial"/>
+            <a:pPr>
+              <a:lnSpc>
+                <a:spcPct val="100000"/>
+              </a:lnSpc>
+            </a:pPr>
+            <a:endParaRPr b="0" lang="en-US" sz="1800" spc="-1" strike="noStrike">
+              <a:solidFill>
+                <a:srgbClr val="000000"/>
+              </a:solidFill>
+              <a:latin typeface="Arial"/>
+              <a:ea typeface="DejaVu Sans"/>
             </a:endParaRPr>
           </a:p>
         </p:txBody>
       </p:sp>
       <p:sp>
         <p:nvSpPr>
-          <p:cNvPr id="77" name="PlaceHolder 1"/>
+          <p:cNvPr id="71" name="PlaceHolder 1"/>
           <p:cNvSpPr>
             <a:spLocks noGrp="1"/>
           </p:cNvSpPr>
@@ -4975,7 +4988,7 @@
         <p:spPr>
           <a:xfrm>
             <a:off x="504000" y="301320"/>
-            <a:ext cx="9071280" cy="637200"/>
+            <a:ext cx="9070920" cy="636840"/>
           </a:xfrm>
           <a:prstGeom prst="rect">
             <a:avLst/>
@@ -5013,7 +5026,7 @@
       </p:sp>
       <p:sp>
         <p:nvSpPr>
-          <p:cNvPr id="78" name="PlaceHolder 2"/>
+          <p:cNvPr id="72" name="PlaceHolder 2"/>
           <p:cNvSpPr>
             <a:spLocks noGrp="1"/>
           </p:cNvSpPr>
@@ -5024,7 +5037,7 @@
         <p:spPr>
           <a:xfrm>
             <a:off x="504000" y="1769040"/>
-            <a:ext cx="4426560" cy="2090880"/>
+            <a:ext cx="4426200" cy="2090520"/>
           </a:xfrm>
           <a:prstGeom prst="rect">
             <a:avLst/>
@@ -5036,7 +5049,7 @@
         </p:spPr>
         <p:txBody>
           <a:bodyPr lIns="0" rIns="0" tIns="0" bIns="0" anchor="t">
-            <a:noAutofit/>
+            <a:normAutofit fontScale="71666"/>
           </a:bodyPr>
           <a:p>
             <a:pPr marL="432000" indent="-324000">
@@ -5238,7 +5251,7 @@
       </p:sp>
       <p:sp>
         <p:nvSpPr>
-          <p:cNvPr id="79" name="PlaceHolder 3"/>
+          <p:cNvPr id="73" name="PlaceHolder 3"/>
           <p:cNvSpPr>
             <a:spLocks noGrp="1"/>
           </p:cNvSpPr>
@@ -5248,8 +5261,8 @@
         </p:nvSpPr>
         <p:spPr>
           <a:xfrm>
-            <a:off x="5152680" y="1769040"/>
-            <a:ext cx="4426560" cy="2090880"/>
+            <a:off x="5152320" y="1769040"/>
+            <a:ext cx="4426200" cy="2090520"/>
           </a:xfrm>
           <a:prstGeom prst="rect">
             <a:avLst/>
@@ -5261,7 +5274,7 @@
         </p:spPr>
         <p:txBody>
           <a:bodyPr lIns="0" rIns="0" tIns="0" bIns="0" anchor="t">
-            <a:noAutofit/>
+            <a:normAutofit fontScale="71666"/>
           </a:bodyPr>
           <a:p>
             <a:pPr marL="432000" indent="-324000">
@@ -5463,7 +5476,7 @@
       </p:sp>
       <p:sp>
         <p:nvSpPr>
-          <p:cNvPr id="80" name="PlaceHolder 4"/>
+          <p:cNvPr id="74" name="PlaceHolder 4"/>
           <p:cNvSpPr>
             <a:spLocks noGrp="1"/>
           </p:cNvSpPr>
@@ -5473,8 +5486,8 @@
         </p:nvSpPr>
         <p:spPr>
           <a:xfrm>
-            <a:off x="504000" y="4059360"/>
-            <a:ext cx="9071280" cy="2090880"/>
+            <a:off x="504000" y="4059000"/>
+            <a:ext cx="9070920" cy="2090520"/>
           </a:xfrm>
           <a:prstGeom prst="rect">
             <a:avLst/>
@@ -5486,7 +5499,7 @@
         </p:spPr>
         <p:txBody>
           <a:bodyPr lIns="0" rIns="0" tIns="0" bIns="0" anchor="t">
-            <a:noAutofit/>
+            <a:normAutofit fontScale="81111"/>
           </a:bodyPr>
           <a:p>
             <a:pPr marL="432000" indent="-324000">
@@ -5714,14 +5727,14 @@
       </p:grpSpPr>
       <p:sp>
         <p:nvSpPr>
-          <p:cNvPr id="85" name="CustomShape 1"/>
+          <p:cNvPr id="79" name="CustomShape 1"/>
           <p:cNvSpPr/>
           <p:nvPr/>
         </p:nvSpPr>
         <p:spPr>
           <a:xfrm>
             <a:off x="0" y="0"/>
-            <a:ext cx="10076400" cy="941400"/>
+            <a:ext cx="10076040" cy="941040"/>
           </a:xfrm>
           <a:prstGeom prst="rect">
             <a:avLst/>
@@ -5752,25 +5765,31 @@
             <a:noAutofit/>
           </a:bodyPr>
           <a:p>
-            <a:endParaRPr b="0" lang="en-US" sz="1800" spc="-1" strike="noStrike">
-              <a:solidFill>
-                <a:srgbClr val="000000"/>
-              </a:solidFill>
-              <a:latin typeface="Arial"/>
+            <a:pPr>
+              <a:lnSpc>
+                <a:spcPct val="100000"/>
+              </a:lnSpc>
+            </a:pPr>
+            <a:endParaRPr b="0" lang="en-US" sz="1800" spc="-1" strike="noStrike">
+              <a:solidFill>
+                <a:srgbClr val="000000"/>
+              </a:solidFill>
+              <a:latin typeface="Arial"/>
+              <a:ea typeface="DejaVu Sans"/>
             </a:endParaRPr>
           </a:p>
         </p:txBody>
       </p:sp>
       <p:sp>
         <p:nvSpPr>
-          <p:cNvPr id="86" name="CustomShape 2"/>
+          <p:cNvPr id="80" name="CustomShape 2"/>
           <p:cNvSpPr/>
           <p:nvPr/>
         </p:nvSpPr>
         <p:spPr>
           <a:xfrm>
             <a:off x="0" y="6620400"/>
-            <a:ext cx="10076400" cy="941400"/>
+            <a:ext cx="10076040" cy="941040"/>
           </a:xfrm>
           <a:prstGeom prst="rect">
             <a:avLst/>
@@ -5801,18 +5820,24 @@
             <a:noAutofit/>
           </a:bodyPr>
           <a:p>
-            <a:endParaRPr b="0" lang="en-US" sz="1800" spc="-1" strike="noStrike">
-              <a:solidFill>
-                <a:srgbClr val="000000"/>
-              </a:solidFill>
-              <a:latin typeface="Arial"/>
+            <a:pPr>
+              <a:lnSpc>
+                <a:spcPct val="100000"/>
+              </a:lnSpc>
+            </a:pPr>
+            <a:endParaRPr b="0" lang="en-US" sz="1800" spc="-1" strike="noStrike">
+              <a:solidFill>
+                <a:srgbClr val="000000"/>
+              </a:solidFill>
+              <a:latin typeface="Arial"/>
+              <a:ea typeface="DejaVu Sans"/>
             </a:endParaRPr>
           </a:p>
         </p:txBody>
       </p:sp>
       <p:sp>
         <p:nvSpPr>
-          <p:cNvPr id="87" name="PlaceHolder 1"/>
+          <p:cNvPr id="81" name="PlaceHolder 1"/>
           <p:cNvSpPr>
             <a:spLocks noGrp="1"/>
           </p:cNvSpPr>
@@ -5823,7 +5848,7 @@
         <p:spPr>
           <a:xfrm>
             <a:off x="504000" y="301320"/>
-            <a:ext cx="9071280" cy="637200"/>
+            <a:ext cx="9070920" cy="636840"/>
           </a:xfrm>
           <a:prstGeom prst="rect">
             <a:avLst/>
@@ -5861,7 +5886,7 @@
       </p:sp>
       <p:sp>
         <p:nvSpPr>
-          <p:cNvPr id="88" name="PlaceHolder 2"/>
+          <p:cNvPr id="82" name="PlaceHolder 2"/>
           <p:cNvSpPr>
             <a:spLocks noGrp="1"/>
           </p:cNvSpPr>
@@ -5872,7 +5897,7 @@
         <p:spPr>
           <a:xfrm>
             <a:off x="504000" y="1769040"/>
-            <a:ext cx="9071280" cy="2090880"/>
+            <a:ext cx="9070920" cy="2090520"/>
           </a:xfrm>
           <a:prstGeom prst="rect">
             <a:avLst/>
@@ -5884,7 +5909,7 @@
         </p:spPr>
         <p:txBody>
           <a:bodyPr lIns="0" rIns="0" tIns="0" bIns="0" anchor="t">
-            <a:noAutofit/>
+            <a:normAutofit fontScale="81111"/>
           </a:bodyPr>
           <a:p>
             <a:pPr marL="432000" indent="-324000">
@@ -6086,7 +6111,7 @@
       </p:sp>
       <p:sp>
         <p:nvSpPr>
-          <p:cNvPr id="89" name="PlaceHolder 3"/>
+          <p:cNvPr id="83" name="PlaceHolder 3"/>
           <p:cNvSpPr>
             <a:spLocks noGrp="1"/>
           </p:cNvSpPr>
@@ -6096,8 +6121,8 @@
         </p:nvSpPr>
         <p:spPr>
           <a:xfrm>
-            <a:off x="504000" y="4059360"/>
-            <a:ext cx="9071280" cy="2090880"/>
+            <a:off x="504000" y="4059000"/>
+            <a:ext cx="9070920" cy="2090520"/>
           </a:xfrm>
           <a:prstGeom prst="rect">
             <a:avLst/>
@@ -6109,7 +6134,7 @@
         </p:spPr>
         <p:txBody>
           <a:bodyPr lIns="0" rIns="0" tIns="0" bIns="0" anchor="t">
-            <a:noAutofit/>
+            <a:normAutofit fontScale="81111"/>
           </a:bodyPr>
           <a:p>
             <a:pPr marL="432000" indent="-324000">
@@ -6337,14 +6362,14 @@
       </p:grpSpPr>
       <p:sp>
         <p:nvSpPr>
-          <p:cNvPr id="93" name="CustomShape 1"/>
+          <p:cNvPr id="87" name="CustomShape 1"/>
           <p:cNvSpPr/>
           <p:nvPr/>
         </p:nvSpPr>
         <p:spPr>
           <a:xfrm>
             <a:off x="0" y="0"/>
-            <a:ext cx="10076400" cy="941400"/>
+            <a:ext cx="10076040" cy="941040"/>
           </a:xfrm>
           <a:prstGeom prst="rect">
             <a:avLst/>
@@ -6375,25 +6400,31 @@
             <a:noAutofit/>
           </a:bodyPr>
           <a:p>
-            <a:endParaRPr b="0" lang="en-US" sz="1800" spc="-1" strike="noStrike">
-              <a:solidFill>
-                <a:srgbClr val="000000"/>
-              </a:solidFill>
-              <a:latin typeface="Arial"/>
+            <a:pPr>
+              <a:lnSpc>
+                <a:spcPct val="100000"/>
+              </a:lnSpc>
+            </a:pPr>
+            <a:endParaRPr b="0" lang="en-US" sz="1800" spc="-1" strike="noStrike">
+              <a:solidFill>
+                <a:srgbClr val="000000"/>
+              </a:solidFill>
+              <a:latin typeface="Arial"/>
+              <a:ea typeface="DejaVu Sans"/>
             </a:endParaRPr>
           </a:p>
         </p:txBody>
       </p:sp>
       <p:sp>
         <p:nvSpPr>
-          <p:cNvPr id="94" name="CustomShape 2"/>
+          <p:cNvPr id="88" name="CustomShape 2"/>
           <p:cNvSpPr/>
           <p:nvPr/>
         </p:nvSpPr>
         <p:spPr>
           <a:xfrm>
             <a:off x="0" y="6620400"/>
-            <a:ext cx="10076400" cy="941400"/>
+            <a:ext cx="10076040" cy="941040"/>
           </a:xfrm>
           <a:prstGeom prst="rect">
             <a:avLst/>
@@ -6424,18 +6455,24 @@
             <a:noAutofit/>
           </a:bodyPr>
           <a:p>
-            <a:endParaRPr b="0" lang="en-US" sz="1800" spc="-1" strike="noStrike">
-              <a:solidFill>
-                <a:srgbClr val="000000"/>
-              </a:solidFill>
-              <a:latin typeface="Arial"/>
+            <a:pPr>
+              <a:lnSpc>
+                <a:spcPct val="100000"/>
+              </a:lnSpc>
+            </a:pPr>
+            <a:endParaRPr b="0" lang="en-US" sz="1800" spc="-1" strike="noStrike">
+              <a:solidFill>
+                <a:srgbClr val="000000"/>
+              </a:solidFill>
+              <a:latin typeface="Arial"/>
+              <a:ea typeface="DejaVu Sans"/>
             </a:endParaRPr>
           </a:p>
         </p:txBody>
       </p:sp>
       <p:sp>
         <p:nvSpPr>
-          <p:cNvPr id="95" name="PlaceHolder 1"/>
+          <p:cNvPr id="89" name="PlaceHolder 1"/>
           <p:cNvSpPr>
             <a:spLocks noGrp="1"/>
           </p:cNvSpPr>
@@ -6446,7 +6483,7 @@
         <p:spPr>
           <a:xfrm>
             <a:off x="504000" y="301320"/>
-            <a:ext cx="9071280" cy="637200"/>
+            <a:ext cx="9070920" cy="636840"/>
           </a:xfrm>
           <a:prstGeom prst="rect">
             <a:avLst/>
@@ -6484,7 +6521,7 @@
       </p:sp>
       <p:sp>
         <p:nvSpPr>
-          <p:cNvPr id="96" name="PlaceHolder 2"/>
+          <p:cNvPr id="90" name="PlaceHolder 2"/>
           <p:cNvSpPr>
             <a:spLocks noGrp="1"/>
           </p:cNvSpPr>
@@ -6495,7 +6532,7 @@
         <p:spPr>
           <a:xfrm>
             <a:off x="504000" y="1769040"/>
-            <a:ext cx="4426560" cy="2090880"/>
+            <a:ext cx="4426200" cy="2090520"/>
           </a:xfrm>
           <a:prstGeom prst="rect">
             <a:avLst/>
@@ -6507,7 +6544,7 @@
         </p:spPr>
         <p:txBody>
           <a:bodyPr lIns="0" rIns="0" tIns="0" bIns="0" anchor="t">
-            <a:noAutofit/>
+            <a:normAutofit fontScale="71666"/>
           </a:bodyPr>
           <a:p>
             <a:pPr marL="432000" indent="-324000">
@@ -6709,7 +6746,7 @@
       </p:sp>
       <p:sp>
         <p:nvSpPr>
-          <p:cNvPr id="97" name="PlaceHolder 3"/>
+          <p:cNvPr id="91" name="PlaceHolder 3"/>
           <p:cNvSpPr>
             <a:spLocks noGrp="1"/>
           </p:cNvSpPr>
@@ -6719,8 +6756,8 @@
         </p:nvSpPr>
         <p:spPr>
           <a:xfrm>
-            <a:off x="5152680" y="1769040"/>
-            <a:ext cx="4426560" cy="2090880"/>
+            <a:off x="5152320" y="1769040"/>
+            <a:ext cx="4426200" cy="2090520"/>
           </a:xfrm>
           <a:prstGeom prst="rect">
             <a:avLst/>
@@ -6732,7 +6769,7 @@
         </p:spPr>
         <p:txBody>
           <a:bodyPr lIns="0" rIns="0" tIns="0" bIns="0" anchor="t">
-            <a:noAutofit/>
+            <a:normAutofit fontScale="71666"/>
           </a:bodyPr>
           <a:p>
             <a:pPr marL="432000" indent="-324000">
@@ -6934,7 +6971,7 @@
       </p:sp>
       <p:sp>
         <p:nvSpPr>
-          <p:cNvPr id="98" name="PlaceHolder 4"/>
+          <p:cNvPr id="92" name="PlaceHolder 4"/>
           <p:cNvSpPr>
             <a:spLocks noGrp="1"/>
           </p:cNvSpPr>
@@ -6944,8 +6981,8 @@
         </p:nvSpPr>
         <p:spPr>
           <a:xfrm>
-            <a:off x="504000" y="4059360"/>
-            <a:ext cx="4426560" cy="2090880"/>
+            <a:off x="504000" y="4059000"/>
+            <a:ext cx="4426200" cy="2090520"/>
           </a:xfrm>
           <a:prstGeom prst="rect">
             <a:avLst/>
@@ -6957,7 +6994,7 @@
         </p:spPr>
         <p:txBody>
           <a:bodyPr lIns="0" rIns="0" tIns="0" bIns="0" anchor="t">
-            <a:noAutofit/>
+            <a:normAutofit fontScale="71666"/>
           </a:bodyPr>
           <a:p>
             <a:pPr marL="432000" indent="-324000">
@@ -7159,7 +7196,7 @@
       </p:sp>
       <p:sp>
         <p:nvSpPr>
-          <p:cNvPr id="99" name="PlaceHolder 5"/>
+          <p:cNvPr id="93" name="PlaceHolder 5"/>
           <p:cNvSpPr>
             <a:spLocks noGrp="1"/>
           </p:cNvSpPr>
@@ -7169,8 +7206,8 @@
         </p:nvSpPr>
         <p:spPr>
           <a:xfrm>
-            <a:off x="5152680" y="4059360"/>
-            <a:ext cx="4426560" cy="2090880"/>
+            <a:off x="5152320" y="4059000"/>
+            <a:ext cx="4426200" cy="2090520"/>
           </a:xfrm>
           <a:prstGeom prst="rect">
             <a:avLst/>
@@ -7182,7 +7219,7 @@
         </p:spPr>
         <p:txBody>
           <a:bodyPr lIns="0" rIns="0" tIns="0" bIns="0" anchor="t">
-            <a:noAutofit/>
+            <a:normAutofit fontScale="71666"/>
           </a:bodyPr>
           <a:p>
             <a:pPr marL="432000" indent="-324000">
@@ -7410,14 +7447,14 @@
       </p:grpSpPr>
       <p:sp>
         <p:nvSpPr>
-          <p:cNvPr id="105" name="CustomShape 1"/>
+          <p:cNvPr id="99" name="CustomShape 1"/>
           <p:cNvSpPr/>
           <p:nvPr/>
         </p:nvSpPr>
         <p:spPr>
           <a:xfrm>
             <a:off x="0" y="0"/>
-            <a:ext cx="10076400" cy="941400"/>
+            <a:ext cx="10076040" cy="941040"/>
           </a:xfrm>
           <a:prstGeom prst="rect">
             <a:avLst/>
@@ -7448,25 +7485,31 @@
             <a:noAutofit/>
           </a:bodyPr>
           <a:p>
-            <a:endParaRPr b="0" lang="en-US" sz="1800" spc="-1" strike="noStrike">
-              <a:solidFill>
-                <a:srgbClr val="000000"/>
-              </a:solidFill>
-              <a:latin typeface="Arial"/>
+            <a:pPr>
+              <a:lnSpc>
+                <a:spcPct val="100000"/>
+              </a:lnSpc>
+            </a:pPr>
+            <a:endParaRPr b="0" lang="en-US" sz="1800" spc="-1" strike="noStrike">
+              <a:solidFill>
+                <a:srgbClr val="000000"/>
+              </a:solidFill>
+              <a:latin typeface="Arial"/>
+              <a:ea typeface="DejaVu Sans"/>
             </a:endParaRPr>
           </a:p>
         </p:txBody>
       </p:sp>
       <p:sp>
         <p:nvSpPr>
-          <p:cNvPr id="106" name="CustomShape 2"/>
+          <p:cNvPr id="100" name="CustomShape 2"/>
           <p:cNvSpPr/>
           <p:nvPr/>
         </p:nvSpPr>
         <p:spPr>
           <a:xfrm>
             <a:off x="0" y="6620400"/>
-            <a:ext cx="10076400" cy="941400"/>
+            <a:ext cx="10076040" cy="941040"/>
           </a:xfrm>
           <a:prstGeom prst="rect">
             <a:avLst/>
@@ -7497,1410 +7540,17 @@
             <a:noAutofit/>
           </a:bodyPr>
           <a:p>
-            <a:endParaRPr b="0" lang="en-US" sz="1800" spc="-1" strike="noStrike">
-              <a:solidFill>
-                <a:srgbClr val="000000"/>
-              </a:solidFill>
-              <a:latin typeface="Arial"/>
-            </a:endParaRPr>
-          </a:p>
-        </p:txBody>
-      </p:sp>
-      <p:sp>
-        <p:nvSpPr>
-          <p:cNvPr id="107" name="PlaceHolder 1"/>
-          <p:cNvSpPr>
-            <a:spLocks noGrp="1"/>
-          </p:cNvSpPr>
-          <p:nvPr>
-            <p:ph type="title"/>
-          </p:nvPr>
-        </p:nvSpPr>
-        <p:spPr>
-          <a:xfrm>
-            <a:off x="504000" y="301320"/>
-            <a:ext cx="9071280" cy="637200"/>
-          </a:xfrm>
-          <a:prstGeom prst="rect">
-            <a:avLst/>
-          </a:prstGeom>
-          <a:noFill/>
-          <a:ln w="0">
-            <a:noFill/>
-          </a:ln>
-        </p:spPr>
-        <p:txBody>
-          <a:bodyPr lIns="0" rIns="0" tIns="0" bIns="0" anchor="ctr">
-            <a:noAutofit/>
-          </a:bodyPr>
-          <a:p>
-            <a:pPr indent="0">
-              <a:buNone/>
-            </a:pPr>
-            <a:r>
-              <a:rPr b="0" lang="en-US" sz="1800" spc="-1" strike="noStrike">
-                <a:solidFill>
-                  <a:srgbClr val="000000"/>
-                </a:solidFill>
-                <a:latin typeface="Arial"/>
-              </a:rPr>
-              <a:t>Click to edit the title text format</a:t>
-            </a:r>
-            <a:endParaRPr b="0" lang="en-US" sz="1800" spc="-1" strike="noStrike">
-              <a:solidFill>
-                <a:srgbClr val="000000"/>
-              </a:solidFill>
-              <a:latin typeface="Arial"/>
-            </a:endParaRPr>
-          </a:p>
-        </p:txBody>
-      </p:sp>
-      <p:sp>
-        <p:nvSpPr>
-          <p:cNvPr id="108" name="PlaceHolder 2"/>
-          <p:cNvSpPr>
-            <a:spLocks noGrp="1"/>
-          </p:cNvSpPr>
-          <p:nvPr>
-            <p:ph type="body"/>
-          </p:nvPr>
-        </p:nvSpPr>
-        <p:spPr>
-          <a:xfrm>
-            <a:off x="504000" y="1769040"/>
-            <a:ext cx="2920320" cy="2090880"/>
-          </a:xfrm>
-          <a:prstGeom prst="rect">
-            <a:avLst/>
-          </a:prstGeom>
-          <a:noFill/>
-          <a:ln w="0">
-            <a:noFill/>
-          </a:ln>
-        </p:spPr>
-        <p:txBody>
-          <a:bodyPr lIns="0" rIns="0" tIns="0" bIns="0" anchor="t">
-            <a:noAutofit/>
-          </a:bodyPr>
-          <a:p>
-            <a:pPr marL="432000" indent="-324000">
-              <a:spcBef>
-                <a:spcPts val="1417"/>
-              </a:spcBef>
-              <a:buClr>
-                <a:srgbClr val="000000"/>
-              </a:buClr>
-              <a:buSzPct val="45000"/>
-              <a:buFont typeface="Wingdings" charset="2"/>
-              <a:buChar char=""/>
-            </a:pPr>
-            <a:r>
-              <a:rPr b="0" lang="en-US" sz="1800" spc="-1" strike="noStrike">
-                <a:solidFill>
-                  <a:srgbClr val="000000"/>
-                </a:solidFill>
-                <a:latin typeface="Arial"/>
-              </a:rPr>
-              <a:t>Click to edit the outline text format</a:t>
-            </a:r>
-            <a:endParaRPr b="0" lang="en-US" sz="1800" spc="-1" strike="noStrike">
-              <a:solidFill>
-                <a:srgbClr val="000000"/>
-              </a:solidFill>
-              <a:latin typeface="Arial"/>
-            </a:endParaRPr>
-          </a:p>
-          <a:p>
-            <a:pPr lvl="1" marL="864000" indent="-324000">
-              <a:spcBef>
-                <a:spcPts val="1134"/>
-              </a:spcBef>
-              <a:buClr>
-                <a:srgbClr val="000000"/>
-              </a:buClr>
-              <a:buSzPct val="75000"/>
-              <a:buFont typeface="Symbol" charset="2"/>
-              <a:buChar char=""/>
-            </a:pPr>
-            <a:r>
-              <a:rPr b="0" lang="en-US" sz="1800" spc="-1" strike="noStrike">
-                <a:solidFill>
-                  <a:srgbClr val="000000"/>
-                </a:solidFill>
-                <a:latin typeface="Arial"/>
-              </a:rPr>
-              <a:t>Second Outline Level</a:t>
-            </a:r>
-            <a:endParaRPr b="0" lang="en-US" sz="1800" spc="-1" strike="noStrike">
-              <a:solidFill>
-                <a:srgbClr val="000000"/>
-              </a:solidFill>
-              <a:latin typeface="Arial"/>
-            </a:endParaRPr>
-          </a:p>
-          <a:p>
-            <a:pPr lvl="2" marL="1296000" indent="-288000">
-              <a:spcBef>
-                <a:spcPts val="850"/>
-              </a:spcBef>
-              <a:buClr>
-                <a:srgbClr val="000000"/>
-              </a:buClr>
-              <a:buSzPct val="45000"/>
-              <a:buFont typeface="Wingdings" charset="2"/>
-              <a:buChar char=""/>
-            </a:pPr>
-            <a:r>
-              <a:rPr b="0" lang="en-US" sz="1800" spc="-1" strike="noStrike">
-                <a:solidFill>
-                  <a:srgbClr val="000000"/>
-                </a:solidFill>
-                <a:latin typeface="Arial"/>
-              </a:rPr>
-              <a:t>Third Outline Level</a:t>
-            </a:r>
-            <a:endParaRPr b="0" lang="en-US" sz="1800" spc="-1" strike="noStrike">
-              <a:solidFill>
-                <a:srgbClr val="000000"/>
-              </a:solidFill>
-              <a:latin typeface="Arial"/>
-            </a:endParaRPr>
-          </a:p>
-          <a:p>
-            <a:pPr lvl="3" marL="1728000" indent="-216000">
-              <a:spcBef>
-                <a:spcPts val="567"/>
-              </a:spcBef>
-              <a:buClr>
-                <a:srgbClr val="000000"/>
-              </a:buClr>
-              <a:buSzPct val="75000"/>
-              <a:buFont typeface="Symbol" charset="2"/>
-              <a:buChar char=""/>
-            </a:pPr>
-            <a:r>
-              <a:rPr b="0" lang="en-US" sz="1800" spc="-1" strike="noStrike">
-                <a:solidFill>
-                  <a:srgbClr val="000000"/>
-                </a:solidFill>
-                <a:latin typeface="Arial"/>
-              </a:rPr>
-              <a:t>Fourth Outline Level</a:t>
-            </a:r>
-            <a:endParaRPr b="0" lang="en-US" sz="1800" spc="-1" strike="noStrike">
-              <a:solidFill>
-                <a:srgbClr val="000000"/>
-              </a:solidFill>
-              <a:latin typeface="Arial"/>
-            </a:endParaRPr>
-          </a:p>
-          <a:p>
-            <a:pPr lvl="4" marL="2160000" indent="-216000">
-              <a:spcBef>
-                <a:spcPts val="283"/>
-              </a:spcBef>
-              <a:buClr>
-                <a:srgbClr val="000000"/>
-              </a:buClr>
-              <a:buSzPct val="45000"/>
-              <a:buFont typeface="Wingdings" charset="2"/>
-              <a:buChar char=""/>
-            </a:pPr>
-            <a:r>
-              <a:rPr b="0" lang="en-US" sz="1800" spc="-1" strike="noStrike">
-                <a:solidFill>
-                  <a:srgbClr val="000000"/>
-                </a:solidFill>
-                <a:latin typeface="Arial"/>
-              </a:rPr>
-              <a:t>Fifth Outline Level</a:t>
-            </a:r>
-            <a:endParaRPr b="0" lang="en-US" sz="1800" spc="-1" strike="noStrike">
-              <a:solidFill>
-                <a:srgbClr val="000000"/>
-              </a:solidFill>
-              <a:latin typeface="Arial"/>
-            </a:endParaRPr>
-          </a:p>
-          <a:p>
-            <a:pPr lvl="5" marL="2592000" indent="-216000">
-              <a:spcBef>
-                <a:spcPts val="283"/>
-              </a:spcBef>
-              <a:buClr>
-                <a:srgbClr val="000000"/>
-              </a:buClr>
-              <a:buSzPct val="45000"/>
-              <a:buFont typeface="Wingdings" charset="2"/>
-              <a:buChar char=""/>
-            </a:pPr>
-            <a:r>
-              <a:rPr b="0" lang="en-US" sz="1800" spc="-1" strike="noStrike">
-                <a:solidFill>
-                  <a:srgbClr val="000000"/>
-                </a:solidFill>
-                <a:latin typeface="Arial"/>
-              </a:rPr>
-              <a:t>Sixth Outline Level</a:t>
-            </a:r>
-            <a:endParaRPr b="0" lang="en-US" sz="1800" spc="-1" strike="noStrike">
-              <a:solidFill>
-                <a:srgbClr val="000000"/>
-              </a:solidFill>
-              <a:latin typeface="Arial"/>
-            </a:endParaRPr>
-          </a:p>
-          <a:p>
-            <a:pPr lvl="6" marL="3024000" indent="-216000">
-              <a:spcBef>
-                <a:spcPts val="283"/>
-              </a:spcBef>
-              <a:buClr>
-                <a:srgbClr val="000000"/>
-              </a:buClr>
-              <a:buSzPct val="45000"/>
-              <a:buFont typeface="Wingdings" charset="2"/>
-              <a:buChar char=""/>
-            </a:pPr>
-            <a:r>
-              <a:rPr b="0" lang="en-US" sz="1800" spc="-1" strike="noStrike">
-                <a:solidFill>
-                  <a:srgbClr val="000000"/>
-                </a:solidFill>
-                <a:latin typeface="Arial"/>
-              </a:rPr>
-              <a:t>Seventh Outline Level</a:t>
-            </a:r>
-            <a:endParaRPr b="0" lang="en-US" sz="1800" spc="-1" strike="noStrike">
-              <a:solidFill>
-                <a:srgbClr val="000000"/>
-              </a:solidFill>
-              <a:latin typeface="Arial"/>
-            </a:endParaRPr>
-          </a:p>
-        </p:txBody>
-      </p:sp>
-      <p:sp>
-        <p:nvSpPr>
-          <p:cNvPr id="109" name="PlaceHolder 3"/>
-          <p:cNvSpPr>
-            <a:spLocks noGrp="1"/>
-          </p:cNvSpPr>
-          <p:nvPr>
-            <p:ph type="body"/>
-          </p:nvPr>
-        </p:nvSpPr>
-        <p:spPr>
-          <a:xfrm>
-            <a:off x="3571200" y="1769040"/>
-            <a:ext cx="2920320" cy="2090880"/>
-          </a:xfrm>
-          <a:prstGeom prst="rect">
-            <a:avLst/>
-          </a:prstGeom>
-          <a:noFill/>
-          <a:ln w="0">
-            <a:noFill/>
-          </a:ln>
-        </p:spPr>
-        <p:txBody>
-          <a:bodyPr lIns="0" rIns="0" tIns="0" bIns="0" anchor="t">
-            <a:noAutofit/>
-          </a:bodyPr>
-          <a:p>
-            <a:pPr marL="432000" indent="-324000">
-              <a:spcBef>
-                <a:spcPts val="1417"/>
-              </a:spcBef>
-              <a:buClr>
-                <a:srgbClr val="000000"/>
-              </a:buClr>
-              <a:buSzPct val="45000"/>
-              <a:buFont typeface="Wingdings" charset="2"/>
-              <a:buChar char=""/>
-            </a:pPr>
-            <a:r>
-              <a:rPr b="0" lang="en-US" sz="1800" spc="-1" strike="noStrike">
-                <a:solidFill>
-                  <a:srgbClr val="000000"/>
-                </a:solidFill>
-                <a:latin typeface="Arial"/>
-              </a:rPr>
-              <a:t>Click to edit the outline text format</a:t>
-            </a:r>
-            <a:endParaRPr b="0" lang="en-US" sz="1800" spc="-1" strike="noStrike">
-              <a:solidFill>
-                <a:srgbClr val="000000"/>
-              </a:solidFill>
-              <a:latin typeface="Arial"/>
-            </a:endParaRPr>
-          </a:p>
-          <a:p>
-            <a:pPr lvl="1" marL="864000" indent="-324000">
-              <a:spcBef>
-                <a:spcPts val="1134"/>
-              </a:spcBef>
-              <a:buClr>
-                <a:srgbClr val="000000"/>
-              </a:buClr>
-              <a:buSzPct val="75000"/>
-              <a:buFont typeface="Symbol" charset="2"/>
-              <a:buChar char=""/>
-            </a:pPr>
-            <a:r>
-              <a:rPr b="0" lang="en-US" sz="1800" spc="-1" strike="noStrike">
-                <a:solidFill>
-                  <a:srgbClr val="000000"/>
-                </a:solidFill>
-                <a:latin typeface="Arial"/>
-              </a:rPr>
-              <a:t>Second Outline Level</a:t>
-            </a:r>
-            <a:endParaRPr b="0" lang="en-US" sz="1800" spc="-1" strike="noStrike">
-              <a:solidFill>
-                <a:srgbClr val="000000"/>
-              </a:solidFill>
-              <a:latin typeface="Arial"/>
-            </a:endParaRPr>
-          </a:p>
-          <a:p>
-            <a:pPr lvl="2" marL="1296000" indent="-288000">
-              <a:spcBef>
-                <a:spcPts val="850"/>
-              </a:spcBef>
-              <a:buClr>
-                <a:srgbClr val="000000"/>
-              </a:buClr>
-              <a:buSzPct val="45000"/>
-              <a:buFont typeface="Wingdings" charset="2"/>
-              <a:buChar char=""/>
-            </a:pPr>
-            <a:r>
-              <a:rPr b="0" lang="en-US" sz="1800" spc="-1" strike="noStrike">
-                <a:solidFill>
-                  <a:srgbClr val="000000"/>
-                </a:solidFill>
-                <a:latin typeface="Arial"/>
-              </a:rPr>
-              <a:t>Third Outline Level</a:t>
-            </a:r>
-            <a:endParaRPr b="0" lang="en-US" sz="1800" spc="-1" strike="noStrike">
-              <a:solidFill>
-                <a:srgbClr val="000000"/>
-              </a:solidFill>
-              <a:latin typeface="Arial"/>
-            </a:endParaRPr>
-          </a:p>
-          <a:p>
-            <a:pPr lvl="3" marL="1728000" indent="-216000">
-              <a:spcBef>
-                <a:spcPts val="567"/>
-              </a:spcBef>
-              <a:buClr>
-                <a:srgbClr val="000000"/>
-              </a:buClr>
-              <a:buSzPct val="75000"/>
-              <a:buFont typeface="Symbol" charset="2"/>
-              <a:buChar char=""/>
-            </a:pPr>
-            <a:r>
-              <a:rPr b="0" lang="en-US" sz="1800" spc="-1" strike="noStrike">
-                <a:solidFill>
-                  <a:srgbClr val="000000"/>
-                </a:solidFill>
-                <a:latin typeface="Arial"/>
-              </a:rPr>
-              <a:t>Fourth Outline Level</a:t>
-            </a:r>
-            <a:endParaRPr b="0" lang="en-US" sz="1800" spc="-1" strike="noStrike">
-              <a:solidFill>
-                <a:srgbClr val="000000"/>
-              </a:solidFill>
-              <a:latin typeface="Arial"/>
-            </a:endParaRPr>
-          </a:p>
-          <a:p>
-            <a:pPr lvl="4" marL="2160000" indent="-216000">
-              <a:spcBef>
-                <a:spcPts val="283"/>
-              </a:spcBef>
-              <a:buClr>
-                <a:srgbClr val="000000"/>
-              </a:buClr>
-              <a:buSzPct val="45000"/>
-              <a:buFont typeface="Wingdings" charset="2"/>
-              <a:buChar char=""/>
-            </a:pPr>
-            <a:r>
-              <a:rPr b="0" lang="en-US" sz="1800" spc="-1" strike="noStrike">
-                <a:solidFill>
-                  <a:srgbClr val="000000"/>
-                </a:solidFill>
-                <a:latin typeface="Arial"/>
-              </a:rPr>
-              <a:t>Fifth Outline Level</a:t>
-            </a:r>
-            <a:endParaRPr b="0" lang="en-US" sz="1800" spc="-1" strike="noStrike">
-              <a:solidFill>
-                <a:srgbClr val="000000"/>
-              </a:solidFill>
-              <a:latin typeface="Arial"/>
-            </a:endParaRPr>
-          </a:p>
-          <a:p>
-            <a:pPr lvl="5" marL="2592000" indent="-216000">
-              <a:spcBef>
-                <a:spcPts val="283"/>
-              </a:spcBef>
-              <a:buClr>
-                <a:srgbClr val="000000"/>
-              </a:buClr>
-              <a:buSzPct val="45000"/>
-              <a:buFont typeface="Wingdings" charset="2"/>
-              <a:buChar char=""/>
-            </a:pPr>
-            <a:r>
-              <a:rPr b="0" lang="en-US" sz="1800" spc="-1" strike="noStrike">
-                <a:solidFill>
-                  <a:srgbClr val="000000"/>
-                </a:solidFill>
-                <a:latin typeface="Arial"/>
-              </a:rPr>
-              <a:t>Sixth Outline Level</a:t>
-            </a:r>
-            <a:endParaRPr b="0" lang="en-US" sz="1800" spc="-1" strike="noStrike">
-              <a:solidFill>
-                <a:srgbClr val="000000"/>
-              </a:solidFill>
-              <a:latin typeface="Arial"/>
-            </a:endParaRPr>
-          </a:p>
-          <a:p>
-            <a:pPr lvl="6" marL="3024000" indent="-216000">
-              <a:spcBef>
-                <a:spcPts val="283"/>
-              </a:spcBef>
-              <a:buClr>
-                <a:srgbClr val="000000"/>
-              </a:buClr>
-              <a:buSzPct val="45000"/>
-              <a:buFont typeface="Wingdings" charset="2"/>
-              <a:buChar char=""/>
-            </a:pPr>
-            <a:r>
-              <a:rPr b="0" lang="en-US" sz="1800" spc="-1" strike="noStrike">
-                <a:solidFill>
-                  <a:srgbClr val="000000"/>
-                </a:solidFill>
-                <a:latin typeface="Arial"/>
-              </a:rPr>
-              <a:t>Seventh Outline Level</a:t>
-            </a:r>
-            <a:endParaRPr b="0" lang="en-US" sz="1800" spc="-1" strike="noStrike">
-              <a:solidFill>
-                <a:srgbClr val="000000"/>
-              </a:solidFill>
-              <a:latin typeface="Arial"/>
-            </a:endParaRPr>
-          </a:p>
-        </p:txBody>
-      </p:sp>
-      <p:sp>
-        <p:nvSpPr>
-          <p:cNvPr id="110" name="PlaceHolder 4"/>
-          <p:cNvSpPr>
-            <a:spLocks noGrp="1"/>
-          </p:cNvSpPr>
-          <p:nvPr>
-            <p:ph type="body"/>
-          </p:nvPr>
-        </p:nvSpPr>
-        <p:spPr>
-          <a:xfrm>
-            <a:off x="6638040" y="1769040"/>
-            <a:ext cx="2920320" cy="2090880"/>
-          </a:xfrm>
-          <a:prstGeom prst="rect">
-            <a:avLst/>
-          </a:prstGeom>
-          <a:noFill/>
-          <a:ln w="0">
-            <a:noFill/>
-          </a:ln>
-        </p:spPr>
-        <p:txBody>
-          <a:bodyPr lIns="0" rIns="0" tIns="0" bIns="0" anchor="t">
-            <a:noAutofit/>
-          </a:bodyPr>
-          <a:p>
-            <a:pPr marL="432000" indent="-324000">
-              <a:spcBef>
-                <a:spcPts val="1417"/>
-              </a:spcBef>
-              <a:buClr>
-                <a:srgbClr val="000000"/>
-              </a:buClr>
-              <a:buSzPct val="45000"/>
-              <a:buFont typeface="Wingdings" charset="2"/>
-              <a:buChar char=""/>
-            </a:pPr>
-            <a:r>
-              <a:rPr b="0" lang="en-US" sz="1800" spc="-1" strike="noStrike">
-                <a:solidFill>
-                  <a:srgbClr val="000000"/>
-                </a:solidFill>
-                <a:latin typeface="Arial"/>
-              </a:rPr>
-              <a:t>Click to edit the outline text format</a:t>
-            </a:r>
-            <a:endParaRPr b="0" lang="en-US" sz="1800" spc="-1" strike="noStrike">
-              <a:solidFill>
-                <a:srgbClr val="000000"/>
-              </a:solidFill>
-              <a:latin typeface="Arial"/>
-            </a:endParaRPr>
-          </a:p>
-          <a:p>
-            <a:pPr lvl="1" marL="864000" indent="-324000">
-              <a:spcBef>
-                <a:spcPts val="1134"/>
-              </a:spcBef>
-              <a:buClr>
-                <a:srgbClr val="000000"/>
-              </a:buClr>
-              <a:buSzPct val="75000"/>
-              <a:buFont typeface="Symbol" charset="2"/>
-              <a:buChar char=""/>
-            </a:pPr>
-            <a:r>
-              <a:rPr b="0" lang="en-US" sz="1800" spc="-1" strike="noStrike">
-                <a:solidFill>
-                  <a:srgbClr val="000000"/>
-                </a:solidFill>
-                <a:latin typeface="Arial"/>
-              </a:rPr>
-              <a:t>Second Outline Level</a:t>
-            </a:r>
-            <a:endParaRPr b="0" lang="en-US" sz="1800" spc="-1" strike="noStrike">
-              <a:solidFill>
-                <a:srgbClr val="000000"/>
-              </a:solidFill>
-              <a:latin typeface="Arial"/>
-            </a:endParaRPr>
-          </a:p>
-          <a:p>
-            <a:pPr lvl="2" marL="1296000" indent="-288000">
-              <a:spcBef>
-                <a:spcPts val="850"/>
-              </a:spcBef>
-              <a:buClr>
-                <a:srgbClr val="000000"/>
-              </a:buClr>
-              <a:buSzPct val="45000"/>
-              <a:buFont typeface="Wingdings" charset="2"/>
-              <a:buChar char=""/>
-            </a:pPr>
-            <a:r>
-              <a:rPr b="0" lang="en-US" sz="1800" spc="-1" strike="noStrike">
-                <a:solidFill>
-                  <a:srgbClr val="000000"/>
-                </a:solidFill>
-                <a:latin typeface="Arial"/>
-              </a:rPr>
-              <a:t>Third Outline Level</a:t>
-            </a:r>
-            <a:endParaRPr b="0" lang="en-US" sz="1800" spc="-1" strike="noStrike">
-              <a:solidFill>
-                <a:srgbClr val="000000"/>
-              </a:solidFill>
-              <a:latin typeface="Arial"/>
-            </a:endParaRPr>
-          </a:p>
-          <a:p>
-            <a:pPr lvl="3" marL="1728000" indent="-216000">
-              <a:spcBef>
-                <a:spcPts val="567"/>
-              </a:spcBef>
-              <a:buClr>
-                <a:srgbClr val="000000"/>
-              </a:buClr>
-              <a:buSzPct val="75000"/>
-              <a:buFont typeface="Symbol" charset="2"/>
-              <a:buChar char=""/>
-            </a:pPr>
-            <a:r>
-              <a:rPr b="0" lang="en-US" sz="1800" spc="-1" strike="noStrike">
-                <a:solidFill>
-                  <a:srgbClr val="000000"/>
-                </a:solidFill>
-                <a:latin typeface="Arial"/>
-              </a:rPr>
-              <a:t>Fourth Outline Level</a:t>
-            </a:r>
-            <a:endParaRPr b="0" lang="en-US" sz="1800" spc="-1" strike="noStrike">
-              <a:solidFill>
-                <a:srgbClr val="000000"/>
-              </a:solidFill>
-              <a:latin typeface="Arial"/>
-            </a:endParaRPr>
-          </a:p>
-          <a:p>
-            <a:pPr lvl="4" marL="2160000" indent="-216000">
-              <a:spcBef>
-                <a:spcPts val="283"/>
-              </a:spcBef>
-              <a:buClr>
-                <a:srgbClr val="000000"/>
-              </a:buClr>
-              <a:buSzPct val="45000"/>
-              <a:buFont typeface="Wingdings" charset="2"/>
-              <a:buChar char=""/>
-            </a:pPr>
-            <a:r>
-              <a:rPr b="0" lang="en-US" sz="1800" spc="-1" strike="noStrike">
-                <a:solidFill>
-                  <a:srgbClr val="000000"/>
-                </a:solidFill>
-                <a:latin typeface="Arial"/>
-              </a:rPr>
-              <a:t>Fifth Outline Level</a:t>
-            </a:r>
-            <a:endParaRPr b="0" lang="en-US" sz="1800" spc="-1" strike="noStrike">
-              <a:solidFill>
-                <a:srgbClr val="000000"/>
-              </a:solidFill>
-              <a:latin typeface="Arial"/>
-            </a:endParaRPr>
-          </a:p>
-          <a:p>
-            <a:pPr lvl="5" marL="2592000" indent="-216000">
-              <a:spcBef>
-                <a:spcPts val="283"/>
-              </a:spcBef>
-              <a:buClr>
-                <a:srgbClr val="000000"/>
-              </a:buClr>
-              <a:buSzPct val="45000"/>
-              <a:buFont typeface="Wingdings" charset="2"/>
-              <a:buChar char=""/>
-            </a:pPr>
-            <a:r>
-              <a:rPr b="0" lang="en-US" sz="1800" spc="-1" strike="noStrike">
-                <a:solidFill>
-                  <a:srgbClr val="000000"/>
-                </a:solidFill>
-                <a:latin typeface="Arial"/>
-              </a:rPr>
-              <a:t>Sixth Outline Level</a:t>
-            </a:r>
-            <a:endParaRPr b="0" lang="en-US" sz="1800" spc="-1" strike="noStrike">
-              <a:solidFill>
-                <a:srgbClr val="000000"/>
-              </a:solidFill>
-              <a:latin typeface="Arial"/>
-            </a:endParaRPr>
-          </a:p>
-          <a:p>
-            <a:pPr lvl="6" marL="3024000" indent="-216000">
-              <a:spcBef>
-                <a:spcPts val="283"/>
-              </a:spcBef>
-              <a:buClr>
-                <a:srgbClr val="000000"/>
-              </a:buClr>
-              <a:buSzPct val="45000"/>
-              <a:buFont typeface="Wingdings" charset="2"/>
-              <a:buChar char=""/>
-            </a:pPr>
-            <a:r>
-              <a:rPr b="0" lang="en-US" sz="1800" spc="-1" strike="noStrike">
-                <a:solidFill>
-                  <a:srgbClr val="000000"/>
-                </a:solidFill>
-                <a:latin typeface="Arial"/>
-              </a:rPr>
-              <a:t>Seventh Outline Level</a:t>
-            </a:r>
-            <a:endParaRPr b="0" lang="en-US" sz="1800" spc="-1" strike="noStrike">
-              <a:solidFill>
-                <a:srgbClr val="000000"/>
-              </a:solidFill>
-              <a:latin typeface="Arial"/>
-            </a:endParaRPr>
-          </a:p>
-        </p:txBody>
-      </p:sp>
-      <p:sp>
-        <p:nvSpPr>
-          <p:cNvPr id="111" name="PlaceHolder 5"/>
-          <p:cNvSpPr>
-            <a:spLocks noGrp="1"/>
-          </p:cNvSpPr>
-          <p:nvPr>
-            <p:ph type="body"/>
-          </p:nvPr>
-        </p:nvSpPr>
-        <p:spPr>
-          <a:xfrm>
-            <a:off x="504000" y="4059360"/>
-            <a:ext cx="2920320" cy="2090880"/>
-          </a:xfrm>
-          <a:prstGeom prst="rect">
-            <a:avLst/>
-          </a:prstGeom>
-          <a:noFill/>
-          <a:ln w="0">
-            <a:noFill/>
-          </a:ln>
-        </p:spPr>
-        <p:txBody>
-          <a:bodyPr lIns="0" rIns="0" tIns="0" bIns="0" anchor="t">
-            <a:noAutofit/>
-          </a:bodyPr>
-          <a:p>
-            <a:pPr marL="432000" indent="-324000">
-              <a:spcBef>
-                <a:spcPts val="1417"/>
-              </a:spcBef>
-              <a:buClr>
-                <a:srgbClr val="000000"/>
-              </a:buClr>
-              <a:buSzPct val="45000"/>
-              <a:buFont typeface="Wingdings" charset="2"/>
-              <a:buChar char=""/>
-            </a:pPr>
-            <a:r>
-              <a:rPr b="0" lang="en-US" sz="1800" spc="-1" strike="noStrike">
-                <a:solidFill>
-                  <a:srgbClr val="000000"/>
-                </a:solidFill>
-                <a:latin typeface="Arial"/>
-              </a:rPr>
-              <a:t>Click to edit the outline text format</a:t>
-            </a:r>
-            <a:endParaRPr b="0" lang="en-US" sz="1800" spc="-1" strike="noStrike">
-              <a:solidFill>
-                <a:srgbClr val="000000"/>
-              </a:solidFill>
-              <a:latin typeface="Arial"/>
-            </a:endParaRPr>
-          </a:p>
-          <a:p>
-            <a:pPr lvl="1" marL="864000" indent="-324000">
-              <a:spcBef>
-                <a:spcPts val="1134"/>
-              </a:spcBef>
-              <a:buClr>
-                <a:srgbClr val="000000"/>
-              </a:buClr>
-              <a:buSzPct val="75000"/>
-              <a:buFont typeface="Symbol" charset="2"/>
-              <a:buChar char=""/>
-            </a:pPr>
-            <a:r>
-              <a:rPr b="0" lang="en-US" sz="1800" spc="-1" strike="noStrike">
-                <a:solidFill>
-                  <a:srgbClr val="000000"/>
-                </a:solidFill>
-                <a:latin typeface="Arial"/>
-              </a:rPr>
-              <a:t>Second Outline Level</a:t>
-            </a:r>
-            <a:endParaRPr b="0" lang="en-US" sz="1800" spc="-1" strike="noStrike">
-              <a:solidFill>
-                <a:srgbClr val="000000"/>
-              </a:solidFill>
-              <a:latin typeface="Arial"/>
-            </a:endParaRPr>
-          </a:p>
-          <a:p>
-            <a:pPr lvl="2" marL="1296000" indent="-288000">
-              <a:spcBef>
-                <a:spcPts val="850"/>
-              </a:spcBef>
-              <a:buClr>
-                <a:srgbClr val="000000"/>
-              </a:buClr>
-              <a:buSzPct val="45000"/>
-              <a:buFont typeface="Wingdings" charset="2"/>
-              <a:buChar char=""/>
-            </a:pPr>
-            <a:r>
-              <a:rPr b="0" lang="en-US" sz="1800" spc="-1" strike="noStrike">
-                <a:solidFill>
-                  <a:srgbClr val="000000"/>
-                </a:solidFill>
-                <a:latin typeface="Arial"/>
-              </a:rPr>
-              <a:t>Third Outline Level</a:t>
-            </a:r>
-            <a:endParaRPr b="0" lang="en-US" sz="1800" spc="-1" strike="noStrike">
-              <a:solidFill>
-                <a:srgbClr val="000000"/>
-              </a:solidFill>
-              <a:latin typeface="Arial"/>
-            </a:endParaRPr>
-          </a:p>
-          <a:p>
-            <a:pPr lvl="3" marL="1728000" indent="-216000">
-              <a:spcBef>
-                <a:spcPts val="567"/>
-              </a:spcBef>
-              <a:buClr>
-                <a:srgbClr val="000000"/>
-              </a:buClr>
-              <a:buSzPct val="75000"/>
-              <a:buFont typeface="Symbol" charset="2"/>
-              <a:buChar char=""/>
-            </a:pPr>
-            <a:r>
-              <a:rPr b="0" lang="en-US" sz="1800" spc="-1" strike="noStrike">
-                <a:solidFill>
-                  <a:srgbClr val="000000"/>
-                </a:solidFill>
-                <a:latin typeface="Arial"/>
-              </a:rPr>
-              <a:t>Fourth Outline Level</a:t>
-            </a:r>
-            <a:endParaRPr b="0" lang="en-US" sz="1800" spc="-1" strike="noStrike">
-              <a:solidFill>
-                <a:srgbClr val="000000"/>
-              </a:solidFill>
-              <a:latin typeface="Arial"/>
-            </a:endParaRPr>
-          </a:p>
-          <a:p>
-            <a:pPr lvl="4" marL="2160000" indent="-216000">
-              <a:spcBef>
-                <a:spcPts val="283"/>
-              </a:spcBef>
-              <a:buClr>
-                <a:srgbClr val="000000"/>
-              </a:buClr>
-              <a:buSzPct val="45000"/>
-              <a:buFont typeface="Wingdings" charset="2"/>
-              <a:buChar char=""/>
-            </a:pPr>
-            <a:r>
-              <a:rPr b="0" lang="en-US" sz="1800" spc="-1" strike="noStrike">
-                <a:solidFill>
-                  <a:srgbClr val="000000"/>
-                </a:solidFill>
-                <a:latin typeface="Arial"/>
-              </a:rPr>
-              <a:t>Fifth Outline Level</a:t>
-            </a:r>
-            <a:endParaRPr b="0" lang="en-US" sz="1800" spc="-1" strike="noStrike">
-              <a:solidFill>
-                <a:srgbClr val="000000"/>
-              </a:solidFill>
-              <a:latin typeface="Arial"/>
-            </a:endParaRPr>
-          </a:p>
-          <a:p>
-            <a:pPr lvl="5" marL="2592000" indent="-216000">
-              <a:spcBef>
-                <a:spcPts val="283"/>
-              </a:spcBef>
-              <a:buClr>
-                <a:srgbClr val="000000"/>
-              </a:buClr>
-              <a:buSzPct val="45000"/>
-              <a:buFont typeface="Wingdings" charset="2"/>
-              <a:buChar char=""/>
-            </a:pPr>
-            <a:r>
-              <a:rPr b="0" lang="en-US" sz="1800" spc="-1" strike="noStrike">
-                <a:solidFill>
-                  <a:srgbClr val="000000"/>
-                </a:solidFill>
-                <a:latin typeface="Arial"/>
-              </a:rPr>
-              <a:t>Sixth Outline Level</a:t>
-            </a:r>
-            <a:endParaRPr b="0" lang="en-US" sz="1800" spc="-1" strike="noStrike">
-              <a:solidFill>
-                <a:srgbClr val="000000"/>
-              </a:solidFill>
-              <a:latin typeface="Arial"/>
-            </a:endParaRPr>
-          </a:p>
-          <a:p>
-            <a:pPr lvl="6" marL="3024000" indent="-216000">
-              <a:spcBef>
-                <a:spcPts val="283"/>
-              </a:spcBef>
-              <a:buClr>
-                <a:srgbClr val="000000"/>
-              </a:buClr>
-              <a:buSzPct val="45000"/>
-              <a:buFont typeface="Wingdings" charset="2"/>
-              <a:buChar char=""/>
-            </a:pPr>
-            <a:r>
-              <a:rPr b="0" lang="en-US" sz="1800" spc="-1" strike="noStrike">
-                <a:solidFill>
-                  <a:srgbClr val="000000"/>
-                </a:solidFill>
-                <a:latin typeface="Arial"/>
-              </a:rPr>
-              <a:t>Seventh Outline Level</a:t>
-            </a:r>
-            <a:endParaRPr b="0" lang="en-US" sz="1800" spc="-1" strike="noStrike">
-              <a:solidFill>
-                <a:srgbClr val="000000"/>
-              </a:solidFill>
-              <a:latin typeface="Arial"/>
-            </a:endParaRPr>
-          </a:p>
-        </p:txBody>
-      </p:sp>
-      <p:sp>
-        <p:nvSpPr>
-          <p:cNvPr id="112" name="PlaceHolder 6"/>
-          <p:cNvSpPr>
-            <a:spLocks noGrp="1"/>
-          </p:cNvSpPr>
-          <p:nvPr>
-            <p:ph type="body"/>
-          </p:nvPr>
-        </p:nvSpPr>
-        <p:spPr>
-          <a:xfrm>
-            <a:off x="3571200" y="4059360"/>
-            <a:ext cx="2920320" cy="2090880"/>
-          </a:xfrm>
-          <a:prstGeom prst="rect">
-            <a:avLst/>
-          </a:prstGeom>
-          <a:noFill/>
-          <a:ln w="0">
-            <a:noFill/>
-          </a:ln>
-        </p:spPr>
-        <p:txBody>
-          <a:bodyPr lIns="0" rIns="0" tIns="0" bIns="0" anchor="t">
-            <a:noAutofit/>
-          </a:bodyPr>
-          <a:p>
-            <a:pPr marL="432000" indent="-324000">
-              <a:spcBef>
-                <a:spcPts val="1417"/>
-              </a:spcBef>
-              <a:buClr>
-                <a:srgbClr val="000000"/>
-              </a:buClr>
-              <a:buSzPct val="45000"/>
-              <a:buFont typeface="Wingdings" charset="2"/>
-              <a:buChar char=""/>
-            </a:pPr>
-            <a:r>
-              <a:rPr b="0" lang="en-US" sz="1800" spc="-1" strike="noStrike">
-                <a:solidFill>
-                  <a:srgbClr val="000000"/>
-                </a:solidFill>
-                <a:latin typeface="Arial"/>
-              </a:rPr>
-              <a:t>Click to edit the outline text format</a:t>
-            </a:r>
-            <a:endParaRPr b="0" lang="en-US" sz="1800" spc="-1" strike="noStrike">
-              <a:solidFill>
-                <a:srgbClr val="000000"/>
-              </a:solidFill>
-              <a:latin typeface="Arial"/>
-            </a:endParaRPr>
-          </a:p>
-          <a:p>
-            <a:pPr lvl="1" marL="864000" indent="-324000">
-              <a:spcBef>
-                <a:spcPts val="1134"/>
-              </a:spcBef>
-              <a:buClr>
-                <a:srgbClr val="000000"/>
-              </a:buClr>
-              <a:buSzPct val="75000"/>
-              <a:buFont typeface="Symbol" charset="2"/>
-              <a:buChar char=""/>
-            </a:pPr>
-            <a:r>
-              <a:rPr b="0" lang="en-US" sz="1800" spc="-1" strike="noStrike">
-                <a:solidFill>
-                  <a:srgbClr val="000000"/>
-                </a:solidFill>
-                <a:latin typeface="Arial"/>
-              </a:rPr>
-              <a:t>Second Outline Level</a:t>
-            </a:r>
-            <a:endParaRPr b="0" lang="en-US" sz="1800" spc="-1" strike="noStrike">
-              <a:solidFill>
-                <a:srgbClr val="000000"/>
-              </a:solidFill>
-              <a:latin typeface="Arial"/>
-            </a:endParaRPr>
-          </a:p>
-          <a:p>
-            <a:pPr lvl="2" marL="1296000" indent="-288000">
-              <a:spcBef>
-                <a:spcPts val="850"/>
-              </a:spcBef>
-              <a:buClr>
-                <a:srgbClr val="000000"/>
-              </a:buClr>
-              <a:buSzPct val="45000"/>
-              <a:buFont typeface="Wingdings" charset="2"/>
-              <a:buChar char=""/>
-            </a:pPr>
-            <a:r>
-              <a:rPr b="0" lang="en-US" sz="1800" spc="-1" strike="noStrike">
-                <a:solidFill>
-                  <a:srgbClr val="000000"/>
-                </a:solidFill>
-                <a:latin typeface="Arial"/>
-              </a:rPr>
-              <a:t>Third Outline Level</a:t>
-            </a:r>
-            <a:endParaRPr b="0" lang="en-US" sz="1800" spc="-1" strike="noStrike">
-              <a:solidFill>
-                <a:srgbClr val="000000"/>
-              </a:solidFill>
-              <a:latin typeface="Arial"/>
-            </a:endParaRPr>
-          </a:p>
-          <a:p>
-            <a:pPr lvl="3" marL="1728000" indent="-216000">
-              <a:spcBef>
-                <a:spcPts val="567"/>
-              </a:spcBef>
-              <a:buClr>
-                <a:srgbClr val="000000"/>
-              </a:buClr>
-              <a:buSzPct val="75000"/>
-              <a:buFont typeface="Symbol" charset="2"/>
-              <a:buChar char=""/>
-            </a:pPr>
-            <a:r>
-              <a:rPr b="0" lang="en-US" sz="1800" spc="-1" strike="noStrike">
-                <a:solidFill>
-                  <a:srgbClr val="000000"/>
-                </a:solidFill>
-                <a:latin typeface="Arial"/>
-              </a:rPr>
-              <a:t>Fourth Outline Level</a:t>
-            </a:r>
-            <a:endParaRPr b="0" lang="en-US" sz="1800" spc="-1" strike="noStrike">
-              <a:solidFill>
-                <a:srgbClr val="000000"/>
-              </a:solidFill>
-              <a:latin typeface="Arial"/>
-            </a:endParaRPr>
-          </a:p>
-          <a:p>
-            <a:pPr lvl="4" marL="2160000" indent="-216000">
-              <a:spcBef>
-                <a:spcPts val="283"/>
-              </a:spcBef>
-              <a:buClr>
-                <a:srgbClr val="000000"/>
-              </a:buClr>
-              <a:buSzPct val="45000"/>
-              <a:buFont typeface="Wingdings" charset="2"/>
-              <a:buChar char=""/>
-            </a:pPr>
-            <a:r>
-              <a:rPr b="0" lang="en-US" sz="1800" spc="-1" strike="noStrike">
-                <a:solidFill>
-                  <a:srgbClr val="000000"/>
-                </a:solidFill>
-                <a:latin typeface="Arial"/>
-              </a:rPr>
-              <a:t>Fifth Outline Level</a:t>
-            </a:r>
-            <a:endParaRPr b="0" lang="en-US" sz="1800" spc="-1" strike="noStrike">
-              <a:solidFill>
-                <a:srgbClr val="000000"/>
-              </a:solidFill>
-              <a:latin typeface="Arial"/>
-            </a:endParaRPr>
-          </a:p>
-          <a:p>
-            <a:pPr lvl="5" marL="2592000" indent="-216000">
-              <a:spcBef>
-                <a:spcPts val="283"/>
-              </a:spcBef>
-              <a:buClr>
-                <a:srgbClr val="000000"/>
-              </a:buClr>
-              <a:buSzPct val="45000"/>
-              <a:buFont typeface="Wingdings" charset="2"/>
-              <a:buChar char=""/>
-            </a:pPr>
-            <a:r>
-              <a:rPr b="0" lang="en-US" sz="1800" spc="-1" strike="noStrike">
-                <a:solidFill>
-                  <a:srgbClr val="000000"/>
-                </a:solidFill>
-                <a:latin typeface="Arial"/>
-              </a:rPr>
-              <a:t>Sixth Outline Level</a:t>
-            </a:r>
-            <a:endParaRPr b="0" lang="en-US" sz="1800" spc="-1" strike="noStrike">
-              <a:solidFill>
-                <a:srgbClr val="000000"/>
-              </a:solidFill>
-              <a:latin typeface="Arial"/>
-            </a:endParaRPr>
-          </a:p>
-          <a:p>
-            <a:pPr lvl="6" marL="3024000" indent="-216000">
-              <a:spcBef>
-                <a:spcPts val="283"/>
-              </a:spcBef>
-              <a:buClr>
-                <a:srgbClr val="000000"/>
-              </a:buClr>
-              <a:buSzPct val="45000"/>
-              <a:buFont typeface="Wingdings" charset="2"/>
-              <a:buChar char=""/>
-            </a:pPr>
-            <a:r>
-              <a:rPr b="0" lang="en-US" sz="1800" spc="-1" strike="noStrike">
-                <a:solidFill>
-                  <a:srgbClr val="000000"/>
-                </a:solidFill>
-                <a:latin typeface="Arial"/>
-              </a:rPr>
-              <a:t>Seventh Outline Level</a:t>
-            </a:r>
-            <a:endParaRPr b="0" lang="en-US" sz="1800" spc="-1" strike="noStrike">
-              <a:solidFill>
-                <a:srgbClr val="000000"/>
-              </a:solidFill>
-              <a:latin typeface="Arial"/>
-            </a:endParaRPr>
-          </a:p>
-        </p:txBody>
-      </p:sp>
-      <p:sp>
-        <p:nvSpPr>
-          <p:cNvPr id="113" name="PlaceHolder 7"/>
-          <p:cNvSpPr>
-            <a:spLocks noGrp="1"/>
-          </p:cNvSpPr>
-          <p:nvPr>
-            <p:ph type="body"/>
-          </p:nvPr>
-        </p:nvSpPr>
-        <p:spPr>
-          <a:xfrm>
-            <a:off x="6638040" y="4059360"/>
-            <a:ext cx="2920320" cy="2090880"/>
-          </a:xfrm>
-          <a:prstGeom prst="rect">
-            <a:avLst/>
-          </a:prstGeom>
-          <a:noFill/>
-          <a:ln w="0">
-            <a:noFill/>
-          </a:ln>
-        </p:spPr>
-        <p:txBody>
-          <a:bodyPr lIns="0" rIns="0" tIns="0" bIns="0" anchor="t">
-            <a:noAutofit/>
-          </a:bodyPr>
-          <a:p>
-            <a:pPr marL="432000" indent="-324000">
-              <a:spcBef>
-                <a:spcPts val="1417"/>
-              </a:spcBef>
-              <a:buClr>
-                <a:srgbClr val="000000"/>
-              </a:buClr>
-              <a:buSzPct val="45000"/>
-              <a:buFont typeface="Wingdings" charset="2"/>
-              <a:buChar char=""/>
-            </a:pPr>
-            <a:r>
-              <a:rPr b="0" lang="en-US" sz="1800" spc="-1" strike="noStrike">
-                <a:solidFill>
-                  <a:srgbClr val="000000"/>
-                </a:solidFill>
-                <a:latin typeface="Arial"/>
-              </a:rPr>
-              <a:t>Click to edit the outline text format</a:t>
-            </a:r>
-            <a:endParaRPr b="0" lang="en-US" sz="1800" spc="-1" strike="noStrike">
-              <a:solidFill>
-                <a:srgbClr val="000000"/>
-              </a:solidFill>
-              <a:latin typeface="Arial"/>
-            </a:endParaRPr>
-          </a:p>
-          <a:p>
-            <a:pPr lvl="1" marL="864000" indent="-324000">
-              <a:spcBef>
-                <a:spcPts val="1134"/>
-              </a:spcBef>
-              <a:buClr>
-                <a:srgbClr val="000000"/>
-              </a:buClr>
-              <a:buSzPct val="75000"/>
-              <a:buFont typeface="Symbol" charset="2"/>
-              <a:buChar char=""/>
-            </a:pPr>
-            <a:r>
-              <a:rPr b="0" lang="en-US" sz="1800" spc="-1" strike="noStrike">
-                <a:solidFill>
-                  <a:srgbClr val="000000"/>
-                </a:solidFill>
-                <a:latin typeface="Arial"/>
-              </a:rPr>
-              <a:t>Second Outline Level</a:t>
-            </a:r>
-            <a:endParaRPr b="0" lang="en-US" sz="1800" spc="-1" strike="noStrike">
-              <a:solidFill>
-                <a:srgbClr val="000000"/>
-              </a:solidFill>
-              <a:latin typeface="Arial"/>
-            </a:endParaRPr>
-          </a:p>
-          <a:p>
-            <a:pPr lvl="2" marL="1296000" indent="-288000">
-              <a:spcBef>
-                <a:spcPts val="850"/>
-              </a:spcBef>
-              <a:buClr>
-                <a:srgbClr val="000000"/>
-              </a:buClr>
-              <a:buSzPct val="45000"/>
-              <a:buFont typeface="Wingdings" charset="2"/>
-              <a:buChar char=""/>
-            </a:pPr>
-            <a:r>
-              <a:rPr b="0" lang="en-US" sz="1800" spc="-1" strike="noStrike">
-                <a:solidFill>
-                  <a:srgbClr val="000000"/>
-                </a:solidFill>
-                <a:latin typeface="Arial"/>
-              </a:rPr>
-              <a:t>Third Outline Level</a:t>
-            </a:r>
-            <a:endParaRPr b="0" lang="en-US" sz="1800" spc="-1" strike="noStrike">
-              <a:solidFill>
-                <a:srgbClr val="000000"/>
-              </a:solidFill>
-              <a:latin typeface="Arial"/>
-            </a:endParaRPr>
-          </a:p>
-          <a:p>
-            <a:pPr lvl="3" marL="1728000" indent="-216000">
-              <a:spcBef>
-                <a:spcPts val="567"/>
-              </a:spcBef>
-              <a:buClr>
-                <a:srgbClr val="000000"/>
-              </a:buClr>
-              <a:buSzPct val="75000"/>
-              <a:buFont typeface="Symbol" charset="2"/>
-              <a:buChar char=""/>
-            </a:pPr>
-            <a:r>
-              <a:rPr b="0" lang="en-US" sz="1800" spc="-1" strike="noStrike">
-                <a:solidFill>
-                  <a:srgbClr val="000000"/>
-                </a:solidFill>
-                <a:latin typeface="Arial"/>
-              </a:rPr>
-              <a:t>Fourth Outline Level</a:t>
-            </a:r>
-            <a:endParaRPr b="0" lang="en-US" sz="1800" spc="-1" strike="noStrike">
-              <a:solidFill>
-                <a:srgbClr val="000000"/>
-              </a:solidFill>
-              <a:latin typeface="Arial"/>
-            </a:endParaRPr>
-          </a:p>
-          <a:p>
-            <a:pPr lvl="4" marL="2160000" indent="-216000">
-              <a:spcBef>
-                <a:spcPts val="283"/>
-              </a:spcBef>
-              <a:buClr>
-                <a:srgbClr val="000000"/>
-              </a:buClr>
-              <a:buSzPct val="45000"/>
-              <a:buFont typeface="Wingdings" charset="2"/>
-              <a:buChar char=""/>
-            </a:pPr>
-            <a:r>
-              <a:rPr b="0" lang="en-US" sz="1800" spc="-1" strike="noStrike">
-                <a:solidFill>
-                  <a:srgbClr val="000000"/>
-                </a:solidFill>
-                <a:latin typeface="Arial"/>
-              </a:rPr>
-              <a:t>Fifth Outline Level</a:t>
-            </a:r>
-            <a:endParaRPr b="0" lang="en-US" sz="1800" spc="-1" strike="noStrike">
-              <a:solidFill>
-                <a:srgbClr val="000000"/>
-              </a:solidFill>
-              <a:latin typeface="Arial"/>
-            </a:endParaRPr>
-          </a:p>
-          <a:p>
-            <a:pPr lvl="5" marL="2592000" indent="-216000">
-              <a:spcBef>
-                <a:spcPts val="283"/>
-              </a:spcBef>
-              <a:buClr>
-                <a:srgbClr val="000000"/>
-              </a:buClr>
-              <a:buSzPct val="45000"/>
-              <a:buFont typeface="Wingdings" charset="2"/>
-              <a:buChar char=""/>
-            </a:pPr>
-            <a:r>
-              <a:rPr b="0" lang="en-US" sz="1800" spc="-1" strike="noStrike">
-                <a:solidFill>
-                  <a:srgbClr val="000000"/>
-                </a:solidFill>
-                <a:latin typeface="Arial"/>
-              </a:rPr>
-              <a:t>Sixth Outline Level</a:t>
-            </a:r>
-            <a:endParaRPr b="0" lang="en-US" sz="1800" spc="-1" strike="noStrike">
-              <a:solidFill>
-                <a:srgbClr val="000000"/>
-              </a:solidFill>
-              <a:latin typeface="Arial"/>
-            </a:endParaRPr>
-          </a:p>
-          <a:p>
-            <a:pPr lvl="6" marL="3024000" indent="-216000">
-              <a:spcBef>
-                <a:spcPts val="283"/>
-              </a:spcBef>
-              <a:buClr>
-                <a:srgbClr val="000000"/>
-              </a:buClr>
-              <a:buSzPct val="45000"/>
-              <a:buFont typeface="Wingdings" charset="2"/>
-              <a:buChar char=""/>
-            </a:pPr>
-            <a:r>
-              <a:rPr b="0" lang="en-US" sz="1800" spc="-1" strike="noStrike">
-                <a:solidFill>
-                  <a:srgbClr val="000000"/>
-                </a:solidFill>
-                <a:latin typeface="Arial"/>
-              </a:rPr>
-              <a:t>Seventh Outline Level</a:t>
-            </a:r>
-            <a:endParaRPr b="0" lang="en-US" sz="1800" spc="-1" strike="noStrike">
-              <a:solidFill>
-                <a:srgbClr val="000000"/>
-              </a:solidFill>
-              <a:latin typeface="Arial"/>
+            <a:pPr>
+              <a:lnSpc>
+                <a:spcPct val="100000"/>
+              </a:lnSpc>
+            </a:pPr>
+            <a:endParaRPr b="0" lang="en-US" sz="1800" spc="-1" strike="noStrike">
+              <a:solidFill>
+                <a:srgbClr val="000000"/>
+              </a:solidFill>
+              <a:latin typeface="Arial"/>
+              <a:ea typeface="DejaVu Sans"/>
             </a:endParaRPr>
           </a:p>
         </p:txBody>
@@ -8933,14 +7583,14 @@
       </p:grpSpPr>
       <p:sp>
         <p:nvSpPr>
-          <p:cNvPr id="114" name="CustomShape 1"/>
+          <p:cNvPr id="101" name="CustomShape 1"/>
           <p:cNvSpPr/>
           <p:nvPr/>
         </p:nvSpPr>
         <p:spPr>
           <a:xfrm>
             <a:off x="0" y="0"/>
-            <a:ext cx="10076400" cy="941400"/>
+            <a:ext cx="10076040" cy="941040"/>
           </a:xfrm>
           <a:prstGeom prst="rect">
             <a:avLst/>
@@ -8971,25 +7621,31 @@
             <a:noAutofit/>
           </a:bodyPr>
           <a:p>
-            <a:endParaRPr b="0" lang="en-US" sz="1800" spc="-1" strike="noStrike">
-              <a:solidFill>
-                <a:srgbClr val="000000"/>
-              </a:solidFill>
-              <a:latin typeface="Arial"/>
+            <a:pPr>
+              <a:lnSpc>
+                <a:spcPct val="100000"/>
+              </a:lnSpc>
+            </a:pPr>
+            <a:endParaRPr b="0" lang="en-US" sz="1800" spc="-1" strike="noStrike">
+              <a:solidFill>
+                <a:srgbClr val="000000"/>
+              </a:solidFill>
+              <a:latin typeface="Arial"/>
+              <a:ea typeface="DejaVu Sans"/>
             </a:endParaRPr>
           </a:p>
         </p:txBody>
       </p:sp>
       <p:sp>
         <p:nvSpPr>
-          <p:cNvPr id="115" name="CustomShape 2"/>
+          <p:cNvPr id="102" name="CustomShape 2"/>
           <p:cNvSpPr/>
           <p:nvPr/>
         </p:nvSpPr>
         <p:spPr>
           <a:xfrm>
             <a:off x="0" y="6620400"/>
-            <a:ext cx="10076400" cy="941400"/>
+            <a:ext cx="10076040" cy="941040"/>
           </a:xfrm>
           <a:prstGeom prst="rect">
             <a:avLst/>
@@ -9020,11 +7676,17 @@
             <a:noAutofit/>
           </a:bodyPr>
           <a:p>
-            <a:endParaRPr b="0" lang="en-US" sz="1800" spc="-1" strike="noStrike">
-              <a:solidFill>
-                <a:srgbClr val="000000"/>
-              </a:solidFill>
-              <a:latin typeface="Arial"/>
+            <a:pPr>
+              <a:lnSpc>
+                <a:spcPct val="100000"/>
+              </a:lnSpc>
+            </a:pPr>
+            <a:endParaRPr b="0" lang="en-US" sz="1800" spc="-1" strike="noStrike">
+              <a:solidFill>
+                <a:srgbClr val="000000"/>
+              </a:solidFill>
+              <a:latin typeface="Arial"/>
+              <a:ea typeface="DejaVu Sans"/>
             </a:endParaRPr>
           </a:p>
         </p:txBody>
@@ -9057,14 +7719,14 @@
       </p:grpSpPr>
       <p:sp>
         <p:nvSpPr>
-          <p:cNvPr id="116" name="CustomShape 1"/>
+          <p:cNvPr id="103" name="CustomShape 1"/>
           <p:cNvSpPr/>
           <p:nvPr/>
         </p:nvSpPr>
         <p:spPr>
           <a:xfrm>
             <a:off x="0" y="0"/>
-            <a:ext cx="10076400" cy="941400"/>
+            <a:ext cx="10076040" cy="941040"/>
           </a:xfrm>
           <a:prstGeom prst="rect">
             <a:avLst/>
@@ -9095,25 +7757,31 @@
             <a:noAutofit/>
           </a:bodyPr>
           <a:p>
-            <a:endParaRPr b="0" lang="en-US" sz="1800" spc="-1" strike="noStrike">
-              <a:solidFill>
-                <a:srgbClr val="000000"/>
-              </a:solidFill>
-              <a:latin typeface="Arial"/>
+            <a:pPr>
+              <a:lnSpc>
+                <a:spcPct val="100000"/>
+              </a:lnSpc>
+            </a:pPr>
+            <a:endParaRPr b="0" lang="en-US" sz="1800" spc="-1" strike="noStrike">
+              <a:solidFill>
+                <a:srgbClr val="000000"/>
+              </a:solidFill>
+              <a:latin typeface="Arial"/>
+              <a:ea typeface="DejaVu Sans"/>
             </a:endParaRPr>
           </a:p>
         </p:txBody>
       </p:sp>
       <p:sp>
         <p:nvSpPr>
-          <p:cNvPr id="117" name="CustomShape 2"/>
+          <p:cNvPr id="104" name="CustomShape 2"/>
           <p:cNvSpPr/>
           <p:nvPr/>
         </p:nvSpPr>
         <p:spPr>
           <a:xfrm>
             <a:off x="0" y="6620400"/>
-            <a:ext cx="10076400" cy="941400"/>
+            <a:ext cx="10076040" cy="941040"/>
           </a:xfrm>
           <a:prstGeom prst="rect">
             <a:avLst/>
@@ -9144,18 +7812,24 @@
             <a:noAutofit/>
           </a:bodyPr>
           <a:p>
-            <a:endParaRPr b="0" lang="en-US" sz="1800" spc="-1" strike="noStrike">
-              <a:solidFill>
-                <a:srgbClr val="000000"/>
-              </a:solidFill>
-              <a:latin typeface="Arial"/>
+            <a:pPr>
+              <a:lnSpc>
+                <a:spcPct val="100000"/>
+              </a:lnSpc>
+            </a:pPr>
+            <a:endParaRPr b="0" lang="en-US" sz="1800" spc="-1" strike="noStrike">
+              <a:solidFill>
+                <a:srgbClr val="000000"/>
+              </a:solidFill>
+              <a:latin typeface="Arial"/>
+              <a:ea typeface="DejaVu Sans"/>
             </a:endParaRPr>
           </a:p>
         </p:txBody>
       </p:sp>
       <p:sp>
         <p:nvSpPr>
-          <p:cNvPr id="118" name="PlaceHolder 1"/>
+          <p:cNvPr id="105" name="PlaceHolder 1"/>
           <p:cNvSpPr>
             <a:spLocks noGrp="1"/>
           </p:cNvSpPr>
@@ -9166,7 +7840,7 @@
         <p:spPr>
           <a:xfrm>
             <a:off x="504000" y="301320"/>
-            <a:ext cx="9071280" cy="637200"/>
+            <a:ext cx="9070920" cy="636840"/>
           </a:xfrm>
           <a:prstGeom prst="rect">
             <a:avLst/>
@@ -9192,6 +7866,231 @@
                 <a:latin typeface="Arial"/>
               </a:rPr>
               <a:t>Click to edit the title text format</a:t>
+            </a:r>
+            <a:endParaRPr b="0" lang="en-US" sz="1800" spc="-1" strike="noStrike">
+              <a:solidFill>
+                <a:srgbClr val="000000"/>
+              </a:solidFill>
+              <a:latin typeface="Arial"/>
+            </a:endParaRPr>
+          </a:p>
+        </p:txBody>
+      </p:sp>
+      <p:sp>
+        <p:nvSpPr>
+          <p:cNvPr id="106" name="PlaceHolder 2"/>
+          <p:cNvSpPr>
+            <a:spLocks noGrp="1"/>
+          </p:cNvSpPr>
+          <p:nvPr>
+            <p:ph type="body"/>
+          </p:nvPr>
+        </p:nvSpPr>
+        <p:spPr>
+          <a:xfrm>
+            <a:off x="504000" y="1769040"/>
+            <a:ext cx="9070920" cy="4383720"/>
+          </a:xfrm>
+          <a:prstGeom prst="rect">
+            <a:avLst/>
+          </a:prstGeom>
+          <a:noFill/>
+          <a:ln w="0">
+            <a:noFill/>
+          </a:ln>
+        </p:spPr>
+        <p:txBody>
+          <a:bodyPr lIns="0" rIns="0" tIns="0" bIns="0" anchor="t">
+            <a:normAutofit/>
+          </a:bodyPr>
+          <a:p>
+            <a:pPr marL="432000" indent="-324000">
+              <a:spcBef>
+                <a:spcPts val="1417"/>
+              </a:spcBef>
+              <a:buClr>
+                <a:srgbClr val="000000"/>
+              </a:buClr>
+              <a:buSzPct val="45000"/>
+              <a:buFont typeface="Wingdings" charset="2"/>
+              <a:buChar char=""/>
+            </a:pPr>
+            <a:r>
+              <a:rPr b="0" lang="en-US" sz="1800" spc="-1" strike="noStrike">
+                <a:solidFill>
+                  <a:srgbClr val="000000"/>
+                </a:solidFill>
+                <a:latin typeface="Arial"/>
+              </a:rPr>
+              <a:t>Click to edit the outline text format</a:t>
+            </a:r>
+            <a:endParaRPr b="0" lang="en-US" sz="1800" spc="-1" strike="noStrike">
+              <a:solidFill>
+                <a:srgbClr val="000000"/>
+              </a:solidFill>
+              <a:latin typeface="Arial"/>
+            </a:endParaRPr>
+          </a:p>
+          <a:p>
+            <a:pPr lvl="1" marL="864000" indent="-324000">
+              <a:spcBef>
+                <a:spcPts val="1134"/>
+              </a:spcBef>
+              <a:buClr>
+                <a:srgbClr val="000000"/>
+              </a:buClr>
+              <a:buSzPct val="75000"/>
+              <a:buFont typeface="Symbol" charset="2"/>
+              <a:buChar char=""/>
+            </a:pPr>
+            <a:r>
+              <a:rPr b="0" lang="en-US" sz="1800" spc="-1" strike="noStrike">
+                <a:solidFill>
+                  <a:srgbClr val="000000"/>
+                </a:solidFill>
+                <a:latin typeface="Arial"/>
+              </a:rPr>
+              <a:t>Second Outline Level</a:t>
+            </a:r>
+            <a:endParaRPr b="0" lang="en-US" sz="1800" spc="-1" strike="noStrike">
+              <a:solidFill>
+                <a:srgbClr val="000000"/>
+              </a:solidFill>
+              <a:latin typeface="Arial"/>
+            </a:endParaRPr>
+          </a:p>
+          <a:p>
+            <a:pPr lvl="2" marL="1296000" indent="-288000">
+              <a:spcBef>
+                <a:spcPts val="850"/>
+              </a:spcBef>
+              <a:buClr>
+                <a:srgbClr val="000000"/>
+              </a:buClr>
+              <a:buSzPct val="45000"/>
+              <a:buFont typeface="Wingdings" charset="2"/>
+              <a:buChar char=""/>
+            </a:pPr>
+            <a:r>
+              <a:rPr b="0" lang="en-US" sz="1800" spc="-1" strike="noStrike">
+                <a:solidFill>
+                  <a:srgbClr val="000000"/>
+                </a:solidFill>
+                <a:latin typeface="Arial"/>
+              </a:rPr>
+              <a:t>Third Outline Level</a:t>
+            </a:r>
+            <a:endParaRPr b="0" lang="en-US" sz="1800" spc="-1" strike="noStrike">
+              <a:solidFill>
+                <a:srgbClr val="000000"/>
+              </a:solidFill>
+              <a:latin typeface="Arial"/>
+            </a:endParaRPr>
+          </a:p>
+          <a:p>
+            <a:pPr lvl="3" marL="1728000" indent="-216000">
+              <a:spcBef>
+                <a:spcPts val="567"/>
+              </a:spcBef>
+              <a:buClr>
+                <a:srgbClr val="000000"/>
+              </a:buClr>
+              <a:buSzPct val="75000"/>
+              <a:buFont typeface="Symbol" charset="2"/>
+              <a:buChar char=""/>
+            </a:pPr>
+            <a:r>
+              <a:rPr b="0" lang="en-US" sz="1800" spc="-1" strike="noStrike">
+                <a:solidFill>
+                  <a:srgbClr val="000000"/>
+                </a:solidFill>
+                <a:latin typeface="Arial"/>
+              </a:rPr>
+              <a:t>Fourth Outline Level</a:t>
+            </a:r>
+            <a:endParaRPr b="0" lang="en-US" sz="1800" spc="-1" strike="noStrike">
+              <a:solidFill>
+                <a:srgbClr val="000000"/>
+              </a:solidFill>
+              <a:latin typeface="Arial"/>
+            </a:endParaRPr>
+          </a:p>
+          <a:p>
+            <a:pPr lvl="4" marL="2160000" indent="-216000">
+              <a:spcBef>
+                <a:spcPts val="283"/>
+              </a:spcBef>
+              <a:buClr>
+                <a:srgbClr val="000000"/>
+              </a:buClr>
+              <a:buSzPct val="45000"/>
+              <a:buFont typeface="Wingdings" charset="2"/>
+              <a:buChar char=""/>
+            </a:pPr>
+            <a:r>
+              <a:rPr b="0" lang="en-US" sz="1800" spc="-1" strike="noStrike">
+                <a:solidFill>
+                  <a:srgbClr val="000000"/>
+                </a:solidFill>
+                <a:latin typeface="Arial"/>
+              </a:rPr>
+              <a:t>Fifth Outline Level</a:t>
+            </a:r>
+            <a:endParaRPr b="0" lang="en-US" sz="1800" spc="-1" strike="noStrike">
+              <a:solidFill>
+                <a:srgbClr val="000000"/>
+              </a:solidFill>
+              <a:latin typeface="Arial"/>
+            </a:endParaRPr>
+          </a:p>
+          <a:p>
+            <a:pPr lvl="5" marL="2592000" indent="-216000">
+              <a:spcBef>
+                <a:spcPts val="283"/>
+              </a:spcBef>
+              <a:buClr>
+                <a:srgbClr val="000000"/>
+              </a:buClr>
+              <a:buSzPct val="45000"/>
+              <a:buFont typeface="Wingdings" charset="2"/>
+              <a:buChar char=""/>
+            </a:pPr>
+            <a:r>
+              <a:rPr b="0" lang="en-US" sz="1800" spc="-1" strike="noStrike">
+                <a:solidFill>
+                  <a:srgbClr val="000000"/>
+                </a:solidFill>
+                <a:latin typeface="Arial"/>
+              </a:rPr>
+              <a:t>Sixth Outline Level</a:t>
+            </a:r>
+            <a:endParaRPr b="0" lang="en-US" sz="1800" spc="-1" strike="noStrike">
+              <a:solidFill>
+                <a:srgbClr val="000000"/>
+              </a:solidFill>
+              <a:latin typeface="Arial"/>
+            </a:endParaRPr>
+          </a:p>
+          <a:p>
+            <a:pPr lvl="6" marL="3024000" indent="-216000">
+              <a:spcBef>
+                <a:spcPts val="283"/>
+              </a:spcBef>
+              <a:buClr>
+                <a:srgbClr val="000000"/>
+              </a:buClr>
+              <a:buSzPct val="45000"/>
+              <a:buFont typeface="Wingdings" charset="2"/>
+              <a:buChar char=""/>
+            </a:pPr>
+            <a:r>
+              <a:rPr b="0" lang="en-US" sz="1800" spc="-1" strike="noStrike">
+                <a:solidFill>
+                  <a:srgbClr val="000000"/>
+                </a:solidFill>
+                <a:latin typeface="Arial"/>
+              </a:rPr>
+              <a:t>Seventh Outline Level</a:t>
             </a:r>
             <a:endParaRPr b="0" lang="en-US" sz="1800" spc="-1" strike="noStrike">
               <a:solidFill>
@@ -9230,14 +8129,14 @@
       </p:grpSpPr>
       <p:sp>
         <p:nvSpPr>
-          <p:cNvPr id="121" name="CustomShape 1"/>
+          <p:cNvPr id="109" name="CustomShape 1"/>
           <p:cNvSpPr/>
           <p:nvPr/>
         </p:nvSpPr>
         <p:spPr>
           <a:xfrm>
             <a:off x="0" y="0"/>
-            <a:ext cx="10076400" cy="941400"/>
+            <a:ext cx="10076040" cy="941040"/>
           </a:xfrm>
           <a:prstGeom prst="rect">
             <a:avLst/>
@@ -9268,25 +8167,31 @@
             <a:noAutofit/>
           </a:bodyPr>
           <a:p>
-            <a:endParaRPr b="0" lang="en-US" sz="1800" spc="-1" strike="noStrike">
-              <a:solidFill>
-                <a:srgbClr val="000000"/>
-              </a:solidFill>
-              <a:latin typeface="Arial"/>
+            <a:pPr>
+              <a:lnSpc>
+                <a:spcPct val="100000"/>
+              </a:lnSpc>
+            </a:pPr>
+            <a:endParaRPr b="0" lang="en-US" sz="1800" spc="-1" strike="noStrike">
+              <a:solidFill>
+                <a:srgbClr val="000000"/>
+              </a:solidFill>
+              <a:latin typeface="Arial"/>
+              <a:ea typeface="DejaVu Sans"/>
             </a:endParaRPr>
           </a:p>
         </p:txBody>
       </p:sp>
       <p:sp>
         <p:nvSpPr>
-          <p:cNvPr id="122" name="CustomShape 2"/>
+          <p:cNvPr id="110" name="CustomShape 2"/>
           <p:cNvSpPr/>
           <p:nvPr/>
         </p:nvSpPr>
         <p:spPr>
           <a:xfrm>
             <a:off x="0" y="6620400"/>
-            <a:ext cx="10076400" cy="941400"/>
+            <a:ext cx="10076040" cy="941040"/>
           </a:xfrm>
           <a:prstGeom prst="rect">
             <a:avLst/>
@@ -9317,18 +8222,24 @@
             <a:noAutofit/>
           </a:bodyPr>
           <a:p>
-            <a:endParaRPr b="0" lang="en-US" sz="1800" spc="-1" strike="noStrike">
-              <a:solidFill>
-                <a:srgbClr val="000000"/>
-              </a:solidFill>
-              <a:latin typeface="Arial"/>
+            <a:pPr>
+              <a:lnSpc>
+                <a:spcPct val="100000"/>
+              </a:lnSpc>
+            </a:pPr>
+            <a:endParaRPr b="0" lang="en-US" sz="1800" spc="-1" strike="noStrike">
+              <a:solidFill>
+                <a:srgbClr val="000000"/>
+              </a:solidFill>
+              <a:latin typeface="Arial"/>
+              <a:ea typeface="DejaVu Sans"/>
             </a:endParaRPr>
           </a:p>
         </p:txBody>
       </p:sp>
       <p:sp>
         <p:nvSpPr>
-          <p:cNvPr id="123" name="PlaceHolder 1"/>
+          <p:cNvPr id="111" name="PlaceHolder 1"/>
           <p:cNvSpPr>
             <a:spLocks noGrp="1"/>
           </p:cNvSpPr>
@@ -9339,7 +8250,7 @@
         <p:spPr>
           <a:xfrm>
             <a:off x="504000" y="301320"/>
-            <a:ext cx="9071280" cy="637200"/>
+            <a:ext cx="9070920" cy="636840"/>
           </a:xfrm>
           <a:prstGeom prst="rect">
             <a:avLst/>
@@ -9377,7 +8288,7 @@
       </p:sp>
       <p:sp>
         <p:nvSpPr>
-          <p:cNvPr id="124" name="PlaceHolder 2"/>
+          <p:cNvPr id="112" name="PlaceHolder 2"/>
           <p:cNvSpPr>
             <a:spLocks noGrp="1"/>
           </p:cNvSpPr>
@@ -9388,7 +8299,7 @@
         <p:spPr>
           <a:xfrm>
             <a:off x="504000" y="1769040"/>
-            <a:ext cx="9071280" cy="4384080"/>
+            <a:ext cx="9070920" cy="4383720"/>
           </a:xfrm>
           <a:prstGeom prst="rect">
             <a:avLst/>
@@ -9400,7 +8311,7 @@
         </p:spPr>
         <p:txBody>
           <a:bodyPr lIns="0" rIns="0" tIns="0" bIns="0" anchor="t">
-            <a:noAutofit/>
+            <a:normAutofit/>
           </a:bodyPr>
           <a:p>
             <a:pPr marL="432000" indent="-324000">
@@ -9639,7 +8550,7 @@
         <p:spPr>
           <a:xfrm>
             <a:off x="0" y="5806440"/>
-            <a:ext cx="10079280" cy="1753920"/>
+            <a:ext cx="10078920" cy="1753560"/>
           </a:xfrm>
           <a:prstGeom prst="rect">
             <a:avLst/>
@@ -9662,7 +8573,7 @@
         <p:spPr>
           <a:xfrm>
             <a:off x="504000" y="301320"/>
-            <a:ext cx="9071280" cy="637200"/>
+            <a:ext cx="9070920" cy="636840"/>
           </a:xfrm>
           <a:prstGeom prst="rect">
             <a:avLst/>
@@ -9711,7 +8622,7 @@
         <p:spPr>
           <a:xfrm>
             <a:off x="504000" y="1769040"/>
-            <a:ext cx="4426560" cy="2090880"/>
+            <a:ext cx="4426200" cy="2090520"/>
           </a:xfrm>
           <a:prstGeom prst="rect">
             <a:avLst/>
@@ -9723,7 +8634,7 @@
         </p:spPr>
         <p:txBody>
           <a:bodyPr lIns="0" rIns="0" tIns="0" bIns="0" anchor="t">
-            <a:noAutofit/>
+            <a:normAutofit fontScale="71666"/>
           </a:bodyPr>
           <a:p>
             <a:pPr marL="432000" indent="-324000">
@@ -9935,8 +8846,8 @@
         </p:nvSpPr>
         <p:spPr>
           <a:xfrm>
-            <a:off x="5152680" y="1769040"/>
-            <a:ext cx="4426560" cy="2090880"/>
+            <a:off x="5152320" y="1769040"/>
+            <a:ext cx="4426200" cy="2090520"/>
           </a:xfrm>
           <a:prstGeom prst="rect">
             <a:avLst/>
@@ -9948,7 +8859,7 @@
         </p:spPr>
         <p:txBody>
           <a:bodyPr lIns="0" rIns="0" tIns="0" bIns="0" anchor="t">
-            <a:noAutofit/>
+            <a:normAutofit fontScale="71666"/>
           </a:bodyPr>
           <a:p>
             <a:pPr marL="432000" indent="-324000">
@@ -10160,8 +9071,8 @@
         </p:nvSpPr>
         <p:spPr>
           <a:xfrm>
-            <a:off x="504000" y="4059360"/>
-            <a:ext cx="9071280" cy="2090880"/>
+            <a:off x="504000" y="4059000"/>
+            <a:ext cx="9070920" cy="2090520"/>
           </a:xfrm>
           <a:prstGeom prst="rect">
             <a:avLst/>
@@ -10173,7 +9084,7 @@
         </p:spPr>
         <p:txBody>
           <a:bodyPr lIns="0" rIns="0" tIns="0" bIns="0" anchor="t">
-            <a:noAutofit/>
+            <a:normAutofit fontScale="81111"/>
           </a:bodyPr>
           <a:p>
             <a:pPr marL="432000" indent="-324000">
@@ -10401,14 +9312,14 @@
       </p:grpSpPr>
       <p:sp>
         <p:nvSpPr>
-          <p:cNvPr id="127" name="CustomShape 1"/>
+          <p:cNvPr id="115" name="CustomShape 1"/>
           <p:cNvSpPr/>
           <p:nvPr/>
         </p:nvSpPr>
         <p:spPr>
           <a:xfrm>
             <a:off x="0" y="0"/>
-            <a:ext cx="10076400" cy="941400"/>
+            <a:ext cx="10076040" cy="941040"/>
           </a:xfrm>
           <a:prstGeom prst="rect">
             <a:avLst/>
@@ -10439,25 +9350,31 @@
             <a:noAutofit/>
           </a:bodyPr>
           <a:p>
-            <a:endParaRPr b="0" lang="en-US" sz="1800" spc="-1" strike="noStrike">
-              <a:solidFill>
-                <a:srgbClr val="000000"/>
-              </a:solidFill>
-              <a:latin typeface="Arial"/>
+            <a:pPr>
+              <a:lnSpc>
+                <a:spcPct val="100000"/>
+              </a:lnSpc>
+            </a:pPr>
+            <a:endParaRPr b="0" lang="en-US" sz="1800" spc="-1" strike="noStrike">
+              <a:solidFill>
+                <a:srgbClr val="000000"/>
+              </a:solidFill>
+              <a:latin typeface="Arial"/>
+              <a:ea typeface="DejaVu Sans"/>
             </a:endParaRPr>
           </a:p>
         </p:txBody>
       </p:sp>
       <p:sp>
         <p:nvSpPr>
-          <p:cNvPr id="128" name="CustomShape 2"/>
+          <p:cNvPr id="116" name="CustomShape 2"/>
           <p:cNvSpPr/>
           <p:nvPr/>
         </p:nvSpPr>
         <p:spPr>
           <a:xfrm>
             <a:off x="0" y="6620400"/>
-            <a:ext cx="10076400" cy="941400"/>
+            <a:ext cx="10076040" cy="941040"/>
           </a:xfrm>
           <a:prstGeom prst="rect">
             <a:avLst/>
@@ -10488,18 +9405,24 @@
             <a:noAutofit/>
           </a:bodyPr>
           <a:p>
-            <a:endParaRPr b="0" lang="en-US" sz="1800" spc="-1" strike="noStrike">
-              <a:solidFill>
-                <a:srgbClr val="000000"/>
-              </a:solidFill>
-              <a:latin typeface="Arial"/>
+            <a:pPr>
+              <a:lnSpc>
+                <a:spcPct val="100000"/>
+              </a:lnSpc>
+            </a:pPr>
+            <a:endParaRPr b="0" lang="en-US" sz="1800" spc="-1" strike="noStrike">
+              <a:solidFill>
+                <a:srgbClr val="000000"/>
+              </a:solidFill>
+              <a:latin typeface="Arial"/>
+              <a:ea typeface="DejaVu Sans"/>
             </a:endParaRPr>
           </a:p>
         </p:txBody>
       </p:sp>
       <p:sp>
         <p:nvSpPr>
-          <p:cNvPr id="129" name="PlaceHolder 1"/>
+          <p:cNvPr id="117" name="PlaceHolder 1"/>
           <p:cNvSpPr>
             <a:spLocks noGrp="1"/>
           </p:cNvSpPr>
@@ -10510,7 +9433,7 @@
         <p:spPr>
           <a:xfrm>
             <a:off x="504000" y="301320"/>
-            <a:ext cx="9071280" cy="637200"/>
+            <a:ext cx="9070920" cy="636840"/>
           </a:xfrm>
           <a:prstGeom prst="rect">
             <a:avLst/>
@@ -10548,7 +9471,7 @@
       </p:sp>
       <p:sp>
         <p:nvSpPr>
-          <p:cNvPr id="130" name="PlaceHolder 2"/>
+          <p:cNvPr id="118" name="PlaceHolder 2"/>
           <p:cNvSpPr>
             <a:spLocks noGrp="1"/>
           </p:cNvSpPr>
@@ -10559,7 +9482,7 @@
         <p:spPr>
           <a:xfrm>
             <a:off x="504000" y="1769040"/>
-            <a:ext cx="4426560" cy="4384080"/>
+            <a:ext cx="4426200" cy="4383720"/>
           </a:xfrm>
           <a:prstGeom prst="rect">
             <a:avLst/>
@@ -10571,7 +9494,7 @@
         </p:spPr>
         <p:txBody>
           <a:bodyPr lIns="0" rIns="0" tIns="0" bIns="0" anchor="t">
-            <a:noAutofit/>
+            <a:normAutofit/>
           </a:bodyPr>
           <a:p>
             <a:pPr marL="432000" indent="-324000">
@@ -10773,7 +9696,7 @@
       </p:sp>
       <p:sp>
         <p:nvSpPr>
-          <p:cNvPr id="131" name="PlaceHolder 3"/>
+          <p:cNvPr id="119" name="PlaceHolder 3"/>
           <p:cNvSpPr>
             <a:spLocks noGrp="1"/>
           </p:cNvSpPr>
@@ -10783,8 +9706,8 @@
         </p:nvSpPr>
         <p:spPr>
           <a:xfrm>
-            <a:off x="5152680" y="1769040"/>
-            <a:ext cx="4426560" cy="4384080"/>
+            <a:off x="5152320" y="1769040"/>
+            <a:ext cx="4426200" cy="4383720"/>
           </a:xfrm>
           <a:prstGeom prst="rect">
             <a:avLst/>
@@ -10796,7 +9719,7 @@
         </p:spPr>
         <p:txBody>
           <a:bodyPr lIns="0" rIns="0" tIns="0" bIns="0" anchor="t">
-            <a:noAutofit/>
+            <a:normAutofit/>
           </a:bodyPr>
           <a:p>
             <a:pPr marL="432000" indent="-324000">
@@ -11024,14 +9947,14 @@
       </p:grpSpPr>
       <p:sp>
         <p:nvSpPr>
-          <p:cNvPr id="135" name="CustomShape 1"/>
+          <p:cNvPr id="123" name="CustomShape 1"/>
           <p:cNvSpPr/>
           <p:nvPr/>
         </p:nvSpPr>
         <p:spPr>
           <a:xfrm>
             <a:off x="0" y="0"/>
-            <a:ext cx="10076400" cy="941400"/>
+            <a:ext cx="10076040" cy="941040"/>
           </a:xfrm>
           <a:prstGeom prst="rect">
             <a:avLst/>
@@ -11062,25 +9985,31 @@
             <a:noAutofit/>
           </a:bodyPr>
           <a:p>
-            <a:endParaRPr b="0" lang="en-US" sz="1800" spc="-1" strike="noStrike">
-              <a:solidFill>
-                <a:srgbClr val="000000"/>
-              </a:solidFill>
-              <a:latin typeface="Arial"/>
+            <a:pPr>
+              <a:lnSpc>
+                <a:spcPct val="100000"/>
+              </a:lnSpc>
+            </a:pPr>
+            <a:endParaRPr b="0" lang="en-US" sz="1800" spc="-1" strike="noStrike">
+              <a:solidFill>
+                <a:srgbClr val="000000"/>
+              </a:solidFill>
+              <a:latin typeface="Arial"/>
+              <a:ea typeface="DejaVu Sans"/>
             </a:endParaRPr>
           </a:p>
         </p:txBody>
       </p:sp>
       <p:sp>
         <p:nvSpPr>
-          <p:cNvPr id="136" name="CustomShape 2"/>
+          <p:cNvPr id="124" name="CustomShape 2"/>
           <p:cNvSpPr/>
           <p:nvPr/>
         </p:nvSpPr>
         <p:spPr>
           <a:xfrm>
             <a:off x="0" y="6620400"/>
-            <a:ext cx="10076400" cy="941400"/>
+            <a:ext cx="10076040" cy="941040"/>
           </a:xfrm>
           <a:prstGeom prst="rect">
             <a:avLst/>
@@ -11111,18 +10040,24 @@
             <a:noAutofit/>
           </a:bodyPr>
           <a:p>
-            <a:endParaRPr b="0" lang="en-US" sz="1800" spc="-1" strike="noStrike">
-              <a:solidFill>
-                <a:srgbClr val="000000"/>
-              </a:solidFill>
-              <a:latin typeface="Arial"/>
+            <a:pPr>
+              <a:lnSpc>
+                <a:spcPct val="100000"/>
+              </a:lnSpc>
+            </a:pPr>
+            <a:endParaRPr b="0" lang="en-US" sz="1800" spc="-1" strike="noStrike">
+              <a:solidFill>
+                <a:srgbClr val="000000"/>
+              </a:solidFill>
+              <a:latin typeface="Arial"/>
+              <a:ea typeface="DejaVu Sans"/>
             </a:endParaRPr>
           </a:p>
         </p:txBody>
       </p:sp>
       <p:sp>
         <p:nvSpPr>
-          <p:cNvPr id="137" name="PlaceHolder 1"/>
+          <p:cNvPr id="125" name="PlaceHolder 1"/>
           <p:cNvSpPr>
             <a:spLocks noGrp="1"/>
           </p:cNvSpPr>
@@ -11133,7 +10068,7 @@
         <p:spPr>
           <a:xfrm>
             <a:off x="504000" y="301320"/>
-            <a:ext cx="9071280" cy="637200"/>
+            <a:ext cx="9070920" cy="636840"/>
           </a:xfrm>
           <a:prstGeom prst="rect">
             <a:avLst/>
@@ -11197,14 +10132,14 @@
       </p:grpSpPr>
       <p:sp>
         <p:nvSpPr>
-          <p:cNvPr id="139" name="CustomShape 1"/>
+          <p:cNvPr id="127" name="CustomShape 1"/>
           <p:cNvSpPr/>
           <p:nvPr/>
         </p:nvSpPr>
         <p:spPr>
           <a:xfrm>
             <a:off x="0" y="0"/>
-            <a:ext cx="10076400" cy="941400"/>
+            <a:ext cx="10076040" cy="941040"/>
           </a:xfrm>
           <a:prstGeom prst="rect">
             <a:avLst/>
@@ -11235,25 +10170,31 @@
             <a:noAutofit/>
           </a:bodyPr>
           <a:p>
-            <a:endParaRPr b="0" lang="en-US" sz="1800" spc="-1" strike="noStrike">
-              <a:solidFill>
-                <a:srgbClr val="000000"/>
-              </a:solidFill>
-              <a:latin typeface="Arial"/>
+            <a:pPr>
+              <a:lnSpc>
+                <a:spcPct val="100000"/>
+              </a:lnSpc>
+            </a:pPr>
+            <a:endParaRPr b="0" lang="en-US" sz="1800" spc="-1" strike="noStrike">
+              <a:solidFill>
+                <a:srgbClr val="000000"/>
+              </a:solidFill>
+              <a:latin typeface="Arial"/>
+              <a:ea typeface="DejaVu Sans"/>
             </a:endParaRPr>
           </a:p>
         </p:txBody>
       </p:sp>
       <p:sp>
         <p:nvSpPr>
-          <p:cNvPr id="140" name="CustomShape 2"/>
+          <p:cNvPr id="128" name="CustomShape 2"/>
           <p:cNvSpPr/>
           <p:nvPr/>
         </p:nvSpPr>
         <p:spPr>
           <a:xfrm>
             <a:off x="0" y="6620400"/>
-            <a:ext cx="10076400" cy="941400"/>
+            <a:ext cx="10076040" cy="941040"/>
           </a:xfrm>
           <a:prstGeom prst="rect">
             <a:avLst/>
@@ -11284,11 +10225,17 @@
             <a:noAutofit/>
           </a:bodyPr>
           <a:p>
-            <a:endParaRPr b="0" lang="en-US" sz="1800" spc="-1" strike="noStrike">
-              <a:solidFill>
-                <a:srgbClr val="000000"/>
-              </a:solidFill>
-              <a:latin typeface="Arial"/>
+            <a:pPr>
+              <a:lnSpc>
+                <a:spcPct val="100000"/>
+              </a:lnSpc>
+            </a:pPr>
+            <a:endParaRPr b="0" lang="en-US" sz="1800" spc="-1" strike="noStrike">
+              <a:solidFill>
+                <a:srgbClr val="000000"/>
+              </a:solidFill>
+              <a:latin typeface="Arial"/>
+              <a:ea typeface="DejaVu Sans"/>
             </a:endParaRPr>
           </a:p>
         </p:txBody>
@@ -11321,14 +10268,14 @@
       </p:grpSpPr>
       <p:sp>
         <p:nvSpPr>
-          <p:cNvPr id="141" name="CustomShape 1"/>
+          <p:cNvPr id="129" name="CustomShape 1"/>
           <p:cNvSpPr/>
           <p:nvPr/>
         </p:nvSpPr>
         <p:spPr>
           <a:xfrm>
             <a:off x="0" y="0"/>
-            <a:ext cx="10076400" cy="941400"/>
+            <a:ext cx="10076040" cy="941040"/>
           </a:xfrm>
           <a:prstGeom prst="rect">
             <a:avLst/>
@@ -11359,25 +10306,31 @@
             <a:noAutofit/>
           </a:bodyPr>
           <a:p>
-            <a:endParaRPr b="0" lang="en-US" sz="1800" spc="-1" strike="noStrike">
-              <a:solidFill>
-                <a:srgbClr val="000000"/>
-              </a:solidFill>
-              <a:latin typeface="Arial"/>
+            <a:pPr>
+              <a:lnSpc>
+                <a:spcPct val="100000"/>
+              </a:lnSpc>
+            </a:pPr>
+            <a:endParaRPr b="0" lang="en-US" sz="1800" spc="-1" strike="noStrike">
+              <a:solidFill>
+                <a:srgbClr val="000000"/>
+              </a:solidFill>
+              <a:latin typeface="Arial"/>
+              <a:ea typeface="DejaVu Sans"/>
             </a:endParaRPr>
           </a:p>
         </p:txBody>
       </p:sp>
       <p:sp>
         <p:nvSpPr>
-          <p:cNvPr id="142" name="CustomShape 2"/>
+          <p:cNvPr id="130" name="CustomShape 2"/>
           <p:cNvSpPr/>
           <p:nvPr/>
         </p:nvSpPr>
         <p:spPr>
           <a:xfrm>
             <a:off x="0" y="6620400"/>
-            <a:ext cx="10076400" cy="941400"/>
+            <a:ext cx="10076040" cy="941040"/>
           </a:xfrm>
           <a:prstGeom prst="rect">
             <a:avLst/>
@@ -11408,18 +10361,24 @@
             <a:noAutofit/>
           </a:bodyPr>
           <a:p>
-            <a:endParaRPr b="0" lang="en-US" sz="1800" spc="-1" strike="noStrike">
-              <a:solidFill>
-                <a:srgbClr val="000000"/>
-              </a:solidFill>
-              <a:latin typeface="Arial"/>
+            <a:pPr>
+              <a:lnSpc>
+                <a:spcPct val="100000"/>
+              </a:lnSpc>
+            </a:pPr>
+            <a:endParaRPr b="0" lang="en-US" sz="1800" spc="-1" strike="noStrike">
+              <a:solidFill>
+                <a:srgbClr val="000000"/>
+              </a:solidFill>
+              <a:latin typeface="Arial"/>
+              <a:ea typeface="DejaVu Sans"/>
             </a:endParaRPr>
           </a:p>
         </p:txBody>
       </p:sp>
       <p:sp>
         <p:nvSpPr>
-          <p:cNvPr id="143" name="PlaceHolder 1"/>
+          <p:cNvPr id="131" name="PlaceHolder 1"/>
           <p:cNvSpPr>
             <a:spLocks noGrp="1"/>
           </p:cNvSpPr>
@@ -11430,7 +10389,7 @@
         <p:spPr>
           <a:xfrm>
             <a:off x="504000" y="301320"/>
-            <a:ext cx="9071280" cy="637200"/>
+            <a:ext cx="9070920" cy="636840"/>
           </a:xfrm>
           <a:prstGeom prst="rect">
             <a:avLst/>
@@ -11468,7 +10427,7 @@
       </p:sp>
       <p:sp>
         <p:nvSpPr>
-          <p:cNvPr id="144" name="PlaceHolder 2"/>
+          <p:cNvPr id="132" name="PlaceHolder 2"/>
           <p:cNvSpPr>
             <a:spLocks noGrp="1"/>
           </p:cNvSpPr>
@@ -11479,7 +10438,7 @@
         <p:spPr>
           <a:xfrm>
             <a:off x="504000" y="1769040"/>
-            <a:ext cx="4426560" cy="2090880"/>
+            <a:ext cx="4426200" cy="2090520"/>
           </a:xfrm>
           <a:prstGeom prst="rect">
             <a:avLst/>
@@ -11491,7 +10450,7 @@
         </p:spPr>
         <p:txBody>
           <a:bodyPr lIns="0" rIns="0" tIns="0" bIns="0" anchor="t">
-            <a:noAutofit/>
+            <a:normAutofit fontScale="71666"/>
           </a:bodyPr>
           <a:p>
             <a:pPr marL="432000" indent="-324000">
@@ -11693,7 +10652,7 @@
       </p:sp>
       <p:sp>
         <p:nvSpPr>
-          <p:cNvPr id="145" name="PlaceHolder 3"/>
+          <p:cNvPr id="133" name="PlaceHolder 3"/>
           <p:cNvSpPr>
             <a:spLocks noGrp="1"/>
           </p:cNvSpPr>
@@ -11703,8 +10662,8 @@
         </p:nvSpPr>
         <p:spPr>
           <a:xfrm>
-            <a:off x="5152680" y="1769040"/>
-            <a:ext cx="4426560" cy="4384080"/>
+            <a:off x="5152320" y="1769040"/>
+            <a:ext cx="4426200" cy="4383720"/>
           </a:xfrm>
           <a:prstGeom prst="rect">
             <a:avLst/>
@@ -11716,7 +10675,7 @@
         </p:spPr>
         <p:txBody>
           <a:bodyPr lIns="0" rIns="0" tIns="0" bIns="0" anchor="t">
-            <a:noAutofit/>
+            <a:normAutofit/>
           </a:bodyPr>
           <a:p>
             <a:pPr marL="432000" indent="-324000">
@@ -11918,7 +10877,7 @@
       </p:sp>
       <p:sp>
         <p:nvSpPr>
-          <p:cNvPr id="146" name="PlaceHolder 4"/>
+          <p:cNvPr id="134" name="PlaceHolder 4"/>
           <p:cNvSpPr>
             <a:spLocks noGrp="1"/>
           </p:cNvSpPr>
@@ -11928,8 +10887,8 @@
         </p:nvSpPr>
         <p:spPr>
           <a:xfrm>
-            <a:off x="504000" y="4059360"/>
-            <a:ext cx="4426560" cy="2090880"/>
+            <a:off x="504000" y="4059000"/>
+            <a:ext cx="4426200" cy="2090520"/>
           </a:xfrm>
           <a:prstGeom prst="rect">
             <a:avLst/>
@@ -11941,7 +10900,7 @@
         </p:spPr>
         <p:txBody>
           <a:bodyPr lIns="0" rIns="0" tIns="0" bIns="0" anchor="t">
-            <a:noAutofit/>
+            <a:normAutofit fontScale="71666"/>
           </a:bodyPr>
           <a:p>
             <a:pPr marL="432000" indent="-324000">
@@ -12169,14 +11128,14 @@
       </p:grpSpPr>
       <p:sp>
         <p:nvSpPr>
-          <p:cNvPr id="151" name="CustomShape 1"/>
+          <p:cNvPr id="139" name="CustomShape 1"/>
           <p:cNvSpPr/>
           <p:nvPr/>
         </p:nvSpPr>
         <p:spPr>
           <a:xfrm>
             <a:off x="0" y="0"/>
-            <a:ext cx="10076400" cy="941400"/>
+            <a:ext cx="10076040" cy="941040"/>
           </a:xfrm>
           <a:prstGeom prst="rect">
             <a:avLst/>
@@ -12207,25 +11166,31 @@
             <a:noAutofit/>
           </a:bodyPr>
           <a:p>
-            <a:endParaRPr b="0" lang="en-US" sz="1800" spc="-1" strike="noStrike">
-              <a:solidFill>
-                <a:srgbClr val="000000"/>
-              </a:solidFill>
-              <a:latin typeface="Arial"/>
+            <a:pPr>
+              <a:lnSpc>
+                <a:spcPct val="100000"/>
+              </a:lnSpc>
+            </a:pPr>
+            <a:endParaRPr b="0" lang="en-US" sz="1800" spc="-1" strike="noStrike">
+              <a:solidFill>
+                <a:srgbClr val="000000"/>
+              </a:solidFill>
+              <a:latin typeface="Arial"/>
+              <a:ea typeface="DejaVu Sans"/>
             </a:endParaRPr>
           </a:p>
         </p:txBody>
       </p:sp>
       <p:sp>
         <p:nvSpPr>
-          <p:cNvPr id="152" name="CustomShape 2"/>
+          <p:cNvPr id="140" name="CustomShape 2"/>
           <p:cNvSpPr/>
           <p:nvPr/>
         </p:nvSpPr>
         <p:spPr>
           <a:xfrm>
             <a:off x="0" y="6620400"/>
-            <a:ext cx="10076400" cy="941400"/>
+            <a:ext cx="10076040" cy="941040"/>
           </a:xfrm>
           <a:prstGeom prst="rect">
             <a:avLst/>
@@ -12256,18 +11221,24 @@
             <a:noAutofit/>
           </a:bodyPr>
           <a:p>
-            <a:endParaRPr b="0" lang="en-US" sz="1800" spc="-1" strike="noStrike">
-              <a:solidFill>
-                <a:srgbClr val="000000"/>
-              </a:solidFill>
-              <a:latin typeface="Arial"/>
+            <a:pPr>
+              <a:lnSpc>
+                <a:spcPct val="100000"/>
+              </a:lnSpc>
+            </a:pPr>
+            <a:endParaRPr b="0" lang="en-US" sz="1800" spc="-1" strike="noStrike">
+              <a:solidFill>
+                <a:srgbClr val="000000"/>
+              </a:solidFill>
+              <a:latin typeface="Arial"/>
+              <a:ea typeface="DejaVu Sans"/>
             </a:endParaRPr>
           </a:p>
         </p:txBody>
       </p:sp>
       <p:sp>
         <p:nvSpPr>
-          <p:cNvPr id="153" name="PlaceHolder 1"/>
+          <p:cNvPr id="141" name="PlaceHolder 1"/>
           <p:cNvSpPr>
             <a:spLocks noGrp="1"/>
           </p:cNvSpPr>
@@ -12278,7 +11249,7 @@
         <p:spPr>
           <a:xfrm>
             <a:off x="504000" y="301320"/>
-            <a:ext cx="9071280" cy="637200"/>
+            <a:ext cx="9070920" cy="636840"/>
           </a:xfrm>
           <a:prstGeom prst="rect">
             <a:avLst/>
@@ -12316,7 +11287,7 @@
       </p:sp>
       <p:sp>
         <p:nvSpPr>
-          <p:cNvPr id="154" name="PlaceHolder 2"/>
+          <p:cNvPr id="142" name="PlaceHolder 2"/>
           <p:cNvSpPr>
             <a:spLocks noGrp="1"/>
           </p:cNvSpPr>
@@ -12327,7 +11298,7 @@
         <p:spPr>
           <a:xfrm>
             <a:off x="504000" y="1769040"/>
-            <a:ext cx="4426560" cy="4384080"/>
+            <a:ext cx="4426200" cy="4383720"/>
           </a:xfrm>
           <a:prstGeom prst="rect">
             <a:avLst/>
@@ -12339,7 +11310,7 @@
         </p:spPr>
         <p:txBody>
           <a:bodyPr lIns="0" rIns="0" tIns="0" bIns="0" anchor="t">
-            <a:noAutofit/>
+            <a:normAutofit/>
           </a:bodyPr>
           <a:p>
             <a:pPr marL="432000" indent="-324000">
@@ -12541,7 +11512,7 @@
       </p:sp>
       <p:sp>
         <p:nvSpPr>
-          <p:cNvPr id="155" name="PlaceHolder 3"/>
+          <p:cNvPr id="143" name="PlaceHolder 3"/>
           <p:cNvSpPr>
             <a:spLocks noGrp="1"/>
           </p:cNvSpPr>
@@ -12551,8 +11522,8 @@
         </p:nvSpPr>
         <p:spPr>
           <a:xfrm>
-            <a:off x="5152680" y="1769040"/>
-            <a:ext cx="4426560" cy="2090880"/>
+            <a:off x="5152320" y="1769040"/>
+            <a:ext cx="4426200" cy="2090520"/>
           </a:xfrm>
           <a:prstGeom prst="rect">
             <a:avLst/>
@@ -12564,7 +11535,7 @@
         </p:spPr>
         <p:txBody>
           <a:bodyPr lIns="0" rIns="0" tIns="0" bIns="0" anchor="t">
-            <a:noAutofit/>
+            <a:normAutofit fontScale="71666"/>
           </a:bodyPr>
           <a:p>
             <a:pPr marL="432000" indent="-324000">
@@ -12766,7 +11737,7 @@
       </p:sp>
       <p:sp>
         <p:nvSpPr>
-          <p:cNvPr id="156" name="PlaceHolder 4"/>
+          <p:cNvPr id="144" name="PlaceHolder 4"/>
           <p:cNvSpPr>
             <a:spLocks noGrp="1"/>
           </p:cNvSpPr>
@@ -12776,8 +11747,8 @@
         </p:nvSpPr>
         <p:spPr>
           <a:xfrm>
-            <a:off x="5152680" y="4059360"/>
-            <a:ext cx="4426560" cy="2090880"/>
+            <a:off x="5152320" y="4059000"/>
+            <a:ext cx="4426200" cy="2090520"/>
           </a:xfrm>
           <a:prstGeom prst="rect">
             <a:avLst/>
@@ -12789,7 +11760,7 @@
         </p:spPr>
         <p:txBody>
           <a:bodyPr lIns="0" rIns="0" tIns="0" bIns="0" anchor="t">
-            <a:noAutofit/>
+            <a:normAutofit fontScale="71666"/>
           </a:bodyPr>
           <a:p>
             <a:pPr marL="432000" indent="-324000">
@@ -13028,7 +11999,7 @@
         <p:spPr>
           <a:xfrm>
             <a:off x="0" y="5806440"/>
-            <a:ext cx="10079280" cy="1753920"/>
+            <a:ext cx="10078920" cy="1753560"/>
           </a:xfrm>
           <a:prstGeom prst="rect">
             <a:avLst/>
@@ -13051,7 +12022,7 @@
         <p:spPr>
           <a:xfrm>
             <a:off x="504000" y="301320"/>
-            <a:ext cx="9071280" cy="637200"/>
+            <a:ext cx="9070920" cy="636840"/>
           </a:xfrm>
           <a:prstGeom prst="rect">
             <a:avLst/>
@@ -13100,7 +12071,7 @@
         <p:spPr>
           <a:xfrm>
             <a:off x="504000" y="1769040"/>
-            <a:ext cx="9071280" cy="2090880"/>
+            <a:ext cx="9070920" cy="2090520"/>
           </a:xfrm>
           <a:prstGeom prst="rect">
             <a:avLst/>
@@ -13112,7 +12083,7 @@
         </p:spPr>
         <p:txBody>
           <a:bodyPr lIns="0" rIns="0" tIns="0" bIns="0" anchor="t">
-            <a:noAutofit/>
+            <a:normAutofit fontScale="81111"/>
           </a:bodyPr>
           <a:p>
             <a:pPr marL="432000" indent="-324000">
@@ -13324,8 +12295,8 @@
         </p:nvSpPr>
         <p:spPr>
           <a:xfrm>
-            <a:off x="504000" y="4059360"/>
-            <a:ext cx="9071280" cy="2090880"/>
+            <a:off x="504000" y="4059000"/>
+            <a:ext cx="9070920" cy="2090520"/>
           </a:xfrm>
           <a:prstGeom prst="rect">
             <a:avLst/>
@@ -13337,7 +12308,7 @@
         </p:spPr>
         <p:txBody>
           <a:bodyPr lIns="0" rIns="0" tIns="0" bIns="0" anchor="t">
-            <a:noAutofit/>
+            <a:normAutofit fontScale="81111"/>
           </a:bodyPr>
           <a:p>
             <a:pPr marL="432000" indent="-324000">
@@ -13576,7 +12547,7 @@
         <p:spPr>
           <a:xfrm>
             <a:off x="0" y="5806440"/>
-            <a:ext cx="10079280" cy="1753920"/>
+            <a:ext cx="10078920" cy="1753560"/>
           </a:xfrm>
           <a:prstGeom prst="rect">
             <a:avLst/>
@@ -13599,7 +12570,7 @@
         <p:spPr>
           <a:xfrm>
             <a:off x="504000" y="301320"/>
-            <a:ext cx="9071280" cy="637200"/>
+            <a:ext cx="9070920" cy="636840"/>
           </a:xfrm>
           <a:prstGeom prst="rect">
             <a:avLst/>
@@ -13648,7 +12619,7 @@
         <p:spPr>
           <a:xfrm>
             <a:off x="504000" y="1769040"/>
-            <a:ext cx="4426560" cy="2090880"/>
+            <a:ext cx="4426200" cy="2090520"/>
           </a:xfrm>
           <a:prstGeom prst="rect">
             <a:avLst/>
@@ -13660,7 +12631,7 @@
         </p:spPr>
         <p:txBody>
           <a:bodyPr lIns="0" rIns="0" tIns="0" bIns="0" anchor="t">
-            <a:noAutofit/>
+            <a:normAutofit fontScale="71666"/>
           </a:bodyPr>
           <a:p>
             <a:pPr marL="432000" indent="-324000">
@@ -13872,8 +12843,8 @@
         </p:nvSpPr>
         <p:spPr>
           <a:xfrm>
-            <a:off x="5152680" y="1769040"/>
-            <a:ext cx="4426560" cy="2090880"/>
+            <a:off x="5152320" y="1769040"/>
+            <a:ext cx="4426200" cy="2090520"/>
           </a:xfrm>
           <a:prstGeom prst="rect">
             <a:avLst/>
@@ -13885,7 +12856,7 @@
         </p:spPr>
         <p:txBody>
           <a:bodyPr lIns="0" rIns="0" tIns="0" bIns="0" anchor="t">
-            <a:noAutofit/>
+            <a:normAutofit fontScale="71666"/>
           </a:bodyPr>
           <a:p>
             <a:pPr marL="432000" indent="-324000">
@@ -14097,8 +13068,8 @@
         </p:nvSpPr>
         <p:spPr>
           <a:xfrm>
-            <a:off x="504000" y="4059360"/>
-            <a:ext cx="4426560" cy="2090880"/>
+            <a:off x="504000" y="4059000"/>
+            <a:ext cx="4426200" cy="2090520"/>
           </a:xfrm>
           <a:prstGeom prst="rect">
             <a:avLst/>
@@ -14110,7 +13081,7 @@
         </p:spPr>
         <p:txBody>
           <a:bodyPr lIns="0" rIns="0" tIns="0" bIns="0" anchor="t">
-            <a:noAutofit/>
+            <a:normAutofit fontScale="71666"/>
           </a:bodyPr>
           <a:p>
             <a:pPr marL="432000" indent="-324000">
@@ -14322,8 +13293,8 @@
         </p:nvSpPr>
         <p:spPr>
           <a:xfrm>
-            <a:off x="5152680" y="4059360"/>
-            <a:ext cx="4426560" cy="2090880"/>
+            <a:off x="5152320" y="4059000"/>
+            <a:ext cx="4426200" cy="2090520"/>
           </a:xfrm>
           <a:prstGeom prst="rect">
             <a:avLst/>
@@ -14335,7 +13306,7 @@
         </p:spPr>
         <p:txBody>
           <a:bodyPr lIns="0" rIns="0" tIns="0" bIns="0" anchor="t">
-            <a:noAutofit/>
+            <a:normAutofit fontScale="71666"/>
           </a:bodyPr>
           <a:p>
             <a:pPr marL="432000" indent="-324000">
@@ -14574,7 +13545,7 @@
         <p:spPr>
           <a:xfrm>
             <a:off x="0" y="5806440"/>
-            <a:ext cx="10079280" cy="1753920"/>
+            <a:ext cx="10078920" cy="1753560"/>
           </a:xfrm>
           <a:prstGeom prst="rect">
             <a:avLst/>
@@ -14584,1405 +13555,6 @@
           </a:ln>
         </p:spPr>
       </p:pic>
-      <p:sp>
-        <p:nvSpPr>
-          <p:cNvPr id="37" name="PlaceHolder 1"/>
-          <p:cNvSpPr>
-            <a:spLocks noGrp="1"/>
-          </p:cNvSpPr>
-          <p:nvPr>
-            <p:ph type="title"/>
-          </p:nvPr>
-        </p:nvSpPr>
-        <p:spPr>
-          <a:xfrm>
-            <a:off x="504000" y="301320"/>
-            <a:ext cx="9071280" cy="637200"/>
-          </a:xfrm>
-          <a:prstGeom prst="rect">
-            <a:avLst/>
-          </a:prstGeom>
-          <a:noFill/>
-          <a:ln w="0">
-            <a:noFill/>
-          </a:ln>
-        </p:spPr>
-        <p:txBody>
-          <a:bodyPr lIns="0" rIns="0" tIns="0" bIns="0" anchor="ctr">
-            <a:noAutofit/>
-          </a:bodyPr>
-          <a:p>
-            <a:pPr indent="0">
-              <a:buNone/>
-            </a:pPr>
-            <a:r>
-              <a:rPr b="0" lang="en-US" sz="1800" spc="-1" strike="noStrike">
-                <a:solidFill>
-                  <a:srgbClr val="000000"/>
-                </a:solidFill>
-                <a:latin typeface="Arial"/>
-              </a:rPr>
-              <a:t>Click to edit the title text format</a:t>
-            </a:r>
-            <a:endParaRPr b="0" lang="en-US" sz="1800" spc="-1" strike="noStrike">
-              <a:solidFill>
-                <a:srgbClr val="000000"/>
-              </a:solidFill>
-              <a:latin typeface="Arial"/>
-            </a:endParaRPr>
-          </a:p>
-        </p:txBody>
-      </p:sp>
-      <p:sp>
-        <p:nvSpPr>
-          <p:cNvPr id="38" name="PlaceHolder 2"/>
-          <p:cNvSpPr>
-            <a:spLocks noGrp="1"/>
-          </p:cNvSpPr>
-          <p:nvPr>
-            <p:ph type="body"/>
-          </p:nvPr>
-        </p:nvSpPr>
-        <p:spPr>
-          <a:xfrm>
-            <a:off x="504000" y="1769040"/>
-            <a:ext cx="2920320" cy="2090880"/>
-          </a:xfrm>
-          <a:prstGeom prst="rect">
-            <a:avLst/>
-          </a:prstGeom>
-          <a:noFill/>
-          <a:ln w="0">
-            <a:noFill/>
-          </a:ln>
-        </p:spPr>
-        <p:txBody>
-          <a:bodyPr lIns="0" rIns="0" tIns="0" bIns="0" anchor="t">
-            <a:noAutofit/>
-          </a:bodyPr>
-          <a:p>
-            <a:pPr marL="432000" indent="-324000">
-              <a:spcBef>
-                <a:spcPts val="1417"/>
-              </a:spcBef>
-              <a:buClr>
-                <a:srgbClr val="000000"/>
-              </a:buClr>
-              <a:buSzPct val="45000"/>
-              <a:buFont typeface="Wingdings" charset="2"/>
-              <a:buChar char=""/>
-            </a:pPr>
-            <a:r>
-              <a:rPr b="0" lang="en-US" sz="1800" spc="-1" strike="noStrike">
-                <a:solidFill>
-                  <a:srgbClr val="000000"/>
-                </a:solidFill>
-                <a:latin typeface="Arial"/>
-              </a:rPr>
-              <a:t>Click to edit the outline text format</a:t>
-            </a:r>
-            <a:endParaRPr b="0" lang="en-US" sz="1800" spc="-1" strike="noStrike">
-              <a:solidFill>
-                <a:srgbClr val="000000"/>
-              </a:solidFill>
-              <a:latin typeface="Arial"/>
-            </a:endParaRPr>
-          </a:p>
-          <a:p>
-            <a:pPr lvl="1" marL="864000" indent="-324000">
-              <a:spcBef>
-                <a:spcPts val="1134"/>
-              </a:spcBef>
-              <a:buClr>
-                <a:srgbClr val="000000"/>
-              </a:buClr>
-              <a:buSzPct val="75000"/>
-              <a:buFont typeface="Symbol" charset="2"/>
-              <a:buChar char=""/>
-            </a:pPr>
-            <a:r>
-              <a:rPr b="0" lang="en-US" sz="1800" spc="-1" strike="noStrike">
-                <a:solidFill>
-                  <a:srgbClr val="000000"/>
-                </a:solidFill>
-                <a:latin typeface="Arial"/>
-              </a:rPr>
-              <a:t>Second Outline Level</a:t>
-            </a:r>
-            <a:endParaRPr b="0" lang="en-US" sz="1800" spc="-1" strike="noStrike">
-              <a:solidFill>
-                <a:srgbClr val="000000"/>
-              </a:solidFill>
-              <a:latin typeface="Arial"/>
-            </a:endParaRPr>
-          </a:p>
-          <a:p>
-            <a:pPr lvl="2" marL="1296000" indent="-288000">
-              <a:spcBef>
-                <a:spcPts val="850"/>
-              </a:spcBef>
-              <a:buClr>
-                <a:srgbClr val="000000"/>
-              </a:buClr>
-              <a:buSzPct val="45000"/>
-              <a:buFont typeface="Wingdings" charset="2"/>
-              <a:buChar char=""/>
-            </a:pPr>
-            <a:r>
-              <a:rPr b="0" lang="en-US" sz="1800" spc="-1" strike="noStrike">
-                <a:solidFill>
-                  <a:srgbClr val="000000"/>
-                </a:solidFill>
-                <a:latin typeface="Arial"/>
-              </a:rPr>
-              <a:t>Third Outline Level</a:t>
-            </a:r>
-            <a:endParaRPr b="0" lang="en-US" sz="1800" spc="-1" strike="noStrike">
-              <a:solidFill>
-                <a:srgbClr val="000000"/>
-              </a:solidFill>
-              <a:latin typeface="Arial"/>
-            </a:endParaRPr>
-          </a:p>
-          <a:p>
-            <a:pPr lvl="3" marL="1728000" indent="-216000">
-              <a:spcBef>
-                <a:spcPts val="567"/>
-              </a:spcBef>
-              <a:buClr>
-                <a:srgbClr val="000000"/>
-              </a:buClr>
-              <a:buSzPct val="75000"/>
-              <a:buFont typeface="Symbol" charset="2"/>
-              <a:buChar char=""/>
-            </a:pPr>
-            <a:r>
-              <a:rPr b="0" lang="en-US" sz="1800" spc="-1" strike="noStrike">
-                <a:solidFill>
-                  <a:srgbClr val="000000"/>
-                </a:solidFill>
-                <a:latin typeface="Arial"/>
-              </a:rPr>
-              <a:t>Fourth Outline Level</a:t>
-            </a:r>
-            <a:endParaRPr b="0" lang="en-US" sz="1800" spc="-1" strike="noStrike">
-              <a:solidFill>
-                <a:srgbClr val="000000"/>
-              </a:solidFill>
-              <a:latin typeface="Arial"/>
-            </a:endParaRPr>
-          </a:p>
-          <a:p>
-            <a:pPr lvl="4" marL="2160000" indent="-216000">
-              <a:spcBef>
-                <a:spcPts val="283"/>
-              </a:spcBef>
-              <a:buClr>
-                <a:srgbClr val="000000"/>
-              </a:buClr>
-              <a:buSzPct val="45000"/>
-              <a:buFont typeface="Wingdings" charset="2"/>
-              <a:buChar char=""/>
-            </a:pPr>
-            <a:r>
-              <a:rPr b="0" lang="en-US" sz="1800" spc="-1" strike="noStrike">
-                <a:solidFill>
-                  <a:srgbClr val="000000"/>
-                </a:solidFill>
-                <a:latin typeface="Arial"/>
-              </a:rPr>
-              <a:t>Fifth Outline Level</a:t>
-            </a:r>
-            <a:endParaRPr b="0" lang="en-US" sz="1800" spc="-1" strike="noStrike">
-              <a:solidFill>
-                <a:srgbClr val="000000"/>
-              </a:solidFill>
-              <a:latin typeface="Arial"/>
-            </a:endParaRPr>
-          </a:p>
-          <a:p>
-            <a:pPr lvl="5" marL="2592000" indent="-216000">
-              <a:spcBef>
-                <a:spcPts val="283"/>
-              </a:spcBef>
-              <a:buClr>
-                <a:srgbClr val="000000"/>
-              </a:buClr>
-              <a:buSzPct val="45000"/>
-              <a:buFont typeface="Wingdings" charset="2"/>
-              <a:buChar char=""/>
-            </a:pPr>
-            <a:r>
-              <a:rPr b="0" lang="en-US" sz="1800" spc="-1" strike="noStrike">
-                <a:solidFill>
-                  <a:srgbClr val="000000"/>
-                </a:solidFill>
-                <a:latin typeface="Arial"/>
-              </a:rPr>
-              <a:t>Sixth Outline Level</a:t>
-            </a:r>
-            <a:endParaRPr b="0" lang="en-US" sz="1800" spc="-1" strike="noStrike">
-              <a:solidFill>
-                <a:srgbClr val="000000"/>
-              </a:solidFill>
-              <a:latin typeface="Arial"/>
-            </a:endParaRPr>
-          </a:p>
-          <a:p>
-            <a:pPr lvl="6" marL="3024000" indent="-216000">
-              <a:spcBef>
-                <a:spcPts val="283"/>
-              </a:spcBef>
-              <a:buClr>
-                <a:srgbClr val="000000"/>
-              </a:buClr>
-              <a:buSzPct val="45000"/>
-              <a:buFont typeface="Wingdings" charset="2"/>
-              <a:buChar char=""/>
-            </a:pPr>
-            <a:r>
-              <a:rPr b="0" lang="en-US" sz="1800" spc="-1" strike="noStrike">
-                <a:solidFill>
-                  <a:srgbClr val="000000"/>
-                </a:solidFill>
-                <a:latin typeface="Arial"/>
-              </a:rPr>
-              <a:t>Seventh Outline Level</a:t>
-            </a:r>
-            <a:endParaRPr b="0" lang="en-US" sz="1800" spc="-1" strike="noStrike">
-              <a:solidFill>
-                <a:srgbClr val="000000"/>
-              </a:solidFill>
-              <a:latin typeface="Arial"/>
-            </a:endParaRPr>
-          </a:p>
-        </p:txBody>
-      </p:sp>
-      <p:sp>
-        <p:nvSpPr>
-          <p:cNvPr id="39" name="PlaceHolder 3"/>
-          <p:cNvSpPr>
-            <a:spLocks noGrp="1"/>
-          </p:cNvSpPr>
-          <p:nvPr>
-            <p:ph type="body"/>
-          </p:nvPr>
-        </p:nvSpPr>
-        <p:spPr>
-          <a:xfrm>
-            <a:off x="3571200" y="1769040"/>
-            <a:ext cx="2920320" cy="2090880"/>
-          </a:xfrm>
-          <a:prstGeom prst="rect">
-            <a:avLst/>
-          </a:prstGeom>
-          <a:noFill/>
-          <a:ln w="0">
-            <a:noFill/>
-          </a:ln>
-        </p:spPr>
-        <p:txBody>
-          <a:bodyPr lIns="0" rIns="0" tIns="0" bIns="0" anchor="t">
-            <a:noAutofit/>
-          </a:bodyPr>
-          <a:p>
-            <a:pPr marL="432000" indent="-324000">
-              <a:spcBef>
-                <a:spcPts val="1417"/>
-              </a:spcBef>
-              <a:buClr>
-                <a:srgbClr val="000000"/>
-              </a:buClr>
-              <a:buSzPct val="45000"/>
-              <a:buFont typeface="Wingdings" charset="2"/>
-              <a:buChar char=""/>
-            </a:pPr>
-            <a:r>
-              <a:rPr b="0" lang="en-US" sz="1800" spc="-1" strike="noStrike">
-                <a:solidFill>
-                  <a:srgbClr val="000000"/>
-                </a:solidFill>
-                <a:latin typeface="Arial"/>
-              </a:rPr>
-              <a:t>Click to edit the outline text format</a:t>
-            </a:r>
-            <a:endParaRPr b="0" lang="en-US" sz="1800" spc="-1" strike="noStrike">
-              <a:solidFill>
-                <a:srgbClr val="000000"/>
-              </a:solidFill>
-              <a:latin typeface="Arial"/>
-            </a:endParaRPr>
-          </a:p>
-          <a:p>
-            <a:pPr lvl="1" marL="864000" indent="-324000">
-              <a:spcBef>
-                <a:spcPts val="1134"/>
-              </a:spcBef>
-              <a:buClr>
-                <a:srgbClr val="000000"/>
-              </a:buClr>
-              <a:buSzPct val="75000"/>
-              <a:buFont typeface="Symbol" charset="2"/>
-              <a:buChar char=""/>
-            </a:pPr>
-            <a:r>
-              <a:rPr b="0" lang="en-US" sz="1800" spc="-1" strike="noStrike">
-                <a:solidFill>
-                  <a:srgbClr val="000000"/>
-                </a:solidFill>
-                <a:latin typeface="Arial"/>
-              </a:rPr>
-              <a:t>Second Outline Level</a:t>
-            </a:r>
-            <a:endParaRPr b="0" lang="en-US" sz="1800" spc="-1" strike="noStrike">
-              <a:solidFill>
-                <a:srgbClr val="000000"/>
-              </a:solidFill>
-              <a:latin typeface="Arial"/>
-            </a:endParaRPr>
-          </a:p>
-          <a:p>
-            <a:pPr lvl="2" marL="1296000" indent="-288000">
-              <a:spcBef>
-                <a:spcPts val="850"/>
-              </a:spcBef>
-              <a:buClr>
-                <a:srgbClr val="000000"/>
-              </a:buClr>
-              <a:buSzPct val="45000"/>
-              <a:buFont typeface="Wingdings" charset="2"/>
-              <a:buChar char=""/>
-            </a:pPr>
-            <a:r>
-              <a:rPr b="0" lang="en-US" sz="1800" spc="-1" strike="noStrike">
-                <a:solidFill>
-                  <a:srgbClr val="000000"/>
-                </a:solidFill>
-                <a:latin typeface="Arial"/>
-              </a:rPr>
-              <a:t>Third Outline Level</a:t>
-            </a:r>
-            <a:endParaRPr b="0" lang="en-US" sz="1800" spc="-1" strike="noStrike">
-              <a:solidFill>
-                <a:srgbClr val="000000"/>
-              </a:solidFill>
-              <a:latin typeface="Arial"/>
-            </a:endParaRPr>
-          </a:p>
-          <a:p>
-            <a:pPr lvl="3" marL="1728000" indent="-216000">
-              <a:spcBef>
-                <a:spcPts val="567"/>
-              </a:spcBef>
-              <a:buClr>
-                <a:srgbClr val="000000"/>
-              </a:buClr>
-              <a:buSzPct val="75000"/>
-              <a:buFont typeface="Symbol" charset="2"/>
-              <a:buChar char=""/>
-            </a:pPr>
-            <a:r>
-              <a:rPr b="0" lang="en-US" sz="1800" spc="-1" strike="noStrike">
-                <a:solidFill>
-                  <a:srgbClr val="000000"/>
-                </a:solidFill>
-                <a:latin typeface="Arial"/>
-              </a:rPr>
-              <a:t>Fourth Outline Level</a:t>
-            </a:r>
-            <a:endParaRPr b="0" lang="en-US" sz="1800" spc="-1" strike="noStrike">
-              <a:solidFill>
-                <a:srgbClr val="000000"/>
-              </a:solidFill>
-              <a:latin typeface="Arial"/>
-            </a:endParaRPr>
-          </a:p>
-          <a:p>
-            <a:pPr lvl="4" marL="2160000" indent="-216000">
-              <a:spcBef>
-                <a:spcPts val="283"/>
-              </a:spcBef>
-              <a:buClr>
-                <a:srgbClr val="000000"/>
-              </a:buClr>
-              <a:buSzPct val="45000"/>
-              <a:buFont typeface="Wingdings" charset="2"/>
-              <a:buChar char=""/>
-            </a:pPr>
-            <a:r>
-              <a:rPr b="0" lang="en-US" sz="1800" spc="-1" strike="noStrike">
-                <a:solidFill>
-                  <a:srgbClr val="000000"/>
-                </a:solidFill>
-                <a:latin typeface="Arial"/>
-              </a:rPr>
-              <a:t>Fifth Outline Level</a:t>
-            </a:r>
-            <a:endParaRPr b="0" lang="en-US" sz="1800" spc="-1" strike="noStrike">
-              <a:solidFill>
-                <a:srgbClr val="000000"/>
-              </a:solidFill>
-              <a:latin typeface="Arial"/>
-            </a:endParaRPr>
-          </a:p>
-          <a:p>
-            <a:pPr lvl="5" marL="2592000" indent="-216000">
-              <a:spcBef>
-                <a:spcPts val="283"/>
-              </a:spcBef>
-              <a:buClr>
-                <a:srgbClr val="000000"/>
-              </a:buClr>
-              <a:buSzPct val="45000"/>
-              <a:buFont typeface="Wingdings" charset="2"/>
-              <a:buChar char=""/>
-            </a:pPr>
-            <a:r>
-              <a:rPr b="0" lang="en-US" sz="1800" spc="-1" strike="noStrike">
-                <a:solidFill>
-                  <a:srgbClr val="000000"/>
-                </a:solidFill>
-                <a:latin typeface="Arial"/>
-              </a:rPr>
-              <a:t>Sixth Outline Level</a:t>
-            </a:r>
-            <a:endParaRPr b="0" lang="en-US" sz="1800" spc="-1" strike="noStrike">
-              <a:solidFill>
-                <a:srgbClr val="000000"/>
-              </a:solidFill>
-              <a:latin typeface="Arial"/>
-            </a:endParaRPr>
-          </a:p>
-          <a:p>
-            <a:pPr lvl="6" marL="3024000" indent="-216000">
-              <a:spcBef>
-                <a:spcPts val="283"/>
-              </a:spcBef>
-              <a:buClr>
-                <a:srgbClr val="000000"/>
-              </a:buClr>
-              <a:buSzPct val="45000"/>
-              <a:buFont typeface="Wingdings" charset="2"/>
-              <a:buChar char=""/>
-            </a:pPr>
-            <a:r>
-              <a:rPr b="0" lang="en-US" sz="1800" spc="-1" strike="noStrike">
-                <a:solidFill>
-                  <a:srgbClr val="000000"/>
-                </a:solidFill>
-                <a:latin typeface="Arial"/>
-              </a:rPr>
-              <a:t>Seventh Outline Level</a:t>
-            </a:r>
-            <a:endParaRPr b="0" lang="en-US" sz="1800" spc="-1" strike="noStrike">
-              <a:solidFill>
-                <a:srgbClr val="000000"/>
-              </a:solidFill>
-              <a:latin typeface="Arial"/>
-            </a:endParaRPr>
-          </a:p>
-        </p:txBody>
-      </p:sp>
-      <p:sp>
-        <p:nvSpPr>
-          <p:cNvPr id="40" name="PlaceHolder 4"/>
-          <p:cNvSpPr>
-            <a:spLocks noGrp="1"/>
-          </p:cNvSpPr>
-          <p:nvPr>
-            <p:ph type="body"/>
-          </p:nvPr>
-        </p:nvSpPr>
-        <p:spPr>
-          <a:xfrm>
-            <a:off x="6638040" y="1769040"/>
-            <a:ext cx="2920320" cy="2090880"/>
-          </a:xfrm>
-          <a:prstGeom prst="rect">
-            <a:avLst/>
-          </a:prstGeom>
-          <a:noFill/>
-          <a:ln w="0">
-            <a:noFill/>
-          </a:ln>
-        </p:spPr>
-        <p:txBody>
-          <a:bodyPr lIns="0" rIns="0" tIns="0" bIns="0" anchor="t">
-            <a:noAutofit/>
-          </a:bodyPr>
-          <a:p>
-            <a:pPr marL="432000" indent="-324000">
-              <a:spcBef>
-                <a:spcPts val="1417"/>
-              </a:spcBef>
-              <a:buClr>
-                <a:srgbClr val="000000"/>
-              </a:buClr>
-              <a:buSzPct val="45000"/>
-              <a:buFont typeface="Wingdings" charset="2"/>
-              <a:buChar char=""/>
-            </a:pPr>
-            <a:r>
-              <a:rPr b="0" lang="en-US" sz="1800" spc="-1" strike="noStrike">
-                <a:solidFill>
-                  <a:srgbClr val="000000"/>
-                </a:solidFill>
-                <a:latin typeface="Arial"/>
-              </a:rPr>
-              <a:t>Click to edit the outline text format</a:t>
-            </a:r>
-            <a:endParaRPr b="0" lang="en-US" sz="1800" spc="-1" strike="noStrike">
-              <a:solidFill>
-                <a:srgbClr val="000000"/>
-              </a:solidFill>
-              <a:latin typeface="Arial"/>
-            </a:endParaRPr>
-          </a:p>
-          <a:p>
-            <a:pPr lvl="1" marL="864000" indent="-324000">
-              <a:spcBef>
-                <a:spcPts val="1134"/>
-              </a:spcBef>
-              <a:buClr>
-                <a:srgbClr val="000000"/>
-              </a:buClr>
-              <a:buSzPct val="75000"/>
-              <a:buFont typeface="Symbol" charset="2"/>
-              <a:buChar char=""/>
-            </a:pPr>
-            <a:r>
-              <a:rPr b="0" lang="en-US" sz="1800" spc="-1" strike="noStrike">
-                <a:solidFill>
-                  <a:srgbClr val="000000"/>
-                </a:solidFill>
-                <a:latin typeface="Arial"/>
-              </a:rPr>
-              <a:t>Second Outline Level</a:t>
-            </a:r>
-            <a:endParaRPr b="0" lang="en-US" sz="1800" spc="-1" strike="noStrike">
-              <a:solidFill>
-                <a:srgbClr val="000000"/>
-              </a:solidFill>
-              <a:latin typeface="Arial"/>
-            </a:endParaRPr>
-          </a:p>
-          <a:p>
-            <a:pPr lvl="2" marL="1296000" indent="-288000">
-              <a:spcBef>
-                <a:spcPts val="850"/>
-              </a:spcBef>
-              <a:buClr>
-                <a:srgbClr val="000000"/>
-              </a:buClr>
-              <a:buSzPct val="45000"/>
-              <a:buFont typeface="Wingdings" charset="2"/>
-              <a:buChar char=""/>
-            </a:pPr>
-            <a:r>
-              <a:rPr b="0" lang="en-US" sz="1800" spc="-1" strike="noStrike">
-                <a:solidFill>
-                  <a:srgbClr val="000000"/>
-                </a:solidFill>
-                <a:latin typeface="Arial"/>
-              </a:rPr>
-              <a:t>Third Outline Level</a:t>
-            </a:r>
-            <a:endParaRPr b="0" lang="en-US" sz="1800" spc="-1" strike="noStrike">
-              <a:solidFill>
-                <a:srgbClr val="000000"/>
-              </a:solidFill>
-              <a:latin typeface="Arial"/>
-            </a:endParaRPr>
-          </a:p>
-          <a:p>
-            <a:pPr lvl="3" marL="1728000" indent="-216000">
-              <a:spcBef>
-                <a:spcPts val="567"/>
-              </a:spcBef>
-              <a:buClr>
-                <a:srgbClr val="000000"/>
-              </a:buClr>
-              <a:buSzPct val="75000"/>
-              <a:buFont typeface="Symbol" charset="2"/>
-              <a:buChar char=""/>
-            </a:pPr>
-            <a:r>
-              <a:rPr b="0" lang="en-US" sz="1800" spc="-1" strike="noStrike">
-                <a:solidFill>
-                  <a:srgbClr val="000000"/>
-                </a:solidFill>
-                <a:latin typeface="Arial"/>
-              </a:rPr>
-              <a:t>Fourth Outline Level</a:t>
-            </a:r>
-            <a:endParaRPr b="0" lang="en-US" sz="1800" spc="-1" strike="noStrike">
-              <a:solidFill>
-                <a:srgbClr val="000000"/>
-              </a:solidFill>
-              <a:latin typeface="Arial"/>
-            </a:endParaRPr>
-          </a:p>
-          <a:p>
-            <a:pPr lvl="4" marL="2160000" indent="-216000">
-              <a:spcBef>
-                <a:spcPts val="283"/>
-              </a:spcBef>
-              <a:buClr>
-                <a:srgbClr val="000000"/>
-              </a:buClr>
-              <a:buSzPct val="45000"/>
-              <a:buFont typeface="Wingdings" charset="2"/>
-              <a:buChar char=""/>
-            </a:pPr>
-            <a:r>
-              <a:rPr b="0" lang="en-US" sz="1800" spc="-1" strike="noStrike">
-                <a:solidFill>
-                  <a:srgbClr val="000000"/>
-                </a:solidFill>
-                <a:latin typeface="Arial"/>
-              </a:rPr>
-              <a:t>Fifth Outline Level</a:t>
-            </a:r>
-            <a:endParaRPr b="0" lang="en-US" sz="1800" spc="-1" strike="noStrike">
-              <a:solidFill>
-                <a:srgbClr val="000000"/>
-              </a:solidFill>
-              <a:latin typeface="Arial"/>
-            </a:endParaRPr>
-          </a:p>
-          <a:p>
-            <a:pPr lvl="5" marL="2592000" indent="-216000">
-              <a:spcBef>
-                <a:spcPts val="283"/>
-              </a:spcBef>
-              <a:buClr>
-                <a:srgbClr val="000000"/>
-              </a:buClr>
-              <a:buSzPct val="45000"/>
-              <a:buFont typeface="Wingdings" charset="2"/>
-              <a:buChar char=""/>
-            </a:pPr>
-            <a:r>
-              <a:rPr b="0" lang="en-US" sz="1800" spc="-1" strike="noStrike">
-                <a:solidFill>
-                  <a:srgbClr val="000000"/>
-                </a:solidFill>
-                <a:latin typeface="Arial"/>
-              </a:rPr>
-              <a:t>Sixth Outline Level</a:t>
-            </a:r>
-            <a:endParaRPr b="0" lang="en-US" sz="1800" spc="-1" strike="noStrike">
-              <a:solidFill>
-                <a:srgbClr val="000000"/>
-              </a:solidFill>
-              <a:latin typeface="Arial"/>
-            </a:endParaRPr>
-          </a:p>
-          <a:p>
-            <a:pPr lvl="6" marL="3024000" indent="-216000">
-              <a:spcBef>
-                <a:spcPts val="283"/>
-              </a:spcBef>
-              <a:buClr>
-                <a:srgbClr val="000000"/>
-              </a:buClr>
-              <a:buSzPct val="45000"/>
-              <a:buFont typeface="Wingdings" charset="2"/>
-              <a:buChar char=""/>
-            </a:pPr>
-            <a:r>
-              <a:rPr b="0" lang="en-US" sz="1800" spc="-1" strike="noStrike">
-                <a:solidFill>
-                  <a:srgbClr val="000000"/>
-                </a:solidFill>
-                <a:latin typeface="Arial"/>
-              </a:rPr>
-              <a:t>Seventh Outline Level</a:t>
-            </a:r>
-            <a:endParaRPr b="0" lang="en-US" sz="1800" spc="-1" strike="noStrike">
-              <a:solidFill>
-                <a:srgbClr val="000000"/>
-              </a:solidFill>
-              <a:latin typeface="Arial"/>
-            </a:endParaRPr>
-          </a:p>
-        </p:txBody>
-      </p:sp>
-      <p:sp>
-        <p:nvSpPr>
-          <p:cNvPr id="41" name="PlaceHolder 5"/>
-          <p:cNvSpPr>
-            <a:spLocks noGrp="1"/>
-          </p:cNvSpPr>
-          <p:nvPr>
-            <p:ph type="body"/>
-          </p:nvPr>
-        </p:nvSpPr>
-        <p:spPr>
-          <a:xfrm>
-            <a:off x="504000" y="4059360"/>
-            <a:ext cx="2920320" cy="2090880"/>
-          </a:xfrm>
-          <a:prstGeom prst="rect">
-            <a:avLst/>
-          </a:prstGeom>
-          <a:noFill/>
-          <a:ln w="0">
-            <a:noFill/>
-          </a:ln>
-        </p:spPr>
-        <p:txBody>
-          <a:bodyPr lIns="0" rIns="0" tIns="0" bIns="0" anchor="t">
-            <a:noAutofit/>
-          </a:bodyPr>
-          <a:p>
-            <a:pPr marL="432000" indent="-324000">
-              <a:spcBef>
-                <a:spcPts val="1417"/>
-              </a:spcBef>
-              <a:buClr>
-                <a:srgbClr val="000000"/>
-              </a:buClr>
-              <a:buSzPct val="45000"/>
-              <a:buFont typeface="Wingdings" charset="2"/>
-              <a:buChar char=""/>
-            </a:pPr>
-            <a:r>
-              <a:rPr b="0" lang="en-US" sz="1800" spc="-1" strike="noStrike">
-                <a:solidFill>
-                  <a:srgbClr val="000000"/>
-                </a:solidFill>
-                <a:latin typeface="Arial"/>
-              </a:rPr>
-              <a:t>Click to edit the outline text format</a:t>
-            </a:r>
-            <a:endParaRPr b="0" lang="en-US" sz="1800" spc="-1" strike="noStrike">
-              <a:solidFill>
-                <a:srgbClr val="000000"/>
-              </a:solidFill>
-              <a:latin typeface="Arial"/>
-            </a:endParaRPr>
-          </a:p>
-          <a:p>
-            <a:pPr lvl="1" marL="864000" indent="-324000">
-              <a:spcBef>
-                <a:spcPts val="1134"/>
-              </a:spcBef>
-              <a:buClr>
-                <a:srgbClr val="000000"/>
-              </a:buClr>
-              <a:buSzPct val="75000"/>
-              <a:buFont typeface="Symbol" charset="2"/>
-              <a:buChar char=""/>
-            </a:pPr>
-            <a:r>
-              <a:rPr b="0" lang="en-US" sz="1800" spc="-1" strike="noStrike">
-                <a:solidFill>
-                  <a:srgbClr val="000000"/>
-                </a:solidFill>
-                <a:latin typeface="Arial"/>
-              </a:rPr>
-              <a:t>Second Outline Level</a:t>
-            </a:r>
-            <a:endParaRPr b="0" lang="en-US" sz="1800" spc="-1" strike="noStrike">
-              <a:solidFill>
-                <a:srgbClr val="000000"/>
-              </a:solidFill>
-              <a:latin typeface="Arial"/>
-            </a:endParaRPr>
-          </a:p>
-          <a:p>
-            <a:pPr lvl="2" marL="1296000" indent="-288000">
-              <a:spcBef>
-                <a:spcPts val="850"/>
-              </a:spcBef>
-              <a:buClr>
-                <a:srgbClr val="000000"/>
-              </a:buClr>
-              <a:buSzPct val="45000"/>
-              <a:buFont typeface="Wingdings" charset="2"/>
-              <a:buChar char=""/>
-            </a:pPr>
-            <a:r>
-              <a:rPr b="0" lang="en-US" sz="1800" spc="-1" strike="noStrike">
-                <a:solidFill>
-                  <a:srgbClr val="000000"/>
-                </a:solidFill>
-                <a:latin typeface="Arial"/>
-              </a:rPr>
-              <a:t>Third Outline Level</a:t>
-            </a:r>
-            <a:endParaRPr b="0" lang="en-US" sz="1800" spc="-1" strike="noStrike">
-              <a:solidFill>
-                <a:srgbClr val="000000"/>
-              </a:solidFill>
-              <a:latin typeface="Arial"/>
-            </a:endParaRPr>
-          </a:p>
-          <a:p>
-            <a:pPr lvl="3" marL="1728000" indent="-216000">
-              <a:spcBef>
-                <a:spcPts val="567"/>
-              </a:spcBef>
-              <a:buClr>
-                <a:srgbClr val="000000"/>
-              </a:buClr>
-              <a:buSzPct val="75000"/>
-              <a:buFont typeface="Symbol" charset="2"/>
-              <a:buChar char=""/>
-            </a:pPr>
-            <a:r>
-              <a:rPr b="0" lang="en-US" sz="1800" spc="-1" strike="noStrike">
-                <a:solidFill>
-                  <a:srgbClr val="000000"/>
-                </a:solidFill>
-                <a:latin typeface="Arial"/>
-              </a:rPr>
-              <a:t>Fourth Outline Level</a:t>
-            </a:r>
-            <a:endParaRPr b="0" lang="en-US" sz="1800" spc="-1" strike="noStrike">
-              <a:solidFill>
-                <a:srgbClr val="000000"/>
-              </a:solidFill>
-              <a:latin typeface="Arial"/>
-            </a:endParaRPr>
-          </a:p>
-          <a:p>
-            <a:pPr lvl="4" marL="2160000" indent="-216000">
-              <a:spcBef>
-                <a:spcPts val="283"/>
-              </a:spcBef>
-              <a:buClr>
-                <a:srgbClr val="000000"/>
-              </a:buClr>
-              <a:buSzPct val="45000"/>
-              <a:buFont typeface="Wingdings" charset="2"/>
-              <a:buChar char=""/>
-            </a:pPr>
-            <a:r>
-              <a:rPr b="0" lang="en-US" sz="1800" spc="-1" strike="noStrike">
-                <a:solidFill>
-                  <a:srgbClr val="000000"/>
-                </a:solidFill>
-                <a:latin typeface="Arial"/>
-              </a:rPr>
-              <a:t>Fifth Outline Level</a:t>
-            </a:r>
-            <a:endParaRPr b="0" lang="en-US" sz="1800" spc="-1" strike="noStrike">
-              <a:solidFill>
-                <a:srgbClr val="000000"/>
-              </a:solidFill>
-              <a:latin typeface="Arial"/>
-            </a:endParaRPr>
-          </a:p>
-          <a:p>
-            <a:pPr lvl="5" marL="2592000" indent="-216000">
-              <a:spcBef>
-                <a:spcPts val="283"/>
-              </a:spcBef>
-              <a:buClr>
-                <a:srgbClr val="000000"/>
-              </a:buClr>
-              <a:buSzPct val="45000"/>
-              <a:buFont typeface="Wingdings" charset="2"/>
-              <a:buChar char=""/>
-            </a:pPr>
-            <a:r>
-              <a:rPr b="0" lang="en-US" sz="1800" spc="-1" strike="noStrike">
-                <a:solidFill>
-                  <a:srgbClr val="000000"/>
-                </a:solidFill>
-                <a:latin typeface="Arial"/>
-              </a:rPr>
-              <a:t>Sixth Outline Level</a:t>
-            </a:r>
-            <a:endParaRPr b="0" lang="en-US" sz="1800" spc="-1" strike="noStrike">
-              <a:solidFill>
-                <a:srgbClr val="000000"/>
-              </a:solidFill>
-              <a:latin typeface="Arial"/>
-            </a:endParaRPr>
-          </a:p>
-          <a:p>
-            <a:pPr lvl="6" marL="3024000" indent="-216000">
-              <a:spcBef>
-                <a:spcPts val="283"/>
-              </a:spcBef>
-              <a:buClr>
-                <a:srgbClr val="000000"/>
-              </a:buClr>
-              <a:buSzPct val="45000"/>
-              <a:buFont typeface="Wingdings" charset="2"/>
-              <a:buChar char=""/>
-            </a:pPr>
-            <a:r>
-              <a:rPr b="0" lang="en-US" sz="1800" spc="-1" strike="noStrike">
-                <a:solidFill>
-                  <a:srgbClr val="000000"/>
-                </a:solidFill>
-                <a:latin typeface="Arial"/>
-              </a:rPr>
-              <a:t>Seventh Outline Level</a:t>
-            </a:r>
-            <a:endParaRPr b="0" lang="en-US" sz="1800" spc="-1" strike="noStrike">
-              <a:solidFill>
-                <a:srgbClr val="000000"/>
-              </a:solidFill>
-              <a:latin typeface="Arial"/>
-            </a:endParaRPr>
-          </a:p>
-        </p:txBody>
-      </p:sp>
-      <p:sp>
-        <p:nvSpPr>
-          <p:cNvPr id="42" name="PlaceHolder 6"/>
-          <p:cNvSpPr>
-            <a:spLocks noGrp="1"/>
-          </p:cNvSpPr>
-          <p:nvPr>
-            <p:ph type="body"/>
-          </p:nvPr>
-        </p:nvSpPr>
-        <p:spPr>
-          <a:xfrm>
-            <a:off x="3571200" y="4059360"/>
-            <a:ext cx="2920320" cy="2090880"/>
-          </a:xfrm>
-          <a:prstGeom prst="rect">
-            <a:avLst/>
-          </a:prstGeom>
-          <a:noFill/>
-          <a:ln w="0">
-            <a:noFill/>
-          </a:ln>
-        </p:spPr>
-        <p:txBody>
-          <a:bodyPr lIns="0" rIns="0" tIns="0" bIns="0" anchor="t">
-            <a:noAutofit/>
-          </a:bodyPr>
-          <a:p>
-            <a:pPr marL="432000" indent="-324000">
-              <a:spcBef>
-                <a:spcPts val="1417"/>
-              </a:spcBef>
-              <a:buClr>
-                <a:srgbClr val="000000"/>
-              </a:buClr>
-              <a:buSzPct val="45000"/>
-              <a:buFont typeface="Wingdings" charset="2"/>
-              <a:buChar char=""/>
-            </a:pPr>
-            <a:r>
-              <a:rPr b="0" lang="en-US" sz="1800" spc="-1" strike="noStrike">
-                <a:solidFill>
-                  <a:srgbClr val="000000"/>
-                </a:solidFill>
-                <a:latin typeface="Arial"/>
-              </a:rPr>
-              <a:t>Click to edit the outline text format</a:t>
-            </a:r>
-            <a:endParaRPr b="0" lang="en-US" sz="1800" spc="-1" strike="noStrike">
-              <a:solidFill>
-                <a:srgbClr val="000000"/>
-              </a:solidFill>
-              <a:latin typeface="Arial"/>
-            </a:endParaRPr>
-          </a:p>
-          <a:p>
-            <a:pPr lvl="1" marL="864000" indent="-324000">
-              <a:spcBef>
-                <a:spcPts val="1134"/>
-              </a:spcBef>
-              <a:buClr>
-                <a:srgbClr val="000000"/>
-              </a:buClr>
-              <a:buSzPct val="75000"/>
-              <a:buFont typeface="Symbol" charset="2"/>
-              <a:buChar char=""/>
-            </a:pPr>
-            <a:r>
-              <a:rPr b="0" lang="en-US" sz="1800" spc="-1" strike="noStrike">
-                <a:solidFill>
-                  <a:srgbClr val="000000"/>
-                </a:solidFill>
-                <a:latin typeface="Arial"/>
-              </a:rPr>
-              <a:t>Second Outline Level</a:t>
-            </a:r>
-            <a:endParaRPr b="0" lang="en-US" sz="1800" spc="-1" strike="noStrike">
-              <a:solidFill>
-                <a:srgbClr val="000000"/>
-              </a:solidFill>
-              <a:latin typeface="Arial"/>
-            </a:endParaRPr>
-          </a:p>
-          <a:p>
-            <a:pPr lvl="2" marL="1296000" indent="-288000">
-              <a:spcBef>
-                <a:spcPts val="850"/>
-              </a:spcBef>
-              <a:buClr>
-                <a:srgbClr val="000000"/>
-              </a:buClr>
-              <a:buSzPct val="45000"/>
-              <a:buFont typeface="Wingdings" charset="2"/>
-              <a:buChar char=""/>
-            </a:pPr>
-            <a:r>
-              <a:rPr b="0" lang="en-US" sz="1800" spc="-1" strike="noStrike">
-                <a:solidFill>
-                  <a:srgbClr val="000000"/>
-                </a:solidFill>
-                <a:latin typeface="Arial"/>
-              </a:rPr>
-              <a:t>Third Outline Level</a:t>
-            </a:r>
-            <a:endParaRPr b="0" lang="en-US" sz="1800" spc="-1" strike="noStrike">
-              <a:solidFill>
-                <a:srgbClr val="000000"/>
-              </a:solidFill>
-              <a:latin typeface="Arial"/>
-            </a:endParaRPr>
-          </a:p>
-          <a:p>
-            <a:pPr lvl="3" marL="1728000" indent="-216000">
-              <a:spcBef>
-                <a:spcPts val="567"/>
-              </a:spcBef>
-              <a:buClr>
-                <a:srgbClr val="000000"/>
-              </a:buClr>
-              <a:buSzPct val="75000"/>
-              <a:buFont typeface="Symbol" charset="2"/>
-              <a:buChar char=""/>
-            </a:pPr>
-            <a:r>
-              <a:rPr b="0" lang="en-US" sz="1800" spc="-1" strike="noStrike">
-                <a:solidFill>
-                  <a:srgbClr val="000000"/>
-                </a:solidFill>
-                <a:latin typeface="Arial"/>
-              </a:rPr>
-              <a:t>Fourth Outline Level</a:t>
-            </a:r>
-            <a:endParaRPr b="0" lang="en-US" sz="1800" spc="-1" strike="noStrike">
-              <a:solidFill>
-                <a:srgbClr val="000000"/>
-              </a:solidFill>
-              <a:latin typeface="Arial"/>
-            </a:endParaRPr>
-          </a:p>
-          <a:p>
-            <a:pPr lvl="4" marL="2160000" indent="-216000">
-              <a:spcBef>
-                <a:spcPts val="283"/>
-              </a:spcBef>
-              <a:buClr>
-                <a:srgbClr val="000000"/>
-              </a:buClr>
-              <a:buSzPct val="45000"/>
-              <a:buFont typeface="Wingdings" charset="2"/>
-              <a:buChar char=""/>
-            </a:pPr>
-            <a:r>
-              <a:rPr b="0" lang="en-US" sz="1800" spc="-1" strike="noStrike">
-                <a:solidFill>
-                  <a:srgbClr val="000000"/>
-                </a:solidFill>
-                <a:latin typeface="Arial"/>
-              </a:rPr>
-              <a:t>Fifth Outline Level</a:t>
-            </a:r>
-            <a:endParaRPr b="0" lang="en-US" sz="1800" spc="-1" strike="noStrike">
-              <a:solidFill>
-                <a:srgbClr val="000000"/>
-              </a:solidFill>
-              <a:latin typeface="Arial"/>
-            </a:endParaRPr>
-          </a:p>
-          <a:p>
-            <a:pPr lvl="5" marL="2592000" indent="-216000">
-              <a:spcBef>
-                <a:spcPts val="283"/>
-              </a:spcBef>
-              <a:buClr>
-                <a:srgbClr val="000000"/>
-              </a:buClr>
-              <a:buSzPct val="45000"/>
-              <a:buFont typeface="Wingdings" charset="2"/>
-              <a:buChar char=""/>
-            </a:pPr>
-            <a:r>
-              <a:rPr b="0" lang="en-US" sz="1800" spc="-1" strike="noStrike">
-                <a:solidFill>
-                  <a:srgbClr val="000000"/>
-                </a:solidFill>
-                <a:latin typeface="Arial"/>
-              </a:rPr>
-              <a:t>Sixth Outline Level</a:t>
-            </a:r>
-            <a:endParaRPr b="0" lang="en-US" sz="1800" spc="-1" strike="noStrike">
-              <a:solidFill>
-                <a:srgbClr val="000000"/>
-              </a:solidFill>
-              <a:latin typeface="Arial"/>
-            </a:endParaRPr>
-          </a:p>
-          <a:p>
-            <a:pPr lvl="6" marL="3024000" indent="-216000">
-              <a:spcBef>
-                <a:spcPts val="283"/>
-              </a:spcBef>
-              <a:buClr>
-                <a:srgbClr val="000000"/>
-              </a:buClr>
-              <a:buSzPct val="45000"/>
-              <a:buFont typeface="Wingdings" charset="2"/>
-              <a:buChar char=""/>
-            </a:pPr>
-            <a:r>
-              <a:rPr b="0" lang="en-US" sz="1800" spc="-1" strike="noStrike">
-                <a:solidFill>
-                  <a:srgbClr val="000000"/>
-                </a:solidFill>
-                <a:latin typeface="Arial"/>
-              </a:rPr>
-              <a:t>Seventh Outline Level</a:t>
-            </a:r>
-            <a:endParaRPr b="0" lang="en-US" sz="1800" spc="-1" strike="noStrike">
-              <a:solidFill>
-                <a:srgbClr val="000000"/>
-              </a:solidFill>
-              <a:latin typeface="Arial"/>
-            </a:endParaRPr>
-          </a:p>
-        </p:txBody>
-      </p:sp>
-      <p:sp>
-        <p:nvSpPr>
-          <p:cNvPr id="43" name="PlaceHolder 7"/>
-          <p:cNvSpPr>
-            <a:spLocks noGrp="1"/>
-          </p:cNvSpPr>
-          <p:nvPr>
-            <p:ph type="body"/>
-          </p:nvPr>
-        </p:nvSpPr>
-        <p:spPr>
-          <a:xfrm>
-            <a:off x="6638040" y="4059360"/>
-            <a:ext cx="2920320" cy="2090880"/>
-          </a:xfrm>
-          <a:prstGeom prst="rect">
-            <a:avLst/>
-          </a:prstGeom>
-          <a:noFill/>
-          <a:ln w="0">
-            <a:noFill/>
-          </a:ln>
-        </p:spPr>
-        <p:txBody>
-          <a:bodyPr lIns="0" rIns="0" tIns="0" bIns="0" anchor="t">
-            <a:noAutofit/>
-          </a:bodyPr>
-          <a:p>
-            <a:pPr marL="432000" indent="-324000">
-              <a:spcBef>
-                <a:spcPts val="1417"/>
-              </a:spcBef>
-              <a:buClr>
-                <a:srgbClr val="000000"/>
-              </a:buClr>
-              <a:buSzPct val="45000"/>
-              <a:buFont typeface="Wingdings" charset="2"/>
-              <a:buChar char=""/>
-            </a:pPr>
-            <a:r>
-              <a:rPr b="0" lang="en-US" sz="1800" spc="-1" strike="noStrike">
-                <a:solidFill>
-                  <a:srgbClr val="000000"/>
-                </a:solidFill>
-                <a:latin typeface="Arial"/>
-              </a:rPr>
-              <a:t>Click to edit the outline text format</a:t>
-            </a:r>
-            <a:endParaRPr b="0" lang="en-US" sz="1800" spc="-1" strike="noStrike">
-              <a:solidFill>
-                <a:srgbClr val="000000"/>
-              </a:solidFill>
-              <a:latin typeface="Arial"/>
-            </a:endParaRPr>
-          </a:p>
-          <a:p>
-            <a:pPr lvl="1" marL="864000" indent="-324000">
-              <a:spcBef>
-                <a:spcPts val="1134"/>
-              </a:spcBef>
-              <a:buClr>
-                <a:srgbClr val="000000"/>
-              </a:buClr>
-              <a:buSzPct val="75000"/>
-              <a:buFont typeface="Symbol" charset="2"/>
-              <a:buChar char=""/>
-            </a:pPr>
-            <a:r>
-              <a:rPr b="0" lang="en-US" sz="1800" spc="-1" strike="noStrike">
-                <a:solidFill>
-                  <a:srgbClr val="000000"/>
-                </a:solidFill>
-                <a:latin typeface="Arial"/>
-              </a:rPr>
-              <a:t>Second Outline Level</a:t>
-            </a:r>
-            <a:endParaRPr b="0" lang="en-US" sz="1800" spc="-1" strike="noStrike">
-              <a:solidFill>
-                <a:srgbClr val="000000"/>
-              </a:solidFill>
-              <a:latin typeface="Arial"/>
-            </a:endParaRPr>
-          </a:p>
-          <a:p>
-            <a:pPr lvl="2" marL="1296000" indent="-288000">
-              <a:spcBef>
-                <a:spcPts val="850"/>
-              </a:spcBef>
-              <a:buClr>
-                <a:srgbClr val="000000"/>
-              </a:buClr>
-              <a:buSzPct val="45000"/>
-              <a:buFont typeface="Wingdings" charset="2"/>
-              <a:buChar char=""/>
-            </a:pPr>
-            <a:r>
-              <a:rPr b="0" lang="en-US" sz="1800" spc="-1" strike="noStrike">
-                <a:solidFill>
-                  <a:srgbClr val="000000"/>
-                </a:solidFill>
-                <a:latin typeface="Arial"/>
-              </a:rPr>
-              <a:t>Third Outline Level</a:t>
-            </a:r>
-            <a:endParaRPr b="0" lang="en-US" sz="1800" spc="-1" strike="noStrike">
-              <a:solidFill>
-                <a:srgbClr val="000000"/>
-              </a:solidFill>
-              <a:latin typeface="Arial"/>
-            </a:endParaRPr>
-          </a:p>
-          <a:p>
-            <a:pPr lvl="3" marL="1728000" indent="-216000">
-              <a:spcBef>
-                <a:spcPts val="567"/>
-              </a:spcBef>
-              <a:buClr>
-                <a:srgbClr val="000000"/>
-              </a:buClr>
-              <a:buSzPct val="75000"/>
-              <a:buFont typeface="Symbol" charset="2"/>
-              <a:buChar char=""/>
-            </a:pPr>
-            <a:r>
-              <a:rPr b="0" lang="en-US" sz="1800" spc="-1" strike="noStrike">
-                <a:solidFill>
-                  <a:srgbClr val="000000"/>
-                </a:solidFill>
-                <a:latin typeface="Arial"/>
-              </a:rPr>
-              <a:t>Fourth Outline Level</a:t>
-            </a:r>
-            <a:endParaRPr b="0" lang="en-US" sz="1800" spc="-1" strike="noStrike">
-              <a:solidFill>
-                <a:srgbClr val="000000"/>
-              </a:solidFill>
-              <a:latin typeface="Arial"/>
-            </a:endParaRPr>
-          </a:p>
-          <a:p>
-            <a:pPr lvl="4" marL="2160000" indent="-216000">
-              <a:spcBef>
-                <a:spcPts val="283"/>
-              </a:spcBef>
-              <a:buClr>
-                <a:srgbClr val="000000"/>
-              </a:buClr>
-              <a:buSzPct val="45000"/>
-              <a:buFont typeface="Wingdings" charset="2"/>
-              <a:buChar char=""/>
-            </a:pPr>
-            <a:r>
-              <a:rPr b="0" lang="en-US" sz="1800" spc="-1" strike="noStrike">
-                <a:solidFill>
-                  <a:srgbClr val="000000"/>
-                </a:solidFill>
-                <a:latin typeface="Arial"/>
-              </a:rPr>
-              <a:t>Fifth Outline Level</a:t>
-            </a:r>
-            <a:endParaRPr b="0" lang="en-US" sz="1800" spc="-1" strike="noStrike">
-              <a:solidFill>
-                <a:srgbClr val="000000"/>
-              </a:solidFill>
-              <a:latin typeface="Arial"/>
-            </a:endParaRPr>
-          </a:p>
-          <a:p>
-            <a:pPr lvl="5" marL="2592000" indent="-216000">
-              <a:spcBef>
-                <a:spcPts val="283"/>
-              </a:spcBef>
-              <a:buClr>
-                <a:srgbClr val="000000"/>
-              </a:buClr>
-              <a:buSzPct val="45000"/>
-              <a:buFont typeface="Wingdings" charset="2"/>
-              <a:buChar char=""/>
-            </a:pPr>
-            <a:r>
-              <a:rPr b="0" lang="en-US" sz="1800" spc="-1" strike="noStrike">
-                <a:solidFill>
-                  <a:srgbClr val="000000"/>
-                </a:solidFill>
-                <a:latin typeface="Arial"/>
-              </a:rPr>
-              <a:t>Sixth Outline Level</a:t>
-            </a:r>
-            <a:endParaRPr b="0" lang="en-US" sz="1800" spc="-1" strike="noStrike">
-              <a:solidFill>
-                <a:srgbClr val="000000"/>
-              </a:solidFill>
-              <a:latin typeface="Arial"/>
-            </a:endParaRPr>
-          </a:p>
-          <a:p>
-            <a:pPr lvl="6" marL="3024000" indent="-216000">
-              <a:spcBef>
-                <a:spcPts val="283"/>
-              </a:spcBef>
-              <a:buClr>
-                <a:srgbClr val="000000"/>
-              </a:buClr>
-              <a:buSzPct val="45000"/>
-              <a:buFont typeface="Wingdings" charset="2"/>
-              <a:buChar char=""/>
-            </a:pPr>
-            <a:r>
-              <a:rPr b="0" lang="en-US" sz="1800" spc="-1" strike="noStrike">
-                <a:solidFill>
-                  <a:srgbClr val="000000"/>
-                </a:solidFill>
-                <a:latin typeface="Arial"/>
-              </a:rPr>
-              <a:t>Seventh Outline Level</a:t>
-            </a:r>
-            <a:endParaRPr b="0" lang="en-US" sz="1800" spc="-1" strike="noStrike">
-              <a:solidFill>
-                <a:srgbClr val="000000"/>
-              </a:solidFill>
-              <a:latin typeface="Arial"/>
-            </a:endParaRPr>
-          </a:p>
-        </p:txBody>
-      </p:sp>
     </p:spTree>
   </p:cSld>
   <p:clrMap bg1="lt1" bg2="lt2" tx1="dk1" tx2="dk2" accent1="accent1" accent2="accent2" accent3="accent3" accent4="accent4" accent5="accent5" accent6="accent6" hlink="hlink" folHlink="folHlink"/>
@@ -16011,7 +13583,7 @@
       </p:grpSpPr>
       <p:pic>
         <p:nvPicPr>
-          <p:cNvPr id="44" name="" descr=""/>
+          <p:cNvPr id="37" name="" descr=""/>
           <p:cNvPicPr/>
           <p:nvPr/>
         </p:nvPicPr>
@@ -16022,7 +13594,7 @@
         <p:spPr>
           <a:xfrm>
             <a:off x="0" y="5806440"/>
-            <a:ext cx="10079280" cy="1753920"/>
+            <a:ext cx="10078920" cy="1753560"/>
           </a:xfrm>
           <a:prstGeom prst="rect">
             <a:avLst/>
@@ -16060,7 +13632,7 @@
       </p:grpSpPr>
       <p:pic>
         <p:nvPicPr>
-          <p:cNvPr id="45" name="" descr=""/>
+          <p:cNvPr id="38" name="" descr=""/>
           <p:cNvPicPr/>
           <p:nvPr/>
         </p:nvPicPr>
@@ -16071,7 +13643,7 @@
         <p:spPr>
           <a:xfrm>
             <a:off x="0" y="5806440"/>
-            <a:ext cx="10079280" cy="1753920"/>
+            <a:ext cx="10078920" cy="1753560"/>
           </a:xfrm>
           <a:prstGeom prst="rect">
             <a:avLst/>
@@ -16083,7 +13655,7 @@
       </p:pic>
       <p:sp>
         <p:nvSpPr>
-          <p:cNvPr id="46" name="PlaceHolder 1"/>
+          <p:cNvPr id="39" name="PlaceHolder 1"/>
           <p:cNvSpPr>
             <a:spLocks noGrp="1"/>
           </p:cNvSpPr>
@@ -16094,7 +13666,7 @@
         <p:spPr>
           <a:xfrm>
             <a:off x="504000" y="301320"/>
-            <a:ext cx="9071280" cy="637200"/>
+            <a:ext cx="9070920" cy="636840"/>
           </a:xfrm>
           <a:prstGeom prst="rect">
             <a:avLst/>
@@ -16120,6 +13692,231 @@
                 <a:latin typeface="Arial"/>
               </a:rPr>
               <a:t>Click to edit the title text format</a:t>
+            </a:r>
+            <a:endParaRPr b="0" lang="en-US" sz="1800" spc="-1" strike="noStrike">
+              <a:solidFill>
+                <a:srgbClr val="000000"/>
+              </a:solidFill>
+              <a:latin typeface="Arial"/>
+            </a:endParaRPr>
+          </a:p>
+        </p:txBody>
+      </p:sp>
+      <p:sp>
+        <p:nvSpPr>
+          <p:cNvPr id="40" name="PlaceHolder 2"/>
+          <p:cNvSpPr>
+            <a:spLocks noGrp="1"/>
+          </p:cNvSpPr>
+          <p:nvPr>
+            <p:ph type="body"/>
+          </p:nvPr>
+        </p:nvSpPr>
+        <p:spPr>
+          <a:xfrm>
+            <a:off x="504000" y="1769040"/>
+            <a:ext cx="9070920" cy="4383720"/>
+          </a:xfrm>
+          <a:prstGeom prst="rect">
+            <a:avLst/>
+          </a:prstGeom>
+          <a:noFill/>
+          <a:ln w="0">
+            <a:noFill/>
+          </a:ln>
+        </p:spPr>
+        <p:txBody>
+          <a:bodyPr lIns="0" rIns="0" tIns="0" bIns="0" anchor="t">
+            <a:normAutofit/>
+          </a:bodyPr>
+          <a:p>
+            <a:pPr marL="432000" indent="-324000">
+              <a:spcBef>
+                <a:spcPts val="1417"/>
+              </a:spcBef>
+              <a:buClr>
+                <a:srgbClr val="000000"/>
+              </a:buClr>
+              <a:buSzPct val="45000"/>
+              <a:buFont typeface="Wingdings" charset="2"/>
+              <a:buChar char=""/>
+            </a:pPr>
+            <a:r>
+              <a:rPr b="0" lang="en-US" sz="1800" spc="-1" strike="noStrike">
+                <a:solidFill>
+                  <a:srgbClr val="000000"/>
+                </a:solidFill>
+                <a:latin typeface="Arial"/>
+              </a:rPr>
+              <a:t>Click to edit the outline text format</a:t>
+            </a:r>
+            <a:endParaRPr b="0" lang="en-US" sz="1800" spc="-1" strike="noStrike">
+              <a:solidFill>
+                <a:srgbClr val="000000"/>
+              </a:solidFill>
+              <a:latin typeface="Arial"/>
+            </a:endParaRPr>
+          </a:p>
+          <a:p>
+            <a:pPr lvl="1" marL="864000" indent="-324000">
+              <a:spcBef>
+                <a:spcPts val="1134"/>
+              </a:spcBef>
+              <a:buClr>
+                <a:srgbClr val="000000"/>
+              </a:buClr>
+              <a:buSzPct val="75000"/>
+              <a:buFont typeface="Symbol" charset="2"/>
+              <a:buChar char=""/>
+            </a:pPr>
+            <a:r>
+              <a:rPr b="0" lang="en-US" sz="1800" spc="-1" strike="noStrike">
+                <a:solidFill>
+                  <a:srgbClr val="000000"/>
+                </a:solidFill>
+                <a:latin typeface="Arial"/>
+              </a:rPr>
+              <a:t>Second Outline Level</a:t>
+            </a:r>
+            <a:endParaRPr b="0" lang="en-US" sz="1800" spc="-1" strike="noStrike">
+              <a:solidFill>
+                <a:srgbClr val="000000"/>
+              </a:solidFill>
+              <a:latin typeface="Arial"/>
+            </a:endParaRPr>
+          </a:p>
+          <a:p>
+            <a:pPr lvl="2" marL="1296000" indent="-288000">
+              <a:spcBef>
+                <a:spcPts val="850"/>
+              </a:spcBef>
+              <a:buClr>
+                <a:srgbClr val="000000"/>
+              </a:buClr>
+              <a:buSzPct val="45000"/>
+              <a:buFont typeface="Wingdings" charset="2"/>
+              <a:buChar char=""/>
+            </a:pPr>
+            <a:r>
+              <a:rPr b="0" lang="en-US" sz="1800" spc="-1" strike="noStrike">
+                <a:solidFill>
+                  <a:srgbClr val="000000"/>
+                </a:solidFill>
+                <a:latin typeface="Arial"/>
+              </a:rPr>
+              <a:t>Third Outline Level</a:t>
+            </a:r>
+            <a:endParaRPr b="0" lang="en-US" sz="1800" spc="-1" strike="noStrike">
+              <a:solidFill>
+                <a:srgbClr val="000000"/>
+              </a:solidFill>
+              <a:latin typeface="Arial"/>
+            </a:endParaRPr>
+          </a:p>
+          <a:p>
+            <a:pPr lvl="3" marL="1728000" indent="-216000">
+              <a:spcBef>
+                <a:spcPts val="567"/>
+              </a:spcBef>
+              <a:buClr>
+                <a:srgbClr val="000000"/>
+              </a:buClr>
+              <a:buSzPct val="75000"/>
+              <a:buFont typeface="Symbol" charset="2"/>
+              <a:buChar char=""/>
+            </a:pPr>
+            <a:r>
+              <a:rPr b="0" lang="en-US" sz="1800" spc="-1" strike="noStrike">
+                <a:solidFill>
+                  <a:srgbClr val="000000"/>
+                </a:solidFill>
+                <a:latin typeface="Arial"/>
+              </a:rPr>
+              <a:t>Fourth Outline Level</a:t>
+            </a:r>
+            <a:endParaRPr b="0" lang="en-US" sz="1800" spc="-1" strike="noStrike">
+              <a:solidFill>
+                <a:srgbClr val="000000"/>
+              </a:solidFill>
+              <a:latin typeface="Arial"/>
+            </a:endParaRPr>
+          </a:p>
+          <a:p>
+            <a:pPr lvl="4" marL="2160000" indent="-216000">
+              <a:spcBef>
+                <a:spcPts val="283"/>
+              </a:spcBef>
+              <a:buClr>
+                <a:srgbClr val="000000"/>
+              </a:buClr>
+              <a:buSzPct val="45000"/>
+              <a:buFont typeface="Wingdings" charset="2"/>
+              <a:buChar char=""/>
+            </a:pPr>
+            <a:r>
+              <a:rPr b="0" lang="en-US" sz="1800" spc="-1" strike="noStrike">
+                <a:solidFill>
+                  <a:srgbClr val="000000"/>
+                </a:solidFill>
+                <a:latin typeface="Arial"/>
+              </a:rPr>
+              <a:t>Fifth Outline Level</a:t>
+            </a:r>
+            <a:endParaRPr b="0" lang="en-US" sz="1800" spc="-1" strike="noStrike">
+              <a:solidFill>
+                <a:srgbClr val="000000"/>
+              </a:solidFill>
+              <a:latin typeface="Arial"/>
+            </a:endParaRPr>
+          </a:p>
+          <a:p>
+            <a:pPr lvl="5" marL="2592000" indent="-216000">
+              <a:spcBef>
+                <a:spcPts val="283"/>
+              </a:spcBef>
+              <a:buClr>
+                <a:srgbClr val="000000"/>
+              </a:buClr>
+              <a:buSzPct val="45000"/>
+              <a:buFont typeface="Wingdings" charset="2"/>
+              <a:buChar char=""/>
+            </a:pPr>
+            <a:r>
+              <a:rPr b="0" lang="en-US" sz="1800" spc="-1" strike="noStrike">
+                <a:solidFill>
+                  <a:srgbClr val="000000"/>
+                </a:solidFill>
+                <a:latin typeface="Arial"/>
+              </a:rPr>
+              <a:t>Sixth Outline Level</a:t>
+            </a:r>
+            <a:endParaRPr b="0" lang="en-US" sz="1800" spc="-1" strike="noStrike">
+              <a:solidFill>
+                <a:srgbClr val="000000"/>
+              </a:solidFill>
+              <a:latin typeface="Arial"/>
+            </a:endParaRPr>
+          </a:p>
+          <a:p>
+            <a:pPr lvl="6" marL="3024000" indent="-216000">
+              <a:spcBef>
+                <a:spcPts val="283"/>
+              </a:spcBef>
+              <a:buClr>
+                <a:srgbClr val="000000"/>
+              </a:buClr>
+              <a:buSzPct val="45000"/>
+              <a:buFont typeface="Wingdings" charset="2"/>
+              <a:buChar char=""/>
+            </a:pPr>
+            <a:r>
+              <a:rPr b="0" lang="en-US" sz="1800" spc="-1" strike="noStrike">
+                <a:solidFill>
+                  <a:srgbClr val="000000"/>
+                </a:solidFill>
+                <a:latin typeface="Arial"/>
+              </a:rPr>
+              <a:t>Seventh Outline Level</a:t>
             </a:r>
             <a:endParaRPr b="0" lang="en-US" sz="1800" spc="-1" strike="noStrike">
               <a:solidFill>
@@ -16158,7 +13955,7 @@
       </p:grpSpPr>
       <p:pic>
         <p:nvPicPr>
-          <p:cNvPr id="49" name="" descr=""/>
+          <p:cNvPr id="43" name="" descr=""/>
           <p:cNvPicPr/>
           <p:nvPr/>
         </p:nvPicPr>
@@ -16169,7 +13966,7 @@
         <p:spPr>
           <a:xfrm>
             <a:off x="0" y="5806440"/>
-            <a:ext cx="10079280" cy="1753920"/>
+            <a:ext cx="10078920" cy="1753560"/>
           </a:xfrm>
           <a:prstGeom prst="rect">
             <a:avLst/>
@@ -16181,7 +13978,7 @@
       </p:pic>
       <p:sp>
         <p:nvSpPr>
-          <p:cNvPr id="50" name="PlaceHolder 1"/>
+          <p:cNvPr id="44" name="PlaceHolder 1"/>
           <p:cNvSpPr>
             <a:spLocks noGrp="1"/>
           </p:cNvSpPr>
@@ -16192,7 +13989,7 @@
         <p:spPr>
           <a:xfrm>
             <a:off x="504000" y="301320"/>
-            <a:ext cx="9071280" cy="637200"/>
+            <a:ext cx="9070920" cy="636840"/>
           </a:xfrm>
           <a:prstGeom prst="rect">
             <a:avLst/>
@@ -16230,7 +14027,7 @@
       </p:sp>
       <p:sp>
         <p:nvSpPr>
-          <p:cNvPr id="51" name="PlaceHolder 2"/>
+          <p:cNvPr id="45" name="PlaceHolder 2"/>
           <p:cNvSpPr>
             <a:spLocks noGrp="1"/>
           </p:cNvSpPr>
@@ -16241,7 +14038,7 @@
         <p:spPr>
           <a:xfrm>
             <a:off x="504000" y="1769040"/>
-            <a:ext cx="9071280" cy="4384080"/>
+            <a:ext cx="9070920" cy="4383720"/>
           </a:xfrm>
           <a:prstGeom prst="rect">
             <a:avLst/>
@@ -16253,7 +14050,7 @@
         </p:spPr>
         <p:txBody>
           <a:bodyPr lIns="0" rIns="0" tIns="0" bIns="0" anchor="t">
-            <a:noAutofit/>
+            <a:normAutofit/>
           </a:bodyPr>
           <a:p>
             <a:pPr marL="432000" indent="-324000">
@@ -16481,7 +14278,7 @@
       </p:grpSpPr>
       <p:pic>
         <p:nvPicPr>
-          <p:cNvPr id="54" name="" descr=""/>
+          <p:cNvPr id="48" name="" descr=""/>
           <p:cNvPicPr/>
           <p:nvPr/>
         </p:nvPicPr>
@@ -16492,7 +14289,7 @@
         <p:spPr>
           <a:xfrm>
             <a:off x="0" y="5806440"/>
-            <a:ext cx="10079280" cy="1753920"/>
+            <a:ext cx="10078920" cy="1753560"/>
           </a:xfrm>
           <a:prstGeom prst="rect">
             <a:avLst/>
@@ -16504,7 +14301,7 @@
       </p:pic>
       <p:sp>
         <p:nvSpPr>
-          <p:cNvPr id="55" name="PlaceHolder 1"/>
+          <p:cNvPr id="49" name="PlaceHolder 1"/>
           <p:cNvSpPr>
             <a:spLocks noGrp="1"/>
           </p:cNvSpPr>
@@ -16515,7 +14312,7 @@
         <p:spPr>
           <a:xfrm>
             <a:off x="504000" y="301320"/>
-            <a:ext cx="9071280" cy="637200"/>
+            <a:ext cx="9070920" cy="636840"/>
           </a:xfrm>
           <a:prstGeom prst="rect">
             <a:avLst/>
@@ -16553,7 +14350,7 @@
       </p:sp>
       <p:sp>
         <p:nvSpPr>
-          <p:cNvPr id="56" name="PlaceHolder 2"/>
+          <p:cNvPr id="50" name="PlaceHolder 2"/>
           <p:cNvSpPr>
             <a:spLocks noGrp="1"/>
           </p:cNvSpPr>
@@ -16564,7 +14361,7 @@
         <p:spPr>
           <a:xfrm>
             <a:off x="504000" y="1769040"/>
-            <a:ext cx="4426560" cy="4384080"/>
+            <a:ext cx="4426200" cy="4383720"/>
           </a:xfrm>
           <a:prstGeom prst="rect">
             <a:avLst/>
@@ -16576,7 +14373,7 @@
         </p:spPr>
         <p:txBody>
           <a:bodyPr lIns="0" rIns="0" tIns="0" bIns="0" anchor="t">
-            <a:noAutofit/>
+            <a:normAutofit/>
           </a:bodyPr>
           <a:p>
             <a:pPr marL="432000" indent="-324000">
@@ -16778,7 +14575,7 @@
       </p:sp>
       <p:sp>
         <p:nvSpPr>
-          <p:cNvPr id="57" name="PlaceHolder 3"/>
+          <p:cNvPr id="51" name="PlaceHolder 3"/>
           <p:cNvSpPr>
             <a:spLocks noGrp="1"/>
           </p:cNvSpPr>
@@ -16788,8 +14585,8 @@
         </p:nvSpPr>
         <p:spPr>
           <a:xfrm>
-            <a:off x="5152680" y="1769040"/>
-            <a:ext cx="4426560" cy="4384080"/>
+            <a:off x="5152320" y="1769040"/>
+            <a:ext cx="4426200" cy="4383720"/>
           </a:xfrm>
           <a:prstGeom prst="rect">
             <a:avLst/>
@@ -16801,7 +14598,7 @@
         </p:spPr>
         <p:txBody>
           <a:bodyPr lIns="0" rIns="0" tIns="0" bIns="0" anchor="t">
-            <a:noAutofit/>
+            <a:normAutofit/>
           </a:bodyPr>
           <a:p>
             <a:pPr marL="432000" indent="-324000">
@@ -17029,14 +14826,14 @@
       </p:grpSpPr>
       <p:sp>
         <p:nvSpPr>
-          <p:cNvPr id="161" name="TextShape 1"/>
+          <p:cNvPr id="149" name="TextShape 1"/>
           <p:cNvSpPr/>
           <p:nvPr/>
         </p:nvSpPr>
         <p:spPr>
           <a:xfrm>
             <a:off x="216360" y="393840"/>
-            <a:ext cx="9071280" cy="1261800"/>
+            <a:ext cx="9070920" cy="1261440"/>
           </a:xfrm>
           <a:prstGeom prst="rect">
             <a:avLst/>
@@ -17068,6 +14865,7 @@
                   <a:srgbClr val="006699"/>
                 </a:solidFill>
                 <a:latin typeface="Arial"/>
+                <a:ea typeface="DejaVu Sans"/>
               </a:rPr>
               <a:t>Linux Kernel space</a:t>
             </a:r>
@@ -17082,7 +14880,7 @@
       </p:sp>
       <p:pic>
         <p:nvPicPr>
-          <p:cNvPr id="162" name="" descr=""/>
+          <p:cNvPr id="150" name="" descr=""/>
           <p:cNvPicPr/>
           <p:nvPr/>
         </p:nvPicPr>
@@ -17093,7 +14891,7 @@
         <p:spPr>
           <a:xfrm>
             <a:off x="1252800" y="2523960"/>
-            <a:ext cx="7170840" cy="3091680"/>
+            <a:ext cx="7170480" cy="3091320"/>
           </a:xfrm>
           <a:prstGeom prst="rect">
             <a:avLst/>
@@ -17135,14 +14933,14 @@
       </p:grpSpPr>
       <p:sp>
         <p:nvSpPr>
-          <p:cNvPr id="183" name="TextShape 1"/>
+          <p:cNvPr id="171" name="TextShape 1"/>
           <p:cNvSpPr/>
           <p:nvPr/>
         </p:nvSpPr>
         <p:spPr>
           <a:xfrm>
             <a:off x="504000" y="301320"/>
-            <a:ext cx="9071280" cy="637200"/>
+            <a:ext cx="9070920" cy="636840"/>
           </a:xfrm>
           <a:prstGeom prst="rect">
             <a:avLst/>
@@ -17173,20 +14971,21 @@
                 <a:srgbClr val="ffffff"/>
               </a:solidFill>
               <a:latin typeface="Arial"/>
+              <a:ea typeface="DejaVu Sans"/>
             </a:endParaRPr>
           </a:p>
         </p:txBody>
       </p:sp>
       <p:sp>
         <p:nvSpPr>
-          <p:cNvPr id="184" name="CustomShape 2"/>
+          <p:cNvPr id="172" name="CustomShape 2"/>
           <p:cNvSpPr/>
           <p:nvPr/>
         </p:nvSpPr>
         <p:spPr>
           <a:xfrm>
             <a:off x="288000" y="1152000"/>
-            <a:ext cx="9541800" cy="4362120"/>
+            <a:ext cx="9541440" cy="4362120"/>
           </a:xfrm>
           <a:prstGeom prst="rect">
             <a:avLst/>
@@ -17317,6 +15116,7 @@
                   <a:srgbClr val="000000"/>
                 </a:solidFill>
                 <a:latin typeface="Arial"/>
+                <a:ea typeface="DejaVu Sans"/>
               </a:rPr>
               <a:t> </a:t>
             </a:r>
@@ -17384,6 +15184,7 @@
                   <a:srgbClr val="000000"/>
                 </a:solidFill>
                 <a:latin typeface="Arial"/>
+                <a:ea typeface="DejaVu Sans"/>
               </a:rPr>
               <a:t> </a:t>
             </a:r>
@@ -17473,7 +15274,7 @@
       </p:grpSpPr>
       <p:pic>
         <p:nvPicPr>
-          <p:cNvPr id="185" name="" descr=""/>
+          <p:cNvPr id="173" name="" descr=""/>
           <p:cNvPicPr/>
           <p:nvPr/>
         </p:nvPicPr>
@@ -17484,7 +15285,7 @@
         <p:spPr>
           <a:xfrm>
             <a:off x="684000" y="1030320"/>
-            <a:ext cx="8098200" cy="5487120"/>
+            <a:ext cx="8097840" cy="5486760"/>
           </a:xfrm>
           <a:prstGeom prst="rect">
             <a:avLst/>
@@ -17526,14 +15327,14 @@
       </p:grpSpPr>
       <p:sp>
         <p:nvSpPr>
-          <p:cNvPr id="186" name="TextShape 1"/>
+          <p:cNvPr id="174" name="TextShape 1"/>
           <p:cNvSpPr/>
           <p:nvPr/>
         </p:nvSpPr>
         <p:spPr>
           <a:xfrm>
             <a:off x="504000" y="301320"/>
-            <a:ext cx="9071280" cy="637200"/>
+            <a:ext cx="9070920" cy="636840"/>
           </a:xfrm>
           <a:prstGeom prst="rect">
             <a:avLst/>
@@ -17564,20 +15365,21 @@
                 <a:srgbClr val="ffffff"/>
               </a:solidFill>
               <a:latin typeface="Arial"/>
+              <a:ea typeface="DejaVu Sans"/>
             </a:endParaRPr>
           </a:p>
         </p:txBody>
       </p:sp>
       <p:sp>
         <p:nvSpPr>
-          <p:cNvPr id="187" name="CustomShape 2"/>
+          <p:cNvPr id="175" name="CustomShape 2"/>
           <p:cNvSpPr/>
           <p:nvPr/>
         </p:nvSpPr>
         <p:spPr>
           <a:xfrm>
             <a:off x="0" y="971640"/>
-            <a:ext cx="9863640" cy="3261600"/>
+            <a:ext cx="9863280" cy="3261600"/>
           </a:xfrm>
           <a:prstGeom prst="rect">
             <a:avLst/>
@@ -17797,7 +15599,7 @@
       </p:sp>
       <p:pic>
         <p:nvPicPr>
-          <p:cNvPr id="188" name="" descr=""/>
+          <p:cNvPr id="176" name="" descr=""/>
           <p:cNvPicPr/>
           <p:nvPr/>
         </p:nvPicPr>
@@ -17808,7 +15610,7 @@
         <p:spPr>
           <a:xfrm>
             <a:off x="228600" y="4042800"/>
-            <a:ext cx="3657600" cy="2546280"/>
+            <a:ext cx="3657240" cy="2545920"/>
           </a:xfrm>
           <a:prstGeom prst="rect">
             <a:avLst/>
@@ -17820,7 +15622,7 @@
       </p:pic>
       <p:pic>
         <p:nvPicPr>
-          <p:cNvPr id="189" name="" descr=""/>
+          <p:cNvPr id="177" name="" descr=""/>
           <p:cNvPicPr/>
           <p:nvPr/>
         </p:nvPicPr>
@@ -17831,7 +15633,7 @@
         <p:spPr>
           <a:xfrm>
             <a:off x="5486400" y="4343400"/>
-            <a:ext cx="3657600" cy="2286000"/>
+            <a:ext cx="3657240" cy="2285640"/>
           </a:xfrm>
           <a:prstGeom prst="rect">
             <a:avLst/>
@@ -17871,16 +15673,69 @@
           <a:chExt cx="0" cy="0"/>
         </a:xfrm>
       </p:grpSpPr>
+      <p:pic>
+        <p:nvPicPr>
+          <p:cNvPr id="178" name="" descr=""/>
+          <p:cNvPicPr/>
+          <p:nvPr/>
+        </p:nvPicPr>
+        <p:blipFill>
+          <a:blip r:embed="rId1"/>
+          <a:stretch/>
+        </p:blipFill>
+        <p:spPr>
+          <a:xfrm>
+            <a:off x="-21960" y="228600"/>
+            <a:ext cx="10080360" cy="6629400"/>
+          </a:xfrm>
+          <a:prstGeom prst="rect">
+            <a:avLst/>
+          </a:prstGeom>
+          <a:ln w="0">
+            <a:noFill/>
+          </a:ln>
+        </p:spPr>
+      </p:pic>
+    </p:spTree>
+  </p:cSld>
+  <mc:AlternateContent>
+    <mc:Choice Requires="p14">
+      <p:transition spd="slow" p14:dur="2000"/>
+    </mc:Choice>
+    <mc:Fallback>
+      <p:transition spd="slow"/>
+    </mc:Fallback>
+  </mc:AlternateContent>
+</p:sld>
+</file>
+
+<file path=ppt/slides/slide14.xml><?xml version="1.0" encoding="utf-8"?>
+<p:sld xmlns:a="http://schemas.openxmlformats.org/drawingml/2006/main" xmlns:p="http://schemas.openxmlformats.org/presentationml/2006/main" xmlns:r="http://schemas.openxmlformats.org/officeDocument/2006/relationships" xmlns:p14="http://schemas.microsoft.com/office/powerpoint/2010/main" xmlns:p15="http://schemas.microsoft.com/office/powerpoint/2012/main" xmlns:mc="http://schemas.openxmlformats.org/markup-compatibility/2006">
+  <p:cSld>
+    <p:spTree>
+      <p:nvGrpSpPr>
+        <p:cNvPr id="1" name=""/>
+        <p:cNvGrpSpPr/>
+        <p:nvPr/>
+      </p:nvGrpSpPr>
+      <p:grpSpPr>
+        <a:xfrm>
+          <a:off x="0" y="0"/>
+          <a:ext cx="0" cy="0"/>
+          <a:chOff x="0" y="0"/>
+          <a:chExt cx="0" cy="0"/>
+        </a:xfrm>
+      </p:grpSpPr>
       <p:sp>
         <p:nvSpPr>
-          <p:cNvPr id="190" name="TextShape 1"/>
+          <p:cNvPr id="179" name="TextShape 1"/>
           <p:cNvSpPr/>
           <p:nvPr/>
         </p:nvSpPr>
         <p:spPr>
           <a:xfrm>
             <a:off x="504000" y="301320"/>
-            <a:ext cx="9071280" cy="637200"/>
+            <a:ext cx="9070920" cy="636840"/>
           </a:xfrm>
           <a:prstGeom prst="rect">
             <a:avLst/>
@@ -17911,20 +15766,21 @@
                 <a:srgbClr val="ffffff"/>
               </a:solidFill>
               <a:latin typeface="Arial"/>
+              <a:ea typeface="DejaVu Sans"/>
             </a:endParaRPr>
           </a:p>
         </p:txBody>
       </p:sp>
       <p:sp>
         <p:nvSpPr>
-          <p:cNvPr id="191" name="TextShape 2"/>
+          <p:cNvPr id="180" name="TextShape 2"/>
           <p:cNvSpPr/>
           <p:nvPr/>
         </p:nvSpPr>
         <p:spPr>
           <a:xfrm>
             <a:off x="78120" y="1069560"/>
-            <a:ext cx="9713520" cy="1882080"/>
+            <a:ext cx="9713160" cy="1881720"/>
           </a:xfrm>
           <a:prstGeom prst="rect">
             <a:avLst/>
@@ -17956,6 +15812,7 @@
                   <a:srgbClr val="000000"/>
                 </a:solidFill>
                 <a:latin typeface="Arial"/>
+                <a:ea typeface="DejaVu Sans"/>
               </a:rPr>
               <a:t>There are other ways of classifying driver modules that are orthogonal to the above</a:t>
             </a:r>
@@ -17978,6 +15835,7 @@
                   <a:srgbClr val="000000"/>
                 </a:solidFill>
                 <a:latin typeface="Arial"/>
+                <a:ea typeface="DejaVu Sans"/>
               </a:rPr>
               <a:t>device types. In general, some types of drivers work with additional layers of kernel</a:t>
             </a:r>
@@ -18000,6 +15858,7 @@
                   <a:srgbClr val="000000"/>
                 </a:solidFill>
                 <a:latin typeface="Arial"/>
+                <a:ea typeface="DejaVu Sans"/>
               </a:rPr>
               <a:t>support functions for a given type of device. For example, one can talk of universal</a:t>
             </a:r>
@@ -18022,6 +15881,7 @@
                   <a:srgbClr val="000000"/>
                 </a:solidFill>
                 <a:latin typeface="Arial"/>
+                <a:ea typeface="DejaVu Sans"/>
               </a:rPr>
               <a:t>serial bus (USB) modules, serial modules, SCSI modules, and so on.  Every USB device is driven by a USB module that works with the USB subsystem, but the device itself shows up in the system as a char device (a USB serial port, say), a block device (a USB memory card reader), or a network device (a USB Ethernet interface).</a:t>
             </a:r>
@@ -18066,14 +15926,14 @@
       </p:grpSpPr>
       <p:sp>
         <p:nvSpPr>
-          <p:cNvPr id="163" name="TextShape 1"/>
+          <p:cNvPr id="151" name="TextShape 1"/>
           <p:cNvSpPr/>
           <p:nvPr/>
         </p:nvSpPr>
         <p:spPr>
           <a:xfrm>
             <a:off x="504000" y="301320"/>
-            <a:ext cx="9071280" cy="637200"/>
+            <a:ext cx="9070920" cy="636840"/>
           </a:xfrm>
           <a:prstGeom prst="rect">
             <a:avLst/>
@@ -18128,7 +15988,7 @@
             </a:r>
             <a:endParaRPr b="0" lang="en-US" sz="4400" spc="-1" strike="noStrike">
               <a:solidFill>
-                <a:srgbClr val="55308d"/>
+                <a:srgbClr val="000000"/>
               </a:solidFill>
               <a:latin typeface="Arial"/>
             </a:endParaRPr>
@@ -18137,7 +15997,7 @@
       </p:sp>
       <p:pic>
         <p:nvPicPr>
-          <p:cNvPr id="164" name="" descr=""/>
+          <p:cNvPr id="152" name="" descr=""/>
           <p:cNvPicPr/>
           <p:nvPr/>
         </p:nvPicPr>
@@ -18148,7 +16008,7 @@
         <p:spPr>
           <a:xfrm>
             <a:off x="1371600" y="1106640"/>
-            <a:ext cx="7543800" cy="5065560"/>
+            <a:ext cx="7543440" cy="5065200"/>
           </a:xfrm>
           <a:prstGeom prst="rect">
             <a:avLst/>
@@ -18190,14 +16050,14 @@
       </p:grpSpPr>
       <p:sp>
         <p:nvSpPr>
-          <p:cNvPr id="165" name="TextShape 1"/>
+          <p:cNvPr id="153" name="TextShape 1"/>
           <p:cNvSpPr/>
           <p:nvPr/>
         </p:nvSpPr>
         <p:spPr>
           <a:xfrm>
             <a:off x="504000" y="301320"/>
-            <a:ext cx="9071280" cy="637200"/>
+            <a:ext cx="9070920" cy="636840"/>
           </a:xfrm>
           <a:prstGeom prst="rect">
             <a:avLst/>
@@ -18229,12 +16089,13 @@
                   <a:srgbClr val="158466"/>
                 </a:solidFill>
                 <a:latin typeface="Arial"/>
+                <a:ea typeface="DejaVu Sans"/>
               </a:rPr>
               <a:t>Components of OS</a:t>
             </a:r>
             <a:endParaRPr b="0" lang="en-US" sz="4400" spc="-1" strike="noStrike">
               <a:solidFill>
-                <a:srgbClr val="158466"/>
+                <a:srgbClr val="000000"/>
               </a:solidFill>
               <a:latin typeface="Arial"/>
             </a:endParaRPr>
@@ -18243,7 +16104,7 @@
       </p:sp>
       <p:pic>
         <p:nvPicPr>
-          <p:cNvPr id="166" name="" descr=""/>
+          <p:cNvPr id="154" name="" descr=""/>
           <p:cNvPicPr/>
           <p:nvPr/>
         </p:nvPicPr>
@@ -18254,7 +16115,7 @@
         <p:spPr>
           <a:xfrm>
             <a:off x="1512000" y="1351800"/>
-            <a:ext cx="6191640" cy="5199840"/>
+            <a:ext cx="6191280" cy="5199480"/>
           </a:xfrm>
           <a:prstGeom prst="rect">
             <a:avLst/>
@@ -18296,14 +16157,14 @@
       </p:grpSpPr>
       <p:sp>
         <p:nvSpPr>
-          <p:cNvPr id="167" name="TextShape 1"/>
+          <p:cNvPr id="155" name="TextShape 1"/>
           <p:cNvSpPr/>
           <p:nvPr/>
         </p:nvSpPr>
         <p:spPr>
           <a:xfrm>
             <a:off x="504000" y="301320"/>
-            <a:ext cx="9071280" cy="637200"/>
+            <a:ext cx="9070920" cy="636840"/>
           </a:xfrm>
           <a:prstGeom prst="rect">
             <a:avLst/>
@@ -18334,20 +16195,21 @@
                 <a:srgbClr val="ffffff"/>
               </a:solidFill>
               <a:latin typeface="Arial"/>
+              <a:ea typeface="DejaVu Sans"/>
             </a:endParaRPr>
           </a:p>
         </p:txBody>
       </p:sp>
       <p:sp>
         <p:nvSpPr>
-          <p:cNvPr id="168" name="TextShape 2"/>
+          <p:cNvPr id="156" name="TextShape 2"/>
           <p:cNvSpPr/>
           <p:nvPr/>
         </p:nvSpPr>
         <p:spPr>
           <a:xfrm>
             <a:off x="0" y="936000"/>
-            <a:ext cx="10007640" cy="6233040"/>
+            <a:ext cx="10007280" cy="6232680"/>
           </a:xfrm>
           <a:prstGeom prst="rect">
             <a:avLst/>
@@ -18379,6 +16241,7 @@
                   <a:srgbClr val="000000"/>
                 </a:solidFill>
                 <a:latin typeface="Arial"/>
+                <a:ea typeface="DejaVu Sans"/>
               </a:rPr>
               <a:t>In a Linux system, several concurrent processes attend to different tasks. Each process asks for system resources, be it computing power, memory, network connectivity, or some other resource. The kernel is the big chunk of executable code in charge of handling all such requests. Although the distinction between the different kernel tasks isn’t always clearly marked, the kernel’s role can be split (as shown in Figure) into the following parts:</a:t>
             </a:r>
@@ -18405,6 +16268,7 @@
                 </a:solidFill>
                 <a:uFillTx/>
                 <a:latin typeface="Arial"/>
+                <a:ea typeface="DejaVu Sans"/>
               </a:rPr>
               <a:t>Process management:</a:t>
             </a:r>
@@ -18427,6 +16291,7 @@
                   <a:srgbClr val="000000"/>
                 </a:solidFill>
                 <a:latin typeface="Arial"/>
+                <a:ea typeface="DejaVu Sans"/>
               </a:rPr>
               <a:t>The kernel is in charge of creating and destroying processes and handling their connection to the outside world (input and output). Communication among different processes (through signals, pipes, or inter process communication primitives) is basic to the overall system functionality and is also handled by the kernel. In addition, the scheduler, which controls how processes share the CPU, is part of process management. </a:t>
             </a:r>
@@ -18453,6 +16318,7 @@
                 </a:solidFill>
                 <a:uFillTx/>
                 <a:latin typeface="Arial"/>
+                <a:ea typeface="DejaVu Sans"/>
               </a:rPr>
               <a:t>Memory management:</a:t>
             </a:r>
@@ -18475,6 +16341,7 @@
                   <a:srgbClr val="000000"/>
                 </a:solidFill>
                 <a:latin typeface="Arial"/>
+                <a:ea typeface="DejaVu Sans"/>
               </a:rPr>
               <a:t>The computer’s memory is a major resource, and the policy used to deal with it is a critical one for system performance. The kernel builds up a virtual addressing space for any and all processes on top of the limited available resources.  The different parts of the kernel interact with the memory-management subsystem through a set of function calls, ranging from the simple </a:t>
             </a:r>
@@ -18484,6 +16351,7 @@
                   <a:srgbClr val="000000"/>
                 </a:solidFill>
                 <a:latin typeface="Arial"/>
+                <a:ea typeface="DejaVu Sans"/>
               </a:rPr>
               <a:t>malloc/free pair to much </a:t>
             </a:r>
@@ -18493,6 +16361,7 @@
                   <a:srgbClr val="000000"/>
                 </a:solidFill>
                 <a:latin typeface="Arial"/>
+                <a:ea typeface="DejaVu Sans"/>
               </a:rPr>
               <a:t>more complex functionalities</a:t>
             </a:r>
@@ -18537,14 +16406,14 @@
       </p:sp>
       <p:sp>
         <p:nvSpPr>
-          <p:cNvPr id="169" name=""/>
-          <p:cNvSpPr txBox="1"/>
+          <p:cNvPr id="157" name=""/>
+          <p:cNvSpPr/>
           <p:nvPr/>
         </p:nvSpPr>
         <p:spPr>
           <a:xfrm>
             <a:off x="2624400" y="140760"/>
-            <a:ext cx="4937040" cy="715680"/>
+            <a:ext cx="4936680" cy="715320"/>
           </a:xfrm>
           <a:prstGeom prst="rect">
             <a:avLst/>
@@ -18554,11 +16423,22 @@
             <a:noFill/>
           </a:ln>
         </p:spPr>
+        <p:style>
+          <a:lnRef idx="0"/>
+          <a:fillRef idx="0"/>
+          <a:effectRef idx="0"/>
+          <a:fontRef idx="minor"/>
+        </p:style>
         <p:txBody>
           <a:bodyPr lIns="90000" rIns="90000" tIns="45000" bIns="45000" anchor="t">
             <a:noAutofit/>
           </a:bodyPr>
           <a:p>
+            <a:pPr>
+              <a:lnSpc>
+                <a:spcPct val="100000"/>
+              </a:lnSpc>
+            </a:pPr>
             <a:r>
               <a:rPr b="0" lang="en-IN" sz="4400" spc="-1" strike="noStrike">
                 <a:solidFill>
@@ -18609,14 +16489,14 @@
       </p:grpSpPr>
       <p:sp>
         <p:nvSpPr>
-          <p:cNvPr id="170" name="TextShape 1"/>
+          <p:cNvPr id="158" name="TextShape 1"/>
           <p:cNvSpPr/>
           <p:nvPr/>
         </p:nvSpPr>
         <p:spPr>
           <a:xfrm>
             <a:off x="504000" y="301320"/>
-            <a:ext cx="9071280" cy="637200"/>
+            <a:ext cx="9070920" cy="636840"/>
           </a:xfrm>
           <a:prstGeom prst="rect">
             <a:avLst/>
@@ -18647,20 +16527,21 @@
                 <a:srgbClr val="ffffff"/>
               </a:solidFill>
               <a:latin typeface="Arial"/>
+              <a:ea typeface="DejaVu Sans"/>
             </a:endParaRPr>
           </a:p>
         </p:txBody>
       </p:sp>
       <p:sp>
         <p:nvSpPr>
-          <p:cNvPr id="171" name="TextShape 2"/>
+          <p:cNvPr id="159" name="TextShape 2"/>
           <p:cNvSpPr/>
           <p:nvPr/>
         </p:nvSpPr>
         <p:spPr>
           <a:xfrm>
             <a:off x="-36000" y="2700000"/>
-            <a:ext cx="9935640" cy="3673440"/>
+            <a:ext cx="9935280" cy="3673080"/>
           </a:xfrm>
           <a:prstGeom prst="rect">
             <a:avLst/>
@@ -18693,6 +16574,7 @@
                 </a:solidFill>
                 <a:uFillTx/>
                 <a:latin typeface="Arial"/>
+                <a:ea typeface="DejaVu Sans"/>
               </a:rPr>
               <a:t>Device control:</a:t>
             </a:r>
@@ -18715,6 +16597,7 @@
                   <a:srgbClr val="000000"/>
                 </a:solidFill>
                 <a:latin typeface="Arial"/>
+                <a:ea typeface="DejaVu Sans"/>
               </a:rPr>
               <a:t>Almost every system operation eventually maps to a physical device. With the exception of the processor, memory, and a very few other entities, any and all device control operations are performed by code that is specific to the device being addressed. That code is called a device driver. The kernel must have embedded in it a device driver for every peripheral present on a system, from the hard drive to the keyboard and the tape drive.</a:t>
             </a:r>
@@ -18738,6 +16621,7 @@
                 </a:solidFill>
                 <a:uFillTx/>
                 <a:latin typeface="Arial"/>
+                <a:ea typeface="DejaVu Sans"/>
               </a:rPr>
               <a:t>Networking:</a:t>
             </a:r>
@@ -18777,6 +16661,7 @@
                   <a:srgbClr val="000000"/>
                 </a:solidFill>
                 <a:latin typeface="Arial"/>
+                <a:ea typeface="DejaVu Sans"/>
               </a:rPr>
               <a:t>Networking must be managed by the operating system, because most network operations are not specific to a process: incoming packets are asynchronous events. The packets must be collected, identified, and dispatched before a process takes care of them. The system is in charge of delivering data packets across program and network interfaces, and it must control the execution of programs according to their network activity. Additionally, all the routing and address resolution issues are implemented with in the kernel.</a:t>
             </a:r>
@@ -18791,14 +16676,14 @@
       </p:sp>
       <p:sp>
         <p:nvSpPr>
-          <p:cNvPr id="172" name=""/>
-          <p:cNvSpPr txBox="1"/>
+          <p:cNvPr id="160" name=""/>
+          <p:cNvSpPr/>
           <p:nvPr/>
         </p:nvSpPr>
         <p:spPr>
           <a:xfrm>
             <a:off x="-20520" y="879480"/>
-            <a:ext cx="10226880" cy="1882440"/>
+            <a:ext cx="10226520" cy="1882080"/>
           </a:xfrm>
           <a:prstGeom prst="rect">
             <a:avLst/>
@@ -18808,11 +16693,22 @@
             <a:noFill/>
           </a:ln>
         </p:spPr>
+        <p:style>
+          <a:lnRef idx="0"/>
+          <a:fillRef idx="0"/>
+          <a:effectRef idx="0"/>
+          <a:fontRef idx="minor"/>
+        </p:style>
         <p:txBody>
           <a:bodyPr lIns="90000" rIns="90000" tIns="45000" bIns="45000" anchor="t">
             <a:noAutofit/>
           </a:bodyPr>
           <a:p>
+            <a:pPr>
+              <a:lnSpc>
+                <a:spcPct val="100000"/>
+              </a:lnSpc>
+            </a:pPr>
             <a:r>
               <a:rPr b="1" lang="en-IN" sz="1800" spc="-1" strike="noStrike" u="sng">
                 <a:solidFill>
@@ -18831,6 +16727,11 @@
             </a:endParaRPr>
           </a:p>
           <a:p>
+            <a:pPr>
+              <a:lnSpc>
+                <a:spcPct val="100000"/>
+              </a:lnSpc>
+            </a:pPr>
             <a:r>
               <a:rPr b="0" lang="en-IN" sz="1800" spc="-1" strike="noStrike">
                 <a:solidFill>
@@ -18881,14 +16782,14 @@
       </p:grpSpPr>
       <p:sp>
         <p:nvSpPr>
-          <p:cNvPr id="173" name="TextShape 1"/>
+          <p:cNvPr id="161" name="TextShape 1"/>
           <p:cNvSpPr/>
           <p:nvPr/>
         </p:nvSpPr>
         <p:spPr>
           <a:xfrm>
             <a:off x="504000" y="301320"/>
-            <a:ext cx="9071280" cy="637200"/>
+            <a:ext cx="9070920" cy="636840"/>
           </a:xfrm>
           <a:prstGeom prst="rect">
             <a:avLst/>
@@ -18920,12 +16821,13 @@
                   <a:srgbClr val="ff3838"/>
                 </a:solidFill>
                 <a:latin typeface="Arial"/>
+                <a:ea typeface="DejaVu Sans"/>
               </a:rPr>
               <a:t>User Mode vs Kernel Space</a:t>
             </a:r>
             <a:endParaRPr b="0" lang="en-US" sz="4400" spc="-1" strike="noStrike">
               <a:solidFill>
-                <a:srgbClr val="ff3838"/>
+                <a:srgbClr val="000000"/>
               </a:solidFill>
               <a:latin typeface="Arial"/>
             </a:endParaRPr>
@@ -18934,7 +16836,7 @@
       </p:sp>
       <p:pic>
         <p:nvPicPr>
-          <p:cNvPr id="174" name="" descr=""/>
+          <p:cNvPr id="162" name="" descr=""/>
           <p:cNvPicPr/>
           <p:nvPr/>
         </p:nvPicPr>
@@ -18945,7 +16847,7 @@
         <p:spPr>
           <a:xfrm>
             <a:off x="884520" y="1440000"/>
-            <a:ext cx="7970400" cy="4732200"/>
+            <a:ext cx="7970040" cy="4731840"/>
           </a:xfrm>
           <a:prstGeom prst="rect">
             <a:avLst/>
@@ -18987,14 +16889,14 @@
       </p:grpSpPr>
       <p:sp>
         <p:nvSpPr>
-          <p:cNvPr id="175" name="TextShape 1"/>
+          <p:cNvPr id="163" name="TextShape 1"/>
           <p:cNvSpPr/>
           <p:nvPr/>
         </p:nvSpPr>
         <p:spPr>
           <a:xfrm>
             <a:off x="504000" y="301320"/>
-            <a:ext cx="9071280" cy="637200"/>
+            <a:ext cx="9070920" cy="636840"/>
           </a:xfrm>
           <a:prstGeom prst="rect">
             <a:avLst/>
@@ -19049,7 +16951,7 @@
             </a:r>
             <a:endParaRPr b="0" lang="en-US" sz="4400" spc="-1" strike="noStrike">
               <a:solidFill>
-                <a:srgbClr val="55215b"/>
+                <a:srgbClr val="000000"/>
               </a:solidFill>
               <a:latin typeface="Arial"/>
             </a:endParaRPr>
@@ -19058,14 +16960,14 @@
       </p:sp>
       <p:sp>
         <p:nvSpPr>
-          <p:cNvPr id="176" name="TextShape 2"/>
+          <p:cNvPr id="164" name="TextShape 2"/>
           <p:cNvSpPr/>
           <p:nvPr/>
         </p:nvSpPr>
         <p:spPr>
           <a:xfrm>
             <a:off x="108000" y="1368000"/>
-            <a:ext cx="9935640" cy="5756400"/>
+            <a:ext cx="9935280" cy="5756040"/>
           </a:xfrm>
           <a:prstGeom prst="rect">
             <a:avLst/>
@@ -19299,14 +17201,14 @@
       </p:grpSpPr>
       <p:sp>
         <p:nvSpPr>
-          <p:cNvPr id="177" name="TextShape 1"/>
+          <p:cNvPr id="165" name="TextShape 1"/>
           <p:cNvSpPr/>
           <p:nvPr/>
         </p:nvSpPr>
         <p:spPr>
           <a:xfrm>
             <a:off x="504000" y="301320"/>
-            <a:ext cx="9071280" cy="637200"/>
+            <a:ext cx="9070920" cy="636840"/>
           </a:xfrm>
           <a:prstGeom prst="rect">
             <a:avLst/>
@@ -19337,20 +17239,21 @@
                 <a:srgbClr val="ffffff"/>
               </a:solidFill>
               <a:latin typeface="Arial"/>
+              <a:ea typeface="DejaVu Sans"/>
             </a:endParaRPr>
           </a:p>
         </p:txBody>
       </p:sp>
       <p:sp>
         <p:nvSpPr>
-          <p:cNvPr id="178" name="TextShape 2"/>
+          <p:cNvPr id="166" name="TextShape 2"/>
           <p:cNvSpPr/>
           <p:nvPr/>
         </p:nvSpPr>
         <p:spPr>
           <a:xfrm>
             <a:off x="74520" y="1080000"/>
-            <a:ext cx="9645120" cy="1114200"/>
+            <a:ext cx="9644760" cy="1113840"/>
           </a:xfrm>
           <a:prstGeom prst="rect">
             <a:avLst/>
@@ -19371,6 +17274,11 @@
             <a:noAutofit/>
           </a:bodyPr>
           <a:p>
+            <a:pPr>
+              <a:lnSpc>
+                <a:spcPct val="100000"/>
+              </a:lnSpc>
+            </a:pPr>
             <a:r>
               <a:rPr b="0" lang="en-IN" sz="2000" spc="-1" strike="noStrike">
                 <a:solidFill>
@@ -19392,14 +17300,14 @@
       </p:sp>
       <p:sp>
         <p:nvSpPr>
-          <p:cNvPr id="179" name="TextShape 3"/>
+          <p:cNvPr id="167" name="TextShape 3"/>
           <p:cNvSpPr/>
           <p:nvPr/>
         </p:nvSpPr>
         <p:spPr>
           <a:xfrm>
             <a:off x="74520" y="2016000"/>
-            <a:ext cx="9717120" cy="1626120"/>
+            <a:ext cx="9716760" cy="1625760"/>
           </a:xfrm>
           <a:prstGeom prst="rect">
             <a:avLst/>
@@ -19430,20 +17338,21 @@
                 <a:srgbClr val="000000"/>
               </a:solidFill>
               <a:latin typeface="Arial"/>
+              <a:ea typeface="DejaVu Sans"/>
             </a:endParaRPr>
           </a:p>
         </p:txBody>
       </p:sp>
       <p:sp>
         <p:nvSpPr>
-          <p:cNvPr id="180" name=""/>
-          <p:cNvSpPr txBox="1"/>
+          <p:cNvPr id="168" name=""/>
+          <p:cNvSpPr/>
           <p:nvPr/>
         </p:nvSpPr>
         <p:spPr>
           <a:xfrm>
             <a:off x="129960" y="2605680"/>
-            <a:ext cx="9790920" cy="1700280"/>
+            <a:ext cx="9790560" cy="1699920"/>
           </a:xfrm>
           <a:prstGeom prst="rect">
             <a:avLst/>
@@ -19453,11 +17362,22 @@
             <a:noFill/>
           </a:ln>
         </p:spPr>
+        <p:style>
+          <a:lnRef idx="0"/>
+          <a:fillRef idx="0"/>
+          <a:effectRef idx="0"/>
+          <a:fontRef idx="minor"/>
+        </p:style>
         <p:txBody>
           <a:bodyPr lIns="0" rIns="0" tIns="0" bIns="0" anchor="t">
             <a:noAutofit/>
           </a:bodyPr>
           <a:p>
+            <a:pPr>
+              <a:lnSpc>
+                <a:spcPct val="100000"/>
+              </a:lnSpc>
+            </a:pPr>
             <a:r>
               <a:rPr b="0" lang="en-IN" sz="2000" spc="-1" strike="noStrike">
                 <a:solidFill>
@@ -19467,12 +17387,11 @@
               </a:rPr>
               <a:t>Linux transfers execution from user space to kernel space whenever an application issues a system call or is suspended by a hardware interrupt. Kernel code executing a system call is working in the context of a process—it operates on behalf of the calling process and is able to access data in the process’s address space. Code that handles interrupts, on the other hand, is asynchronous with respect to processes and is not related to any particular process.</a:t>
             </a:r>
-            <a:endParaRPr b="0" lang="en-IN" sz="2000" spc="-1" strike="noStrike">
-              <a:solidFill>
-                <a:srgbClr val="000000"/>
-              </a:solidFill>
-              <a:latin typeface="Arial"/>
-              <a:ea typeface="Noto Sans CJK SC"/>
+            <a:endParaRPr b="0" lang="en-US" sz="2000" spc="-1" strike="noStrike">
+              <a:solidFill>
+                <a:srgbClr val="000000"/>
+              </a:solidFill>
+              <a:latin typeface="Arial"/>
             </a:endParaRPr>
           </a:p>
         </p:txBody>
@@ -19509,14 +17428,14 @@
       </p:grpSpPr>
       <p:sp>
         <p:nvSpPr>
-          <p:cNvPr id="181" name="TextShape 1"/>
+          <p:cNvPr id="169" name="TextShape 1"/>
           <p:cNvSpPr/>
           <p:nvPr/>
         </p:nvSpPr>
         <p:spPr>
           <a:xfrm>
             <a:off x="504000" y="301320"/>
-            <a:ext cx="9071280" cy="637200"/>
+            <a:ext cx="9070920" cy="636840"/>
           </a:xfrm>
           <a:prstGeom prst="rect">
             <a:avLst/>
@@ -19571,7 +17490,7 @@
             </a:r>
             <a:endParaRPr b="0" lang="en-US" sz="4400" spc="-1" strike="noStrike">
               <a:solidFill>
-                <a:srgbClr val="1e6a39"/>
+                <a:srgbClr val="000000"/>
               </a:solidFill>
               <a:latin typeface="Arial"/>
             </a:endParaRPr>
@@ -19580,14 +17499,14 @@
       </p:sp>
       <p:sp>
         <p:nvSpPr>
-          <p:cNvPr id="182" name="TextShape 2"/>
+          <p:cNvPr id="170" name="TextShape 2"/>
           <p:cNvSpPr/>
           <p:nvPr/>
         </p:nvSpPr>
         <p:spPr>
           <a:xfrm>
             <a:off x="32400" y="1080000"/>
-            <a:ext cx="9615240" cy="4441320"/>
+            <a:ext cx="9614880" cy="4440960"/>
           </a:xfrm>
           <a:prstGeom prst="rect">
             <a:avLst/>
